--- a/python-course-ppt/逐节课件/Python讲授课件-单元11.pptx
+++ b/python-course-ppt/逐节课件/Python讲授课件-单元11.pptx
@@ -359,6 +359,104 @@
           </a:p>
         </p:txBody>
       </p:sp>
+      <p:sp>
+        <p:nvSpPr>
+          <p:cNvPr id="2" name="讲课提示"/>
+          <p:cNvSpPr txBox="1"/>
+          <p:nvPr/>
+        </p:nvSpPr>
+        <p:spPr>
+          <a:xfrm>
+            <a:off x="457200" y="457200"/>
+            <a:ext cx="6858000" cy="4800600"/>
+          </a:xfrm>
+          <a:prstGeom prst="rect">
+            <a:avLst/>
+          </a:prstGeom>
+        </p:spPr>
+        <p:txBody>
+          <a:bodyPr wrap="square"/>
+          <a:lstStyle/>
+          <a:p>
+            <a:r>
+              <a:rPr lang="zh-CN" dirty="0"/>
+              <a:t>单元 11 · 单元 11 · 阶段 1 总复习 + 关卡验收</a:t>
+            </a:r>
+          </a:p>
+          <a:p>
+            <a:r>
+              <a:rPr lang="zh-CN" dirty="0"/>
+              <a:t/>
+            </a:r>
+          </a:p>
+          <a:p>
+            <a:r>
+              <a:rPr lang="zh-CN" dirty="0"/>
+              <a:t>本单元包含以下课节：</a:t>
+            </a:r>
+          </a:p>
+          <a:p>
+            <a:r>
+              <a:rPr lang="zh-CN" dirty="0"/>
+              <a:t>· 第 57 节 知识串讲与能力地图</a:t>
+            </a:r>
+          </a:p>
+          <a:p>
+            <a:r>
+              <a:rPr lang="zh-CN" dirty="0"/>
+              <a:t>· 第 58 节 排错思路与项目骨架</a:t>
+            </a:r>
+          </a:p>
+          <a:p>
+            <a:r>
+              <a:rPr lang="zh-CN" dirty="0"/>
+              <a:t>· 第 59 节 四个复习示例串讲</a:t>
+            </a:r>
+          </a:p>
+          <a:p>
+            <a:r>
+              <a:rPr lang="zh-CN" dirty="0"/>
+              <a:t>· 第 60 节 ★ 综合项目 1：待办管理器</a:t>
+            </a:r>
+          </a:p>
+          <a:p>
+            <a:r>
+              <a:rPr lang="zh-CN" dirty="0"/>
+              <a:t>· 第 61 节 ★ 综合项目 2：成绩分析器</a:t>
+            </a:r>
+          </a:p>
+          <a:p>
+            <a:r>
+              <a:rPr lang="zh-CN" dirty="0"/>
+              <a:t>· 第 62 节 ★ 综合项目 3：文本统计工具</a:t>
+            </a:r>
+          </a:p>
+          <a:p>
+            <a:r>
+              <a:rPr lang="zh-CN" dirty="0"/>
+              <a:t>· 第 63 节 ★ 关卡 1 现场测评</a:t>
+            </a:r>
+          </a:p>
+          <a:p>
+            <a:r>
+              <a:rPr lang="zh-CN" dirty="0"/>
+              <a:t>· 第 64 节 结业检查与下一阶段</a:t>
+            </a:r>
+          </a:p>
+          <a:p>
+            <a:r>
+              <a:rPr lang="zh-CN" dirty="0"/>
+              <a:t/>
+            </a:r>
+          </a:p>
+          <a:p>
+            <a:r>
+              <a:rPr lang="zh-CN" dirty="0"/>
+              <a:t>开场用 3 分钟讲清：这个单元学完能做出什么，最后会被关卡怎么验。</a:t>
+            </a:r>
+          </a:p>
+        </p:txBody>
+      </p:sp>
     </p:spTree>
   </p:cSld>
   <p:clrMapOvr>
@@ -482,6 +580,104 @@
           </a:p>
         </p:txBody>
       </p:sp>
+      <p:sp>
+        <p:nvSpPr>
+          <p:cNvPr id="2" name="讲课提示"/>
+          <p:cNvSpPr txBox="1"/>
+          <p:nvPr/>
+        </p:nvSpPr>
+        <p:spPr>
+          <a:xfrm>
+            <a:off x="457200" y="457200"/>
+            <a:ext cx="6858000" cy="4800600"/>
+          </a:xfrm>
+          <a:prstGeom prst="rect">
+            <a:avLst/>
+          </a:prstGeom>
+        </p:spPr>
+        <p:txBody>
+          <a:bodyPr wrap="square"/>
+          <a:lstStyle/>
+          <a:p>
+            <a:r>
+              <a:rPr lang="zh-CN" dirty="0"/>
+              <a:t>第 61 节 · ★ 综合项目 2：成绩分析器</a:t>
+            </a:r>
+          </a:p>
+          <a:p>
+            <a:r>
+              <a:rPr lang="zh-CN" dirty="0"/>
+              <a:t>单元 11 · 阶段 1 总复习 + 关卡验收 · W13</a:t>
+            </a:r>
+          </a:p>
+          <a:p>
+            <a:r>
+              <a:rPr lang="zh-CN" dirty="0"/>
+              <a:t/>
+            </a:r>
+          </a:p>
+          <a:p>
+            <a:r>
+              <a:rPr lang="zh-CN" dirty="0"/>
+              <a:t>学习目标：独立写出一个能统计平均分、最高分并画图的成绩分析器</a:t>
+            </a:r>
+          </a:p>
+          <a:p>
+            <a:r>
+              <a:rPr lang="zh-CN" dirty="0"/>
+              <a:t/>
+            </a:r>
+          </a:p>
+          <a:p>
+            <a:r>
+              <a:rPr lang="zh-CN" dirty="0"/>
+              <a:t>课堂实操（40 分钟，不看答案）：</a:t>
+            </a:r>
+          </a:p>
+          <a:p>
+            <a:r>
+              <a:rPr lang="zh-CN" dirty="0"/>
+              <a:t>· 先限时 40 分钟自己写，再看参考答案对照</a:t>
+            </a:r>
+          </a:p>
+          <a:p>
+            <a:r>
+              <a:rPr lang="zh-CN" dirty="0"/>
+              <a:t>· 对照参考答案补齐自己漏掉的功能</a:t>
+            </a:r>
+          </a:p>
+          <a:p>
+            <a:r>
+              <a:rPr lang="zh-CN" dirty="0"/>
+              <a:t/>
+            </a:r>
+          </a:p>
+          <a:p>
+            <a:r>
+              <a:rPr lang="zh-CN" dirty="0"/>
+              <a:t>课后作业：</a:t>
+            </a:r>
+          </a:p>
+          <a:p>
+            <a:r>
+              <a:rPr lang="zh-CN" dirty="0"/>
+              <a:t>· 完成综合项目 2 及其测试文件</a:t>
+            </a:r>
+          </a:p>
+          <a:p>
+            <a:r>
+              <a:rPr lang="zh-CN" dirty="0"/>
+              <a:t/>
+            </a:r>
+          </a:p>
+          <a:p>
+            <a:r>
+              <a:rPr lang="zh-CN" dirty="0"/>
+              <a:t>节奏：讲 20 分钟 → 学员自己敲 40 分钟（不看答案）→ 对讲评自查 20 分钟 → 写作业 10 分钟。</a:t>
+            </a:r>
+          </a:p>
+        </p:txBody>
+      </p:sp>
     </p:spTree>
   </p:cSld>
   <p:clrMapOvr>
@@ -575,6 +771,74 @@
           </a:p>
         </p:txBody>
       </p:sp>
+      <p:sp>
+        <p:nvSpPr>
+          <p:cNvPr id="2" name="讲课提示"/>
+          <p:cNvSpPr txBox="1"/>
+          <p:nvPr/>
+        </p:nvSpPr>
+        <p:spPr>
+          <a:xfrm>
+            <a:off x="457200" y="457200"/>
+            <a:ext cx="6858000" cy="4800600"/>
+          </a:xfrm>
+          <a:prstGeom prst="rect">
+            <a:avLst/>
+          </a:prstGeom>
+        </p:spPr>
+        <p:txBody>
+          <a:bodyPr wrap="square"/>
+          <a:lstStyle/>
+          <a:p>
+            <a:r>
+              <a:rPr lang="zh-CN" dirty="0"/>
+              <a:t>第 61 节 · 核心知识点：★ 综合项目 2：成绩分析器</a:t>
+            </a:r>
+          </a:p>
+          <a:p>
+            <a:r>
+              <a:rPr lang="zh-CN" dirty="0"/>
+              <a:t/>
+            </a:r>
+          </a:p>
+          <a:p>
+            <a:r>
+              <a:rPr lang="zh-CN" dirty="0"/>
+              <a:t>讲这一页时：先让学生说出上节课的结论，再逐块讲要点。</a:t>
+            </a:r>
+          </a:p>
+          <a:p>
+            <a:r>
+              <a:rPr lang="zh-CN" dirty="0"/>
+              <a:t>每讲完一块，问一句「这一步如果写错了，报错会长什么样？」——把错误提前讲。</a:t>
+            </a:r>
+          </a:p>
+          <a:p>
+            <a:r>
+              <a:rPr lang="zh-CN" dirty="0"/>
+              <a:t/>
+            </a:r>
+          </a:p>
+          <a:p>
+            <a:r>
+              <a:rPr lang="zh-CN" dirty="0"/>
+              <a:t>本节目标：独立写出一个能统计平均分、最高分并画图的成绩分析器</a:t>
+            </a:r>
+          </a:p>
+          <a:p>
+            <a:r>
+              <a:rPr lang="zh-CN" dirty="0"/>
+              <a:t/>
+            </a:r>
+          </a:p>
+          <a:p>
+            <a:r>
+              <a:rPr lang="zh-CN" dirty="0"/>
+              <a:t>看不到懂的地方，回讲义对应小节读一遍，再回来对着这页复述一次——能讲出来才算真懂。</a:t>
+            </a:r>
+          </a:p>
+        </p:txBody>
+      </p:sp>
     </p:spTree>
   </p:cSld>
   <p:clrMapOvr>
@@ -692,6 +956,98 @@
           </a:p>
         </p:txBody>
       </p:sp>
+      <p:sp>
+        <p:nvSpPr>
+          <p:cNvPr id="2" name="讲课提示"/>
+          <p:cNvSpPr txBox="1"/>
+          <p:nvPr/>
+        </p:nvSpPr>
+        <p:spPr>
+          <a:xfrm>
+            <a:off x="457200" y="457200"/>
+            <a:ext cx="6858000" cy="4800600"/>
+          </a:xfrm>
+          <a:prstGeom prst="rect">
+            <a:avLst/>
+          </a:prstGeom>
+        </p:spPr>
+        <p:txBody>
+          <a:bodyPr wrap="square"/>
+          <a:lstStyle/>
+          <a:p>
+            <a:r>
+              <a:rPr lang="zh-CN" dirty="0"/>
+              <a:t>第 62 节 · ★ 综合项目 3：文本统计工具</a:t>
+            </a:r>
+          </a:p>
+          <a:p>
+            <a:r>
+              <a:rPr lang="zh-CN" dirty="0"/>
+              <a:t>单元 11 · 阶段 1 总复习 + 关卡验收 · W13</a:t>
+            </a:r>
+          </a:p>
+          <a:p>
+            <a:r>
+              <a:rPr lang="zh-CN" dirty="0"/>
+              <a:t/>
+            </a:r>
+          </a:p>
+          <a:p>
+            <a:r>
+              <a:rPr lang="zh-CN" dirty="0"/>
+              <a:t>学习目标：独立写出一个能统计词频并输出报告的文本工具</a:t>
+            </a:r>
+          </a:p>
+          <a:p>
+            <a:r>
+              <a:rPr lang="zh-CN" dirty="0"/>
+              <a:t/>
+            </a:r>
+          </a:p>
+          <a:p>
+            <a:r>
+              <a:rPr lang="zh-CN" dirty="0"/>
+              <a:t>课堂实操（40 分钟，不看答案）：</a:t>
+            </a:r>
+          </a:p>
+          <a:p>
+            <a:r>
+              <a:rPr lang="zh-CN" dirty="0"/>
+              <a:t>· 先限时 40 分钟自己写，再看参考答案对照</a:t>
+            </a:r>
+          </a:p>
+          <a:p>
+            <a:r>
+              <a:rPr lang="zh-CN" dirty="0"/>
+              <a:t/>
+            </a:r>
+          </a:p>
+          <a:p>
+            <a:r>
+              <a:rPr lang="zh-CN" dirty="0"/>
+              <a:t>课后作业：</a:t>
+            </a:r>
+          </a:p>
+          <a:p>
+            <a:r>
+              <a:rPr lang="zh-CN" dirty="0"/>
+              <a:t>· 完成综合项目 3 及其测试文件</a:t>
+            </a:r>
+          </a:p>
+          <a:p>
+            <a:r>
+              <a:rPr lang="zh-CN" dirty="0"/>
+              <a:t/>
+            </a:r>
+          </a:p>
+          <a:p>
+            <a:r>
+              <a:rPr lang="zh-CN" dirty="0"/>
+              <a:t>节奏：讲 20 分钟 → 学员自己敲 40 分钟（不看答案）→ 对讲评自查 20 分钟 → 写作业 10 分钟。</a:t>
+            </a:r>
+          </a:p>
+        </p:txBody>
+      </p:sp>
     </p:spTree>
   </p:cSld>
   <p:clrMapOvr>
@@ -785,6 +1141,74 @@
           </a:p>
         </p:txBody>
       </p:sp>
+      <p:sp>
+        <p:nvSpPr>
+          <p:cNvPr id="2" name="讲课提示"/>
+          <p:cNvSpPr txBox="1"/>
+          <p:nvPr/>
+        </p:nvSpPr>
+        <p:spPr>
+          <a:xfrm>
+            <a:off x="457200" y="457200"/>
+            <a:ext cx="6858000" cy="4800600"/>
+          </a:xfrm>
+          <a:prstGeom prst="rect">
+            <a:avLst/>
+          </a:prstGeom>
+        </p:spPr>
+        <p:txBody>
+          <a:bodyPr wrap="square"/>
+          <a:lstStyle/>
+          <a:p>
+            <a:r>
+              <a:rPr lang="zh-CN" dirty="0"/>
+              <a:t>第 62 节 · 核心知识点：★ 综合项目 3：文本统计工具</a:t>
+            </a:r>
+          </a:p>
+          <a:p>
+            <a:r>
+              <a:rPr lang="zh-CN" dirty="0"/>
+              <a:t/>
+            </a:r>
+          </a:p>
+          <a:p>
+            <a:r>
+              <a:rPr lang="zh-CN" dirty="0"/>
+              <a:t>讲这一页时：先让学生说出上节课的结论，再逐块讲要点。</a:t>
+            </a:r>
+          </a:p>
+          <a:p>
+            <a:r>
+              <a:rPr lang="zh-CN" dirty="0"/>
+              <a:t>每讲完一块，问一句「这一步如果写错了，报错会长什么样？」——把错误提前讲。</a:t>
+            </a:r>
+          </a:p>
+          <a:p>
+            <a:r>
+              <a:rPr lang="zh-CN" dirty="0"/>
+              <a:t/>
+            </a:r>
+          </a:p>
+          <a:p>
+            <a:r>
+              <a:rPr lang="zh-CN" dirty="0"/>
+              <a:t>本节目标：独立写出一个能统计词频并输出报告的文本工具</a:t>
+            </a:r>
+          </a:p>
+          <a:p>
+            <a:r>
+              <a:rPr lang="zh-CN" dirty="0"/>
+              <a:t/>
+            </a:r>
+          </a:p>
+          <a:p>
+            <a:r>
+              <a:rPr lang="zh-CN" dirty="0"/>
+              <a:t>看不到懂的地方，回讲义对应小节读一遍，再回来对着这页复述一次——能讲出来才算真懂。</a:t>
+            </a:r>
+          </a:p>
+        </p:txBody>
+      </p:sp>
     </p:spTree>
   </p:cSld>
   <p:clrMapOvr>
@@ -902,6 +1326,98 @@
           </a:p>
         </p:txBody>
       </p:sp>
+      <p:sp>
+        <p:nvSpPr>
+          <p:cNvPr id="2" name="讲课提示"/>
+          <p:cNvSpPr txBox="1"/>
+          <p:nvPr/>
+        </p:nvSpPr>
+        <p:spPr>
+          <a:xfrm>
+            <a:off x="457200" y="457200"/>
+            <a:ext cx="6858000" cy="4800600"/>
+          </a:xfrm>
+          <a:prstGeom prst="rect">
+            <a:avLst/>
+          </a:prstGeom>
+        </p:spPr>
+        <p:txBody>
+          <a:bodyPr wrap="square"/>
+          <a:lstStyle/>
+          <a:p>
+            <a:r>
+              <a:rPr lang="zh-CN" dirty="0"/>
+              <a:t>第 63 节 · ★ 关卡 1 现场测评</a:t>
+            </a:r>
+          </a:p>
+          <a:p>
+            <a:r>
+              <a:rPr lang="zh-CN" dirty="0"/>
+              <a:t>单元 11 · 阶段 1 总复习 + 关卡验收 · W13</a:t>
+            </a:r>
+          </a:p>
+          <a:p>
+            <a:r>
+              <a:rPr lang="zh-CN" dirty="0"/>
+              <a:t/>
+            </a:r>
+          </a:p>
+          <a:p>
+            <a:r>
+              <a:rPr lang="zh-CN" dirty="0"/>
+              <a:t>学习目标：限时 2 小时完成四条硬指标，证明能独立动手</a:t>
+            </a:r>
+          </a:p>
+          <a:p>
+            <a:r>
+              <a:rPr lang="zh-CN" dirty="0"/>
+              <a:t/>
+            </a:r>
+          </a:p>
+          <a:p>
+            <a:r>
+              <a:rPr lang="zh-CN" dirty="0"/>
+              <a:t>课堂实操（40 分钟，不看答案）：</a:t>
+            </a:r>
+          </a:p>
+          <a:p>
+            <a:r>
+              <a:rPr lang="zh-CN" dirty="0"/>
+              <a:t>· 现场测评，全程不查资料，2 小时</a:t>
+            </a:r>
+          </a:p>
+          <a:p>
+            <a:r>
+              <a:rPr lang="zh-CN" dirty="0"/>
+              <a:t/>
+            </a:r>
+          </a:p>
+          <a:p>
+            <a:r>
+              <a:rPr lang="zh-CN" dirty="0"/>
+              <a:t>课后作业：</a:t>
+            </a:r>
+          </a:p>
+          <a:p>
+            <a:r>
+              <a:rPr lang="zh-CN" dirty="0"/>
+              <a:t>· ★ 关卡 1 四项逐条自测</a:t>
+            </a:r>
+          </a:p>
+          <a:p>
+            <a:r>
+              <a:rPr lang="zh-CN" dirty="0"/>
+              <a:t/>
+            </a:r>
+          </a:p>
+          <a:p>
+            <a:r>
+              <a:rPr lang="zh-CN" dirty="0"/>
+              <a:t>节奏：讲 20 分钟 → 学员自己敲 40 分钟（不看答案）→ 对讲评自查 20 分钟 → 写作业 10 分钟。</a:t>
+            </a:r>
+          </a:p>
+        </p:txBody>
+      </p:sp>
     </p:spTree>
   </p:cSld>
   <p:clrMapOvr>
@@ -995,6 +1511,74 @@
           </a:p>
         </p:txBody>
       </p:sp>
+      <p:sp>
+        <p:nvSpPr>
+          <p:cNvPr id="2" name="讲课提示"/>
+          <p:cNvSpPr txBox="1"/>
+          <p:nvPr/>
+        </p:nvSpPr>
+        <p:spPr>
+          <a:xfrm>
+            <a:off x="457200" y="457200"/>
+            <a:ext cx="6858000" cy="4800600"/>
+          </a:xfrm>
+          <a:prstGeom prst="rect">
+            <a:avLst/>
+          </a:prstGeom>
+        </p:spPr>
+        <p:txBody>
+          <a:bodyPr wrap="square"/>
+          <a:lstStyle/>
+          <a:p>
+            <a:r>
+              <a:rPr lang="zh-CN" dirty="0"/>
+              <a:t>第 63 节 · 核心知识点：★ 关卡 1 现场测评</a:t>
+            </a:r>
+          </a:p>
+          <a:p>
+            <a:r>
+              <a:rPr lang="zh-CN" dirty="0"/>
+              <a:t/>
+            </a:r>
+          </a:p>
+          <a:p>
+            <a:r>
+              <a:rPr lang="zh-CN" dirty="0"/>
+              <a:t>讲这一页时：先让学生说出上节课的结论，再逐块讲要点。</a:t>
+            </a:r>
+          </a:p>
+          <a:p>
+            <a:r>
+              <a:rPr lang="zh-CN" dirty="0"/>
+              <a:t>每讲完一块，问一句「这一步如果写错了，报错会长什么样？」——把错误提前讲。</a:t>
+            </a:r>
+          </a:p>
+          <a:p>
+            <a:r>
+              <a:rPr lang="zh-CN" dirty="0"/>
+              <a:t/>
+            </a:r>
+          </a:p>
+          <a:p>
+            <a:r>
+              <a:rPr lang="zh-CN" dirty="0"/>
+              <a:t>本节目标：限时 2 小时完成四条硬指标，证明能独立动手</a:t>
+            </a:r>
+          </a:p>
+          <a:p>
+            <a:r>
+              <a:rPr lang="zh-CN" dirty="0"/>
+              <a:t/>
+            </a:r>
+          </a:p>
+          <a:p>
+            <a:r>
+              <a:rPr lang="zh-CN" dirty="0"/>
+              <a:t>看不到懂的地方，回讲义对应小节读一遍，再回来对着这页复述一次——能讲出来才算真懂。</a:t>
+            </a:r>
+          </a:p>
+        </p:txBody>
+      </p:sp>
     </p:spTree>
   </p:cSld>
   <p:clrMapOvr>
@@ -1124,6 +1708,110 @@
           </a:p>
         </p:txBody>
       </p:sp>
+      <p:sp>
+        <p:nvSpPr>
+          <p:cNvPr id="2" name="讲课提示"/>
+          <p:cNvSpPr txBox="1"/>
+          <p:nvPr/>
+        </p:nvSpPr>
+        <p:spPr>
+          <a:xfrm>
+            <a:off x="457200" y="457200"/>
+            <a:ext cx="6858000" cy="4800600"/>
+          </a:xfrm>
+          <a:prstGeom prst="rect">
+            <a:avLst/>
+          </a:prstGeom>
+        </p:spPr>
+        <p:txBody>
+          <a:bodyPr wrap="square"/>
+          <a:lstStyle/>
+          <a:p>
+            <a:r>
+              <a:rPr lang="zh-CN" dirty="0"/>
+              <a:t>第 64 节 · 结业检查与下一阶段</a:t>
+            </a:r>
+          </a:p>
+          <a:p>
+            <a:r>
+              <a:rPr lang="zh-CN" dirty="0"/>
+              <a:t>单元 11 · 阶段 1 总复习 + 关卡验收 · W13</a:t>
+            </a:r>
+          </a:p>
+          <a:p>
+            <a:r>
+              <a:rPr lang="zh-CN" dirty="0"/>
+              <a:t/>
+            </a:r>
+          </a:p>
+          <a:p>
+            <a:r>
+              <a:rPr lang="zh-CN" dirty="0"/>
+              <a:t>学习目标：确认四条验收是否全通过，明确阶段 1 的能力边界与下一步</a:t>
+            </a:r>
+          </a:p>
+          <a:p>
+            <a:r>
+              <a:rPr lang="zh-CN" dirty="0"/>
+              <a:t/>
+            </a:r>
+          </a:p>
+          <a:p>
+            <a:r>
+              <a:rPr lang="zh-CN" dirty="0"/>
+              <a:t>课堂实操（40 分钟，不看答案）：</a:t>
+            </a:r>
+          </a:p>
+          <a:p>
+            <a:r>
+              <a:rPr lang="zh-CN" dirty="0"/>
+              <a:t>· 对照四条硬指标逐条打勾</a:t>
+            </a:r>
+          </a:p>
+          <a:p>
+            <a:r>
+              <a:rPr lang="zh-CN" dirty="0"/>
+              <a:t>· 没通过的项定下补齐计划</a:t>
+            </a:r>
+          </a:p>
+          <a:p>
+            <a:r>
+              <a:rPr lang="zh-CN" dirty="0"/>
+              <a:t/>
+            </a:r>
+          </a:p>
+          <a:p>
+            <a:r>
+              <a:rPr lang="zh-CN" dirty="0"/>
+              <a:t>课后作业：</a:t>
+            </a:r>
+          </a:p>
+          <a:p>
+            <a:r>
+              <a:rPr lang="zh-CN" dirty="0"/>
+              <a:t>· 完成综合自测 10 题</a:t>
+            </a:r>
+          </a:p>
+          <a:p>
+            <a:r>
+              <a:rPr lang="zh-CN" dirty="0"/>
+              <a:t>· 产出：一份阶段 1 学习总结</a:t>
+            </a:r>
+          </a:p>
+          <a:p>
+            <a:r>
+              <a:rPr lang="zh-CN" dirty="0"/>
+              <a:t/>
+            </a:r>
+          </a:p>
+          <a:p>
+            <a:r>
+              <a:rPr lang="zh-CN" dirty="0"/>
+              <a:t>节奏：讲 20 分钟 → 学员自己敲 40 分钟（不看答案）→ 对讲评自查 20 分钟 → 写作业 10 分钟。</a:t>
+            </a:r>
+          </a:p>
+        </p:txBody>
+      </p:sp>
     </p:spTree>
   </p:cSld>
   <p:clrMapOvr>
@@ -1217,6 +1905,74 @@
           </a:p>
         </p:txBody>
       </p:sp>
+      <p:sp>
+        <p:nvSpPr>
+          <p:cNvPr id="2" name="讲课提示"/>
+          <p:cNvSpPr txBox="1"/>
+          <p:nvPr/>
+        </p:nvSpPr>
+        <p:spPr>
+          <a:xfrm>
+            <a:off x="457200" y="457200"/>
+            <a:ext cx="6858000" cy="4800600"/>
+          </a:xfrm>
+          <a:prstGeom prst="rect">
+            <a:avLst/>
+          </a:prstGeom>
+        </p:spPr>
+        <p:txBody>
+          <a:bodyPr wrap="square"/>
+          <a:lstStyle/>
+          <a:p>
+            <a:r>
+              <a:rPr lang="zh-CN" dirty="0"/>
+              <a:t>第 64 节 · 核心知识点：结业检查与下一阶段</a:t>
+            </a:r>
+          </a:p>
+          <a:p>
+            <a:r>
+              <a:rPr lang="zh-CN" dirty="0"/>
+              <a:t/>
+            </a:r>
+          </a:p>
+          <a:p>
+            <a:r>
+              <a:rPr lang="zh-CN" dirty="0"/>
+              <a:t>讲这一页时：先让学生说出上节课的结论，再逐块讲要点。</a:t>
+            </a:r>
+          </a:p>
+          <a:p>
+            <a:r>
+              <a:rPr lang="zh-CN" dirty="0"/>
+              <a:t>每讲完一块，问一句「这一步如果写错了，报错会长什么样？」——把错误提前讲。</a:t>
+            </a:r>
+          </a:p>
+          <a:p>
+            <a:r>
+              <a:rPr lang="zh-CN" dirty="0"/>
+              <a:t/>
+            </a:r>
+          </a:p>
+          <a:p>
+            <a:r>
+              <a:rPr lang="zh-CN" dirty="0"/>
+              <a:t>本节目标：确认四条验收是否全通过，明确阶段 1 的能力边界与下一步</a:t>
+            </a:r>
+          </a:p>
+          <a:p>
+            <a:r>
+              <a:rPr lang="zh-CN" dirty="0"/>
+              <a:t/>
+            </a:r>
+          </a:p>
+          <a:p>
+            <a:r>
+              <a:rPr lang="zh-CN" dirty="0"/>
+              <a:t>看不到懂的地方，回讲义对应小节读一遍，再回来对着这页复述一次——能讲出来才算真懂。</a:t>
+            </a:r>
+          </a:p>
+        </p:txBody>
+      </p:sp>
     </p:spTree>
   </p:cSld>
   <p:clrMapOvr>
@@ -1286,6 +2042,50 @@
           </a:p>
         </p:txBody>
       </p:sp>
+      <p:sp>
+        <p:nvSpPr>
+          <p:cNvPr id="2" name="讲课提示"/>
+          <p:cNvSpPr txBox="1"/>
+          <p:nvPr/>
+        </p:nvSpPr>
+        <p:spPr>
+          <a:xfrm>
+            <a:off x="457200" y="457200"/>
+            <a:ext cx="6858000" cy="4800600"/>
+          </a:xfrm>
+          <a:prstGeom prst="rect">
+            <a:avLst/>
+          </a:prstGeom>
+        </p:spPr>
+        <p:txBody>
+          <a:bodyPr wrap="square"/>
+          <a:lstStyle/>
+          <a:p>
+            <a:r>
+              <a:rPr lang="zh-CN" dirty="0"/>
+              <a:t>单元 11 小结 · 单元 11 · 小结</a:t>
+            </a:r>
+          </a:p>
+          <a:p>
+            <a:r>
+              <a:rPr lang="zh-CN" dirty="0"/>
+              <a:t/>
+            </a:r>
+          </a:p>
+          <a:p>
+            <a:r>
+              <a:rPr lang="zh-CN" dirty="0"/>
+              <a:t>收尾动作：让学生合上讲义，口述本单元三个最重要的结论；说不出来的，回对应课节。</a:t>
+            </a:r>
+          </a:p>
+          <a:p>
+            <a:r>
+              <a:rPr lang="zh-CN" dirty="0"/>
+              <a:t>然后当场勾一遍本单元课节的「已完成」，没打勾的进下一单元前补掉。</a:t>
+            </a:r>
+          </a:p>
+        </p:txBody>
+      </p:sp>
     </p:spTree>
   </p:cSld>
   <p:clrMapOvr>
@@ -1409,6 +2209,104 @@
           </a:p>
         </p:txBody>
       </p:sp>
+      <p:sp>
+        <p:nvSpPr>
+          <p:cNvPr id="2" name="讲课提示"/>
+          <p:cNvSpPr txBox="1"/>
+          <p:nvPr/>
+        </p:nvSpPr>
+        <p:spPr>
+          <a:xfrm>
+            <a:off x="457200" y="457200"/>
+            <a:ext cx="6858000" cy="4800600"/>
+          </a:xfrm>
+          <a:prstGeom prst="rect">
+            <a:avLst/>
+          </a:prstGeom>
+        </p:spPr>
+        <p:txBody>
+          <a:bodyPr wrap="square"/>
+          <a:lstStyle/>
+          <a:p>
+            <a:r>
+              <a:rPr lang="zh-CN" dirty="0"/>
+              <a:t>第 57 节 · 知识串讲与能力地图</a:t>
+            </a:r>
+          </a:p>
+          <a:p>
+            <a:r>
+              <a:rPr lang="zh-CN" dirty="0"/>
+              <a:t>单元 11 · 阶段 1 总复习 + 关卡验收 · W13</a:t>
+            </a:r>
+          </a:p>
+          <a:p>
+            <a:r>
+              <a:rPr lang="zh-CN" dirty="0"/>
+              <a:t/>
+            </a:r>
+          </a:p>
+          <a:p>
+            <a:r>
+              <a:rPr lang="zh-CN" dirty="0"/>
+              <a:t>学习目标：把 11 章串成一条线，能说出每个知识点解决什么问题</a:t>
+            </a:r>
+          </a:p>
+          <a:p>
+            <a:r>
+              <a:rPr lang="zh-CN" dirty="0"/>
+              <a:t/>
+            </a:r>
+          </a:p>
+          <a:p>
+            <a:r>
+              <a:rPr lang="zh-CN" dirty="0"/>
+              <a:t>课堂实操（40 分钟，不看答案）：</a:t>
+            </a:r>
+          </a:p>
+          <a:p>
+            <a:r>
+              <a:rPr lang="zh-CN" dirty="0"/>
+              <a:t>· 画一张从变量到类的知识图谱</a:t>
+            </a:r>
+          </a:p>
+          <a:p>
+            <a:r>
+              <a:rPr lang="zh-CN" dirty="0"/>
+              <a:t>· 互相考 10 个最易错的点</a:t>
+            </a:r>
+          </a:p>
+          <a:p>
+            <a:r>
+              <a:rPr lang="zh-CN" dirty="0"/>
+              <a:t/>
+            </a:r>
+          </a:p>
+          <a:p>
+            <a:r>
+              <a:rPr lang="zh-CN" dirty="0"/>
+              <a:t>课后作业：</a:t>
+            </a:r>
+          </a:p>
+          <a:p>
+            <a:r>
+              <a:rPr lang="zh-CN" dirty="0"/>
+              <a:t>· 完成单元 11 动手练习基础档</a:t>
+            </a:r>
+          </a:p>
+          <a:p>
+            <a:r>
+              <a:rPr lang="zh-CN" dirty="0"/>
+              <a:t/>
+            </a:r>
+          </a:p>
+          <a:p>
+            <a:r>
+              <a:rPr lang="zh-CN" dirty="0"/>
+              <a:t>节奏：讲 20 分钟 → 学员自己敲 40 分钟（不看答案）→ 对讲评自查 20 分钟 → 写作业 10 分钟。</a:t>
+            </a:r>
+          </a:p>
+        </p:txBody>
+      </p:sp>
     </p:spTree>
   </p:cSld>
   <p:clrMapOvr>
@@ -1502,6 +2400,74 @@
           </a:p>
         </p:txBody>
       </p:sp>
+      <p:sp>
+        <p:nvSpPr>
+          <p:cNvPr id="2" name="讲课提示"/>
+          <p:cNvSpPr txBox="1"/>
+          <p:nvPr/>
+        </p:nvSpPr>
+        <p:spPr>
+          <a:xfrm>
+            <a:off x="457200" y="457200"/>
+            <a:ext cx="6858000" cy="4800600"/>
+          </a:xfrm>
+          <a:prstGeom prst="rect">
+            <a:avLst/>
+          </a:prstGeom>
+        </p:spPr>
+        <p:txBody>
+          <a:bodyPr wrap="square"/>
+          <a:lstStyle/>
+          <a:p>
+            <a:r>
+              <a:rPr lang="zh-CN" dirty="0"/>
+              <a:t>第 57 节 · 核心知识点：知识串讲与能力地图</a:t>
+            </a:r>
+          </a:p>
+          <a:p>
+            <a:r>
+              <a:rPr lang="zh-CN" dirty="0"/>
+              <a:t/>
+            </a:r>
+          </a:p>
+          <a:p>
+            <a:r>
+              <a:rPr lang="zh-CN" dirty="0"/>
+              <a:t>讲这一页时：先让学生说出上节课的结论，再逐块讲要点。</a:t>
+            </a:r>
+          </a:p>
+          <a:p>
+            <a:r>
+              <a:rPr lang="zh-CN" dirty="0"/>
+              <a:t>每讲完一块，问一句「这一步如果写错了，报错会长什么样？」——把错误提前讲。</a:t>
+            </a:r>
+          </a:p>
+          <a:p>
+            <a:r>
+              <a:rPr lang="zh-CN" dirty="0"/>
+              <a:t/>
+            </a:r>
+          </a:p>
+          <a:p>
+            <a:r>
+              <a:rPr lang="zh-CN" dirty="0"/>
+              <a:t>本节目标：把 11 章串成一条线，能说出每个知识点解决什么问题</a:t>
+            </a:r>
+          </a:p>
+          <a:p>
+            <a:r>
+              <a:rPr lang="zh-CN" dirty="0"/>
+              <a:t/>
+            </a:r>
+          </a:p>
+          <a:p>
+            <a:r>
+              <a:rPr lang="zh-CN" dirty="0"/>
+              <a:t>看不到懂的地方，回讲义对应小节读一遍，再回来对着这页复述一次——能讲出来才算真懂。</a:t>
+            </a:r>
+          </a:p>
+        </p:txBody>
+      </p:sp>
     </p:spTree>
   </p:cSld>
   <p:clrMapOvr>
@@ -1625,6 +2591,104 @@
           </a:p>
         </p:txBody>
       </p:sp>
+      <p:sp>
+        <p:nvSpPr>
+          <p:cNvPr id="2" name="讲课提示"/>
+          <p:cNvSpPr txBox="1"/>
+          <p:nvPr/>
+        </p:nvSpPr>
+        <p:spPr>
+          <a:xfrm>
+            <a:off x="457200" y="457200"/>
+            <a:ext cx="6858000" cy="4800600"/>
+          </a:xfrm>
+          <a:prstGeom prst="rect">
+            <a:avLst/>
+          </a:prstGeom>
+        </p:spPr>
+        <p:txBody>
+          <a:bodyPr wrap="square"/>
+          <a:lstStyle/>
+          <a:p>
+            <a:r>
+              <a:rPr lang="zh-CN" dirty="0"/>
+              <a:t>第 58 节 · 排错思路与项目骨架</a:t>
+            </a:r>
+          </a:p>
+          <a:p>
+            <a:r>
+              <a:rPr lang="zh-CN" dirty="0"/>
+              <a:t>单元 11 · 阶段 1 总复习 + 关卡验收 · W13</a:t>
+            </a:r>
+          </a:p>
+          <a:p>
+            <a:r>
+              <a:rPr lang="zh-CN" dirty="0"/>
+              <a:t/>
+            </a:r>
+          </a:p>
+          <a:p>
+            <a:r>
+              <a:rPr lang="zh-CN" dirty="0"/>
+              <a:t>学习目标：掌握读 traceback 的方法，能把模糊需求拆成步骤和函数</a:t>
+            </a:r>
+          </a:p>
+          <a:p>
+            <a:r>
+              <a:rPr lang="zh-CN" dirty="0"/>
+              <a:t/>
+            </a:r>
+          </a:p>
+          <a:p>
+            <a:r>
+              <a:rPr lang="zh-CN" dirty="0"/>
+              <a:t>课堂实操（40 分钟，不看答案）：</a:t>
+            </a:r>
+          </a:p>
+          <a:p>
+            <a:r>
+              <a:rPr lang="zh-CN" dirty="0"/>
+              <a:t>· 现场给一段含 3 个 bug 的脚本限时 15 分钟修复</a:t>
+            </a:r>
+          </a:p>
+          <a:p>
+            <a:r>
+              <a:rPr lang="zh-CN" dirty="0"/>
+              <a:t>· 现场把一个模糊需求拆成步骤清单</a:t>
+            </a:r>
+          </a:p>
+          <a:p>
+            <a:r>
+              <a:rPr lang="zh-CN" dirty="0"/>
+              <a:t/>
+            </a:r>
+          </a:p>
+          <a:p>
+            <a:r>
+              <a:rPr lang="zh-CN" dirty="0"/>
+              <a:t>课后作业：</a:t>
+            </a:r>
+          </a:p>
+          <a:p>
+            <a:r>
+              <a:rPr lang="zh-CN" dirty="0"/>
+              <a:t>· 完成动手练习进阶档 11-1 ~ 11-2</a:t>
+            </a:r>
+          </a:p>
+          <a:p>
+            <a:r>
+              <a:rPr lang="zh-CN" dirty="0"/>
+              <a:t/>
+            </a:r>
+          </a:p>
+          <a:p>
+            <a:r>
+              <a:rPr lang="zh-CN" dirty="0"/>
+              <a:t>节奏：讲 20 分钟 → 学员自己敲 40 分钟（不看答案）→ 对讲评自查 20 分钟 → 写作业 10 分钟。</a:t>
+            </a:r>
+          </a:p>
+        </p:txBody>
+      </p:sp>
     </p:spTree>
   </p:cSld>
   <p:clrMapOvr>
@@ -1718,6 +2782,74 @@
           </a:p>
         </p:txBody>
       </p:sp>
+      <p:sp>
+        <p:nvSpPr>
+          <p:cNvPr id="2" name="讲课提示"/>
+          <p:cNvSpPr txBox="1"/>
+          <p:nvPr/>
+        </p:nvSpPr>
+        <p:spPr>
+          <a:xfrm>
+            <a:off x="457200" y="457200"/>
+            <a:ext cx="6858000" cy="4800600"/>
+          </a:xfrm>
+          <a:prstGeom prst="rect">
+            <a:avLst/>
+          </a:prstGeom>
+        </p:spPr>
+        <p:txBody>
+          <a:bodyPr wrap="square"/>
+          <a:lstStyle/>
+          <a:p>
+            <a:r>
+              <a:rPr lang="zh-CN" dirty="0"/>
+              <a:t>第 58 节 · 核心知识点：排错思路与项目骨架</a:t>
+            </a:r>
+          </a:p>
+          <a:p>
+            <a:r>
+              <a:rPr lang="zh-CN" dirty="0"/>
+              <a:t/>
+            </a:r>
+          </a:p>
+          <a:p>
+            <a:r>
+              <a:rPr lang="zh-CN" dirty="0"/>
+              <a:t>讲这一页时：先让学生说出上节课的结论，再逐块讲要点。</a:t>
+            </a:r>
+          </a:p>
+          <a:p>
+            <a:r>
+              <a:rPr lang="zh-CN" dirty="0"/>
+              <a:t>每讲完一块，问一句「这一步如果写错了，报错会长什么样？」——把错误提前讲。</a:t>
+            </a:r>
+          </a:p>
+          <a:p>
+            <a:r>
+              <a:rPr lang="zh-CN" dirty="0"/>
+              <a:t/>
+            </a:r>
+          </a:p>
+          <a:p>
+            <a:r>
+              <a:rPr lang="zh-CN" dirty="0"/>
+              <a:t>本节目标：掌握读 traceback 的方法，能把模糊需求拆成步骤和函数</a:t>
+            </a:r>
+          </a:p>
+          <a:p>
+            <a:r>
+              <a:rPr lang="zh-CN" dirty="0"/>
+              <a:t/>
+            </a:r>
+          </a:p>
+          <a:p>
+            <a:r>
+              <a:rPr lang="zh-CN" dirty="0"/>
+              <a:t>看不到懂的地方，回讲义对应小节读一遍，再回来对着这页复述一次——能讲出来才算真懂。</a:t>
+            </a:r>
+          </a:p>
+        </p:txBody>
+      </p:sp>
     </p:spTree>
   </p:cSld>
   <p:clrMapOvr>
@@ -1841,6 +2973,104 @@
           </a:p>
         </p:txBody>
       </p:sp>
+      <p:sp>
+        <p:nvSpPr>
+          <p:cNvPr id="2" name="讲课提示"/>
+          <p:cNvSpPr txBox="1"/>
+          <p:nvPr/>
+        </p:nvSpPr>
+        <p:spPr>
+          <a:xfrm>
+            <a:off x="457200" y="457200"/>
+            <a:ext cx="6858000" cy="4800600"/>
+          </a:xfrm>
+          <a:prstGeom prst="rect">
+            <a:avLst/>
+          </a:prstGeom>
+        </p:spPr>
+        <p:txBody>
+          <a:bodyPr wrap="square"/>
+          <a:lstStyle/>
+          <a:p>
+            <a:r>
+              <a:rPr lang="zh-CN" dirty="0"/>
+              <a:t>第 59 节 · 四个复习示例串讲</a:t>
+            </a:r>
+          </a:p>
+          <a:p>
+            <a:r>
+              <a:rPr lang="zh-CN" dirty="0"/>
+              <a:t>单元 11 · 阶段 1 总复习 + 关卡验收 · W13</a:t>
+            </a:r>
+          </a:p>
+          <a:p>
+            <a:r>
+              <a:rPr lang="zh-CN" dirty="0"/>
+              <a:t/>
+            </a:r>
+          </a:p>
+          <a:p>
+            <a:r>
+              <a:rPr lang="zh-CN" dirty="0"/>
+              <a:t>学习目标：把类、文件异常、pytest 三块复习串成可运行的完整程序</a:t>
+            </a:r>
+          </a:p>
+          <a:p>
+            <a:r>
+              <a:rPr lang="zh-CN" dirty="0"/>
+              <a:t/>
+            </a:r>
+          </a:p>
+          <a:p>
+            <a:r>
+              <a:rPr lang="zh-CN" dirty="0"/>
+              <a:t>课堂实操（40 分钟，不看答案）：</a:t>
+            </a:r>
+          </a:p>
+          <a:p>
+            <a:r>
+              <a:rPr lang="zh-CN" dirty="0"/>
+              <a:t>· 对照示例跑通四个复习程序</a:t>
+            </a:r>
+          </a:p>
+          <a:p>
+            <a:r>
+              <a:rPr lang="zh-CN" dirty="0"/>
+              <a:t>· 讲清每个程序综合了哪几章</a:t>
+            </a:r>
+          </a:p>
+          <a:p>
+            <a:r>
+              <a:rPr lang="zh-CN" dirty="0"/>
+              <a:t/>
+            </a:r>
+          </a:p>
+          <a:p>
+            <a:r>
+              <a:rPr lang="zh-CN" dirty="0"/>
+              <a:t>课后作业：</a:t>
+            </a:r>
+          </a:p>
+          <a:p>
+            <a:r>
+              <a:rPr lang="zh-CN" dirty="0"/>
+              <a:t>· 把四个复习程序各改一个需求</a:t>
+            </a:r>
+          </a:p>
+          <a:p>
+            <a:r>
+              <a:rPr lang="zh-CN" dirty="0"/>
+              <a:t/>
+            </a:r>
+          </a:p>
+          <a:p>
+            <a:r>
+              <a:rPr lang="zh-CN" dirty="0"/>
+              <a:t>节奏：讲 20 分钟 → 学员自己敲 40 分钟（不看答案）→ 对讲评自查 20 分钟 → 写作业 10 分钟。</a:t>
+            </a:r>
+          </a:p>
+        </p:txBody>
+      </p:sp>
     </p:spTree>
   </p:cSld>
   <p:clrMapOvr>
@@ -1934,6 +3164,74 @@
           </a:p>
         </p:txBody>
       </p:sp>
+      <p:sp>
+        <p:nvSpPr>
+          <p:cNvPr id="2" name="讲课提示"/>
+          <p:cNvSpPr txBox="1"/>
+          <p:nvPr/>
+        </p:nvSpPr>
+        <p:spPr>
+          <a:xfrm>
+            <a:off x="457200" y="457200"/>
+            <a:ext cx="6858000" cy="4800600"/>
+          </a:xfrm>
+          <a:prstGeom prst="rect">
+            <a:avLst/>
+          </a:prstGeom>
+        </p:spPr>
+        <p:txBody>
+          <a:bodyPr wrap="square"/>
+          <a:lstStyle/>
+          <a:p>
+            <a:r>
+              <a:rPr lang="zh-CN" dirty="0"/>
+              <a:t>第 59 节 · 核心知识点：四个复习示例串讲</a:t>
+            </a:r>
+          </a:p>
+          <a:p>
+            <a:r>
+              <a:rPr lang="zh-CN" dirty="0"/>
+              <a:t/>
+            </a:r>
+          </a:p>
+          <a:p>
+            <a:r>
+              <a:rPr lang="zh-CN" dirty="0"/>
+              <a:t>讲这一页时：先让学生说出上节课的结论，再逐块讲要点。</a:t>
+            </a:r>
+          </a:p>
+          <a:p>
+            <a:r>
+              <a:rPr lang="zh-CN" dirty="0"/>
+              <a:t>每讲完一块，问一句「这一步如果写错了，报错会长什么样？」——把错误提前讲。</a:t>
+            </a:r>
+          </a:p>
+          <a:p>
+            <a:r>
+              <a:rPr lang="zh-CN" dirty="0"/>
+              <a:t/>
+            </a:r>
+          </a:p>
+          <a:p>
+            <a:r>
+              <a:rPr lang="zh-CN" dirty="0"/>
+              <a:t>本节目标：把类、文件异常、pytest 三块复习串成可运行的完整程序</a:t>
+            </a:r>
+          </a:p>
+          <a:p>
+            <a:r>
+              <a:rPr lang="zh-CN" dirty="0"/>
+              <a:t/>
+            </a:r>
+          </a:p>
+          <a:p>
+            <a:r>
+              <a:rPr lang="zh-CN" dirty="0"/>
+              <a:t>看不到懂的地方，回讲义对应小节读一遍，再回来对着这页复述一次——能讲出来才算真懂。</a:t>
+            </a:r>
+          </a:p>
+        </p:txBody>
+      </p:sp>
     </p:spTree>
   </p:cSld>
   <p:clrMapOvr>
@@ -2057,6 +3355,104 @@
           </a:p>
         </p:txBody>
       </p:sp>
+      <p:sp>
+        <p:nvSpPr>
+          <p:cNvPr id="2" name="讲课提示"/>
+          <p:cNvSpPr txBox="1"/>
+          <p:nvPr/>
+        </p:nvSpPr>
+        <p:spPr>
+          <a:xfrm>
+            <a:off x="457200" y="457200"/>
+            <a:ext cx="6858000" cy="4800600"/>
+          </a:xfrm>
+          <a:prstGeom prst="rect">
+            <a:avLst/>
+          </a:prstGeom>
+        </p:spPr>
+        <p:txBody>
+          <a:bodyPr wrap="square"/>
+          <a:lstStyle/>
+          <a:p>
+            <a:r>
+              <a:rPr lang="zh-CN" dirty="0"/>
+              <a:t>第 60 节 · ★ 综合项目 1：待办管理器</a:t>
+            </a:r>
+          </a:p>
+          <a:p>
+            <a:r>
+              <a:rPr lang="zh-CN" dirty="0"/>
+              <a:t>单元 11 · 阶段 1 总复习 + 关卡验收 · W13</a:t>
+            </a:r>
+          </a:p>
+          <a:p>
+            <a:r>
+              <a:rPr lang="zh-CN" dirty="0"/>
+              <a:t/>
+            </a:r>
+          </a:p>
+          <a:p>
+            <a:r>
+              <a:rPr lang="zh-CN" dirty="0"/>
+              <a:t>学习目标：独立写出一个可增删改查并能存盘的待办管理器</a:t>
+            </a:r>
+          </a:p>
+          <a:p>
+            <a:r>
+              <a:rPr lang="zh-CN" dirty="0"/>
+              <a:t/>
+            </a:r>
+          </a:p>
+          <a:p>
+            <a:r>
+              <a:rPr lang="zh-CN" dirty="0"/>
+              <a:t>课堂实操（40 分钟，不看答案）：</a:t>
+            </a:r>
+          </a:p>
+          <a:p>
+            <a:r>
+              <a:rPr lang="zh-CN" dirty="0"/>
+              <a:t>· 先限时 40 分钟自己写，再看参考答案对照</a:t>
+            </a:r>
+          </a:p>
+          <a:p>
+            <a:r>
+              <a:rPr lang="zh-CN" dirty="0"/>
+              <a:t>· 逐行读懂参考答案的实现思路</a:t>
+            </a:r>
+          </a:p>
+          <a:p>
+            <a:r>
+              <a:rPr lang="zh-CN" dirty="0"/>
+              <a:t/>
+            </a:r>
+          </a:p>
+          <a:p>
+            <a:r>
+              <a:rPr lang="zh-CN" dirty="0"/>
+              <a:t>课后作业：</a:t>
+            </a:r>
+          </a:p>
+          <a:p>
+            <a:r>
+              <a:rPr lang="zh-CN" dirty="0"/>
+              <a:t>· 完成综合项目 1 并写 3 条测试</a:t>
+            </a:r>
+          </a:p>
+          <a:p>
+            <a:r>
+              <a:rPr lang="zh-CN" dirty="0"/>
+              <a:t/>
+            </a:r>
+          </a:p>
+          <a:p>
+            <a:r>
+              <a:rPr lang="zh-CN" dirty="0"/>
+              <a:t>节奏：讲 20 分钟 → 学员自己敲 40 分钟（不看答案）→ 对讲评自查 20 分钟 → 写作业 10 分钟。</a:t>
+            </a:r>
+          </a:p>
+        </p:txBody>
+      </p:sp>
     </p:spTree>
   </p:cSld>
   <p:clrMapOvr>
@@ -2082,6 +3478,74 @@
           <a:chExt cx="0" cy="0"/>
         </a:xfrm>
       </p:grpSpPr>
+      <p:sp>
+        <p:nvSpPr>
+          <p:cNvPr id="2" name="讲课提示"/>
+          <p:cNvSpPr txBox="1"/>
+          <p:nvPr/>
+        </p:nvSpPr>
+        <p:spPr>
+          <a:xfrm>
+            <a:off x="457200" y="457200"/>
+            <a:ext cx="6858000" cy="4800600"/>
+          </a:xfrm>
+          <a:prstGeom prst="rect">
+            <a:avLst/>
+          </a:prstGeom>
+        </p:spPr>
+        <p:txBody>
+          <a:bodyPr wrap="square"/>
+          <a:lstStyle/>
+          <a:p>
+            <a:r>
+              <a:rPr lang="zh-CN" dirty="0"/>
+              <a:t>第 60 节 · 核心知识点：★ 综合项目 1：待办管理器</a:t>
+            </a:r>
+          </a:p>
+          <a:p>
+            <a:r>
+              <a:rPr lang="zh-CN" dirty="0"/>
+              <a:t/>
+            </a:r>
+          </a:p>
+          <a:p>
+            <a:r>
+              <a:rPr lang="zh-CN" dirty="0"/>
+              <a:t>讲这一页时：先让学生说出上节课的结论，再逐块讲要点。</a:t>
+            </a:r>
+          </a:p>
+          <a:p>
+            <a:r>
+              <a:rPr lang="zh-CN" dirty="0"/>
+              <a:t>每讲完一块，问一句「这一步如果写错了，报错会长什么样？」——把错误提前讲。</a:t>
+            </a:r>
+          </a:p>
+          <a:p>
+            <a:r>
+              <a:rPr lang="zh-CN" dirty="0"/>
+              <a:t/>
+            </a:r>
+          </a:p>
+          <a:p>
+            <a:r>
+              <a:rPr lang="zh-CN" dirty="0"/>
+              <a:t>本节目标：独立写出一个可增删改查并能存盘的待办管理器</a:t>
+            </a:r>
+          </a:p>
+          <a:p>
+            <a:r>
+              <a:rPr lang="zh-CN" dirty="0"/>
+              <a:t/>
+            </a:r>
+          </a:p>
+          <a:p>
+            <a:r>
+              <a:rPr lang="zh-CN" dirty="0"/>
+              <a:t>看不到懂的地方，回讲义对应小节读一遍，再回来对着这页复述一次——能讲出来才算真懂。</a:t>
+            </a:r>
+          </a:p>
+        </p:txBody>
+      </p:sp>
       <p:sp>
         <p:nvSpPr>
           <p:cNvPr id="2" name="讲课提示"/>

--- a/python-course-ppt/逐节课件/Python讲授课件-单元11.pptx
+++ b/python-course-ppt/逐节课件/Python讲授课件-单元11.pptx
@@ -244,3384 +244,6 @@
 </p:notesMaster>
 </file>
 
-<file path=ppt/notesSlides/notesSlide1.xml><?xml version="1.0" encoding="utf-8"?>
-<p:notes xmlns:a="http://schemas.openxmlformats.org/drawingml/2006/main" xmlns:p="http://schemas.openxmlformats.org/presentationml/2006/main" xmlns:r="http://schemas.openxmlformats.org/officeDocument/2006/relationships">
-  <p:cSld>
-    <p:spTree>
-      <p:nvGrpSpPr>
-        <p:cNvPr id="1" name=""/>
-        <p:cNvGrpSpPr/>
-        <p:nvPr/>
-      </p:nvGrpSpPr>
-      <p:grpSpPr>
-        <a:xfrm>
-          <a:off x="0" y="0"/>
-          <a:ext cx="0" cy="0"/>
-          <a:chOff x="0" y="0"/>
-          <a:chExt cx="0" cy="0"/>
-        </a:xfrm>
-      </p:grpSpPr>
-      <p:sp>
-        <p:nvSpPr>
-          <p:cNvPr id="2" name="讲课提示"/>
-          <p:cNvSpPr txBox="1"/>
-          <p:nvPr/>
-        </p:nvSpPr>
-        <p:spPr>
-          <a:xfrm>
-            <a:off x="457200" y="457200"/>
-            <a:ext cx="6858000" cy="4800600"/>
-          </a:xfrm>
-          <a:prstGeom prst="rect">
-            <a:avLst/>
-          </a:prstGeom>
-        </p:spPr>
-        <p:txBody>
-          <a:bodyPr wrap="square"/>
-          <a:lstStyle/>
-          <a:p>
-            <a:r>
-              <a:rPr lang="zh-CN" dirty="0"/>
-              <a:t>单元 11 · 单元 11 · 阶段 1 总复习 + 关卡验收</a:t>
-            </a:r>
-          </a:p>
-          <a:p>
-            <a:r>
-              <a:rPr lang="zh-CN" dirty="0"/>
-              <a:t/>
-            </a:r>
-          </a:p>
-          <a:p>
-            <a:r>
-              <a:rPr lang="zh-CN" dirty="0"/>
-              <a:t>本单元包含以下课节：</a:t>
-            </a:r>
-          </a:p>
-          <a:p>
-            <a:r>
-              <a:rPr lang="zh-CN" dirty="0"/>
-              <a:t>· 第 57 节 知识串讲与能力地图</a:t>
-            </a:r>
-          </a:p>
-          <a:p>
-            <a:r>
-              <a:rPr lang="zh-CN" dirty="0"/>
-              <a:t>· 第 58 节 排错思路与项目骨架</a:t>
-            </a:r>
-          </a:p>
-          <a:p>
-            <a:r>
-              <a:rPr lang="zh-CN" dirty="0"/>
-              <a:t>· 第 59 节 四个复习示例串讲</a:t>
-            </a:r>
-          </a:p>
-          <a:p>
-            <a:r>
-              <a:rPr lang="zh-CN" dirty="0"/>
-              <a:t>· 第 60 节 ★ 综合项目 1：待办管理器</a:t>
-            </a:r>
-          </a:p>
-          <a:p>
-            <a:r>
-              <a:rPr lang="zh-CN" dirty="0"/>
-              <a:t>· 第 61 节 ★ 综合项目 2：成绩分析器</a:t>
-            </a:r>
-          </a:p>
-          <a:p>
-            <a:r>
-              <a:rPr lang="zh-CN" dirty="0"/>
-              <a:t>· 第 62 节 ★ 综合项目 3：文本统计工具</a:t>
-            </a:r>
-          </a:p>
-          <a:p>
-            <a:r>
-              <a:rPr lang="zh-CN" dirty="0"/>
-              <a:t>· 第 63 节 ★ 关卡 1 现场测评</a:t>
-            </a:r>
-          </a:p>
-          <a:p>
-            <a:r>
-              <a:rPr lang="zh-CN" dirty="0"/>
-              <a:t>· 第 64 节 结业检查与下一阶段</a:t>
-            </a:r>
-          </a:p>
-          <a:p>
-            <a:r>
-              <a:rPr lang="zh-CN" dirty="0"/>
-              <a:t/>
-            </a:r>
-          </a:p>
-          <a:p>
-            <a:r>
-              <a:rPr lang="zh-CN" dirty="0"/>
-              <a:t>开场用 3 分钟讲清：这个单元学完能做出什么，最后会被关卡怎么验。</a:t>
-            </a:r>
-          </a:p>
-        </p:txBody>
-      </p:sp>
-      <p:sp>
-        <p:nvSpPr>
-          <p:cNvPr id="2" name="讲课提示"/>
-          <p:cNvSpPr txBox="1"/>
-          <p:nvPr/>
-        </p:nvSpPr>
-        <p:spPr>
-          <a:xfrm>
-            <a:off x="457200" y="457200"/>
-            <a:ext cx="6858000" cy="4800600"/>
-          </a:xfrm>
-          <a:prstGeom prst="rect">
-            <a:avLst/>
-          </a:prstGeom>
-        </p:spPr>
-        <p:txBody>
-          <a:bodyPr wrap="square"/>
-          <a:lstStyle/>
-          <a:p>
-            <a:r>
-              <a:rPr lang="zh-CN" dirty="0"/>
-              <a:t>单元 11 · 单元 11 · 阶段 1 总复习 + 关卡验收</a:t>
-            </a:r>
-          </a:p>
-          <a:p>
-            <a:r>
-              <a:rPr lang="zh-CN" dirty="0"/>
-              <a:t/>
-            </a:r>
-          </a:p>
-          <a:p>
-            <a:r>
-              <a:rPr lang="zh-CN" dirty="0"/>
-              <a:t>本单元包含以下课节：</a:t>
-            </a:r>
-          </a:p>
-          <a:p>
-            <a:r>
-              <a:rPr lang="zh-CN" dirty="0"/>
-              <a:t>· 第 57 节 知识串讲与能力地图</a:t>
-            </a:r>
-          </a:p>
-          <a:p>
-            <a:r>
-              <a:rPr lang="zh-CN" dirty="0"/>
-              <a:t>· 第 58 节 排错思路与项目骨架</a:t>
-            </a:r>
-          </a:p>
-          <a:p>
-            <a:r>
-              <a:rPr lang="zh-CN" dirty="0"/>
-              <a:t>· 第 59 节 四个复习示例串讲</a:t>
-            </a:r>
-          </a:p>
-          <a:p>
-            <a:r>
-              <a:rPr lang="zh-CN" dirty="0"/>
-              <a:t>· 第 60 节 ★ 综合项目 1：待办管理器</a:t>
-            </a:r>
-          </a:p>
-          <a:p>
-            <a:r>
-              <a:rPr lang="zh-CN" dirty="0"/>
-              <a:t>· 第 61 节 ★ 综合项目 2：成绩分析器</a:t>
-            </a:r>
-          </a:p>
-          <a:p>
-            <a:r>
-              <a:rPr lang="zh-CN" dirty="0"/>
-              <a:t>· 第 62 节 ★ 综合项目 3：文本统计工具</a:t>
-            </a:r>
-          </a:p>
-          <a:p>
-            <a:r>
-              <a:rPr lang="zh-CN" dirty="0"/>
-              <a:t>· 第 63 节 ★ 关卡 1 现场测评</a:t>
-            </a:r>
-          </a:p>
-          <a:p>
-            <a:r>
-              <a:rPr lang="zh-CN" dirty="0"/>
-              <a:t>· 第 64 节 结业检查与下一阶段</a:t>
-            </a:r>
-          </a:p>
-          <a:p>
-            <a:r>
-              <a:rPr lang="zh-CN" dirty="0"/>
-              <a:t/>
-            </a:r>
-          </a:p>
-          <a:p>
-            <a:r>
-              <a:rPr lang="zh-CN" dirty="0"/>
-              <a:t>开场用 3 分钟讲清：这个单元学完能做出什么，最后会被关卡怎么验。</a:t>
-            </a:r>
-          </a:p>
-        </p:txBody>
-      </p:sp>
-    </p:spTree>
-  </p:cSld>
-  <p:clrMapOvr>
-    <a:masterClrMapping/>
-  </p:clrMapOvr>
-</p:notes>
-</file>
-
-<file path=ppt/notesSlides/notesSlide10.xml><?xml version="1.0" encoding="utf-8"?>
-<p:notes xmlns:a="http://schemas.openxmlformats.org/drawingml/2006/main" xmlns:p="http://schemas.openxmlformats.org/presentationml/2006/main" xmlns:r="http://schemas.openxmlformats.org/officeDocument/2006/relationships">
-  <p:cSld>
-    <p:spTree>
-      <p:nvGrpSpPr>
-        <p:cNvPr id="1" name=""/>
-        <p:cNvGrpSpPr/>
-        <p:nvPr/>
-      </p:nvGrpSpPr>
-      <p:grpSpPr>
-        <a:xfrm>
-          <a:off x="0" y="0"/>
-          <a:ext cx="0" cy="0"/>
-          <a:chOff x="0" y="0"/>
-          <a:chExt cx="0" cy="0"/>
-        </a:xfrm>
-      </p:grpSpPr>
-      <p:sp>
-        <p:nvSpPr>
-          <p:cNvPr id="2" name="讲课提示"/>
-          <p:cNvSpPr txBox="1"/>
-          <p:nvPr/>
-        </p:nvSpPr>
-        <p:spPr>
-          <a:xfrm>
-            <a:off x="457200" y="457200"/>
-            <a:ext cx="6858000" cy="4800600"/>
-          </a:xfrm>
-          <a:prstGeom prst="rect">
-            <a:avLst/>
-          </a:prstGeom>
-        </p:spPr>
-        <p:txBody>
-          <a:bodyPr wrap="square"/>
-          <a:lstStyle/>
-          <a:p>
-            <a:r>
-              <a:rPr lang="zh-CN" dirty="0"/>
-              <a:t>第 61 节 · ★ 综合项目 2：成绩分析器</a:t>
-            </a:r>
-          </a:p>
-          <a:p>
-            <a:r>
-              <a:rPr lang="zh-CN" dirty="0"/>
-              <a:t>单元 11 · 阶段 1 总复习 + 关卡验收 · W13</a:t>
-            </a:r>
-          </a:p>
-          <a:p>
-            <a:r>
-              <a:rPr lang="zh-CN" dirty="0"/>
-              <a:t/>
-            </a:r>
-          </a:p>
-          <a:p>
-            <a:r>
-              <a:rPr lang="zh-CN" dirty="0"/>
-              <a:t>学习目标：独立写出一个能统计平均分、最高分并画图的成绩分析器</a:t>
-            </a:r>
-          </a:p>
-          <a:p>
-            <a:r>
-              <a:rPr lang="zh-CN" dirty="0"/>
-              <a:t/>
-            </a:r>
-          </a:p>
-          <a:p>
-            <a:r>
-              <a:rPr lang="zh-CN" dirty="0"/>
-              <a:t>课堂实操（40 分钟，不看答案）：</a:t>
-            </a:r>
-          </a:p>
-          <a:p>
-            <a:r>
-              <a:rPr lang="zh-CN" dirty="0"/>
-              <a:t>· 先限时 40 分钟自己写，再看参考答案对照</a:t>
-            </a:r>
-          </a:p>
-          <a:p>
-            <a:r>
-              <a:rPr lang="zh-CN" dirty="0"/>
-              <a:t>· 对照参考答案补齐自己漏掉的功能</a:t>
-            </a:r>
-          </a:p>
-          <a:p>
-            <a:r>
-              <a:rPr lang="zh-CN" dirty="0"/>
-              <a:t/>
-            </a:r>
-          </a:p>
-          <a:p>
-            <a:r>
-              <a:rPr lang="zh-CN" dirty="0"/>
-              <a:t>课后作业：</a:t>
-            </a:r>
-          </a:p>
-          <a:p>
-            <a:r>
-              <a:rPr lang="zh-CN" dirty="0"/>
-              <a:t>· 完成综合项目 2 及其测试文件</a:t>
-            </a:r>
-          </a:p>
-          <a:p>
-            <a:r>
-              <a:rPr lang="zh-CN" dirty="0"/>
-              <a:t/>
-            </a:r>
-          </a:p>
-          <a:p>
-            <a:r>
-              <a:rPr lang="zh-CN" dirty="0"/>
-              <a:t>节奏：讲 20 分钟 → 学员自己敲 40 分钟（不看答案）→ 对讲评自查 20 分钟 → 写作业 10 分钟。</a:t>
-            </a:r>
-          </a:p>
-        </p:txBody>
-      </p:sp>
-      <p:sp>
-        <p:nvSpPr>
-          <p:cNvPr id="2" name="讲课提示"/>
-          <p:cNvSpPr txBox="1"/>
-          <p:nvPr/>
-        </p:nvSpPr>
-        <p:spPr>
-          <a:xfrm>
-            <a:off x="457200" y="457200"/>
-            <a:ext cx="6858000" cy="4800600"/>
-          </a:xfrm>
-          <a:prstGeom prst="rect">
-            <a:avLst/>
-          </a:prstGeom>
-        </p:spPr>
-        <p:txBody>
-          <a:bodyPr wrap="square"/>
-          <a:lstStyle/>
-          <a:p>
-            <a:r>
-              <a:rPr lang="zh-CN" dirty="0"/>
-              <a:t>第 61 节 · ★ 综合项目 2：成绩分析器</a:t>
-            </a:r>
-          </a:p>
-          <a:p>
-            <a:r>
-              <a:rPr lang="zh-CN" dirty="0"/>
-              <a:t>单元 11 · 阶段 1 总复习 + 关卡验收 · W13</a:t>
-            </a:r>
-          </a:p>
-          <a:p>
-            <a:r>
-              <a:rPr lang="zh-CN" dirty="0"/>
-              <a:t/>
-            </a:r>
-          </a:p>
-          <a:p>
-            <a:r>
-              <a:rPr lang="zh-CN" dirty="0"/>
-              <a:t>学习目标：独立写出一个能统计平均分、最高分并画图的成绩分析器</a:t>
-            </a:r>
-          </a:p>
-          <a:p>
-            <a:r>
-              <a:rPr lang="zh-CN" dirty="0"/>
-              <a:t/>
-            </a:r>
-          </a:p>
-          <a:p>
-            <a:r>
-              <a:rPr lang="zh-CN" dirty="0"/>
-              <a:t>课堂实操（40 分钟，不看答案）：</a:t>
-            </a:r>
-          </a:p>
-          <a:p>
-            <a:r>
-              <a:rPr lang="zh-CN" dirty="0"/>
-              <a:t>· 先限时 40 分钟自己写，再看参考答案对照</a:t>
-            </a:r>
-          </a:p>
-          <a:p>
-            <a:r>
-              <a:rPr lang="zh-CN" dirty="0"/>
-              <a:t>· 对照参考答案补齐自己漏掉的功能</a:t>
-            </a:r>
-          </a:p>
-          <a:p>
-            <a:r>
-              <a:rPr lang="zh-CN" dirty="0"/>
-              <a:t/>
-            </a:r>
-          </a:p>
-          <a:p>
-            <a:r>
-              <a:rPr lang="zh-CN" dirty="0"/>
-              <a:t>课后作业：</a:t>
-            </a:r>
-          </a:p>
-          <a:p>
-            <a:r>
-              <a:rPr lang="zh-CN" dirty="0"/>
-              <a:t>· 完成综合项目 2 及其测试文件</a:t>
-            </a:r>
-          </a:p>
-          <a:p>
-            <a:r>
-              <a:rPr lang="zh-CN" dirty="0"/>
-              <a:t/>
-            </a:r>
-          </a:p>
-          <a:p>
-            <a:r>
-              <a:rPr lang="zh-CN" dirty="0"/>
-              <a:t>节奏：讲 20 分钟 → 学员自己敲 40 分钟（不看答案）→ 对讲评自查 20 分钟 → 写作业 10 分钟。</a:t>
-            </a:r>
-          </a:p>
-        </p:txBody>
-      </p:sp>
-    </p:spTree>
-  </p:cSld>
-  <p:clrMapOvr>
-    <a:masterClrMapping/>
-  </p:clrMapOvr>
-</p:notes>
-</file>
-
-<file path=ppt/notesSlides/notesSlide11.xml><?xml version="1.0" encoding="utf-8"?>
-<p:notes xmlns:a="http://schemas.openxmlformats.org/drawingml/2006/main" xmlns:p="http://schemas.openxmlformats.org/presentationml/2006/main" xmlns:r="http://schemas.openxmlformats.org/officeDocument/2006/relationships">
-  <p:cSld>
-    <p:spTree>
-      <p:nvGrpSpPr>
-        <p:cNvPr id="1" name=""/>
-        <p:cNvGrpSpPr/>
-        <p:nvPr/>
-      </p:nvGrpSpPr>
-      <p:grpSpPr>
-        <a:xfrm>
-          <a:off x="0" y="0"/>
-          <a:ext cx="0" cy="0"/>
-          <a:chOff x="0" y="0"/>
-          <a:chExt cx="0" cy="0"/>
-        </a:xfrm>
-      </p:grpSpPr>
-      <p:sp>
-        <p:nvSpPr>
-          <p:cNvPr id="2" name="讲课提示"/>
-          <p:cNvSpPr txBox="1"/>
-          <p:nvPr/>
-        </p:nvSpPr>
-        <p:spPr>
-          <a:xfrm>
-            <a:off x="457200" y="457200"/>
-            <a:ext cx="6858000" cy="4800600"/>
-          </a:xfrm>
-          <a:prstGeom prst="rect">
-            <a:avLst/>
-          </a:prstGeom>
-        </p:spPr>
-        <p:txBody>
-          <a:bodyPr wrap="square"/>
-          <a:lstStyle/>
-          <a:p>
-            <a:r>
-              <a:rPr lang="zh-CN" dirty="0"/>
-              <a:t>第 61 节 · 核心知识点：★ 综合项目 2：成绩分析器</a:t>
-            </a:r>
-          </a:p>
-          <a:p>
-            <a:r>
-              <a:rPr lang="zh-CN" dirty="0"/>
-              <a:t/>
-            </a:r>
-          </a:p>
-          <a:p>
-            <a:r>
-              <a:rPr lang="zh-CN" dirty="0"/>
-              <a:t>讲这一页时：先让学生说出上节课的结论，再逐块讲要点。</a:t>
-            </a:r>
-          </a:p>
-          <a:p>
-            <a:r>
-              <a:rPr lang="zh-CN" dirty="0"/>
-              <a:t>每讲完一块，问一句「这一步如果写错了，报错会长什么样？」——把错误提前讲。</a:t>
-            </a:r>
-          </a:p>
-          <a:p>
-            <a:r>
-              <a:rPr lang="zh-CN" dirty="0"/>
-              <a:t/>
-            </a:r>
-          </a:p>
-          <a:p>
-            <a:r>
-              <a:rPr lang="zh-CN" dirty="0"/>
-              <a:t>本节目标：独立写出一个能统计平均分、最高分并画图的成绩分析器</a:t>
-            </a:r>
-          </a:p>
-          <a:p>
-            <a:r>
-              <a:rPr lang="zh-CN" dirty="0"/>
-              <a:t/>
-            </a:r>
-          </a:p>
-          <a:p>
-            <a:r>
-              <a:rPr lang="zh-CN" dirty="0"/>
-              <a:t>看不到懂的地方，回讲义对应小节读一遍，再回来对着这页复述一次——能讲出来才算真懂。</a:t>
-            </a:r>
-          </a:p>
-        </p:txBody>
-      </p:sp>
-      <p:sp>
-        <p:nvSpPr>
-          <p:cNvPr id="2" name="讲课提示"/>
-          <p:cNvSpPr txBox="1"/>
-          <p:nvPr/>
-        </p:nvSpPr>
-        <p:spPr>
-          <a:xfrm>
-            <a:off x="457200" y="457200"/>
-            <a:ext cx="6858000" cy="4800600"/>
-          </a:xfrm>
-          <a:prstGeom prst="rect">
-            <a:avLst/>
-          </a:prstGeom>
-        </p:spPr>
-        <p:txBody>
-          <a:bodyPr wrap="square"/>
-          <a:lstStyle/>
-          <a:p>
-            <a:r>
-              <a:rPr lang="zh-CN" dirty="0"/>
-              <a:t>第 61 节 · 核心知识点：★ 综合项目 2：成绩分析器</a:t>
-            </a:r>
-          </a:p>
-          <a:p>
-            <a:r>
-              <a:rPr lang="zh-CN" dirty="0"/>
-              <a:t/>
-            </a:r>
-          </a:p>
-          <a:p>
-            <a:r>
-              <a:rPr lang="zh-CN" dirty="0"/>
-              <a:t>讲这一页时：先让学生说出上节课的结论，再逐块讲要点。</a:t>
-            </a:r>
-          </a:p>
-          <a:p>
-            <a:r>
-              <a:rPr lang="zh-CN" dirty="0"/>
-              <a:t>每讲完一块，问一句「这一步如果写错了，报错会长什么样？」——把错误提前讲。</a:t>
-            </a:r>
-          </a:p>
-          <a:p>
-            <a:r>
-              <a:rPr lang="zh-CN" dirty="0"/>
-              <a:t/>
-            </a:r>
-          </a:p>
-          <a:p>
-            <a:r>
-              <a:rPr lang="zh-CN" dirty="0"/>
-              <a:t>本节目标：独立写出一个能统计平均分、最高分并画图的成绩分析器</a:t>
-            </a:r>
-          </a:p>
-          <a:p>
-            <a:r>
-              <a:rPr lang="zh-CN" dirty="0"/>
-              <a:t/>
-            </a:r>
-          </a:p>
-          <a:p>
-            <a:r>
-              <a:rPr lang="zh-CN" dirty="0"/>
-              <a:t>看不到懂的地方，回讲义对应小节读一遍，再回来对着这页复述一次——能讲出来才算真懂。</a:t>
-            </a:r>
-          </a:p>
-        </p:txBody>
-      </p:sp>
-    </p:spTree>
-  </p:cSld>
-  <p:clrMapOvr>
-    <a:masterClrMapping/>
-  </p:clrMapOvr>
-</p:notes>
-</file>
-
-<file path=ppt/notesSlides/notesSlide12.xml><?xml version="1.0" encoding="utf-8"?>
-<p:notes xmlns:a="http://schemas.openxmlformats.org/drawingml/2006/main" xmlns:p="http://schemas.openxmlformats.org/presentationml/2006/main" xmlns:r="http://schemas.openxmlformats.org/officeDocument/2006/relationships">
-  <p:cSld>
-    <p:spTree>
-      <p:nvGrpSpPr>
-        <p:cNvPr id="1" name=""/>
-        <p:cNvGrpSpPr/>
-        <p:nvPr/>
-      </p:nvGrpSpPr>
-      <p:grpSpPr>
-        <a:xfrm>
-          <a:off x="0" y="0"/>
-          <a:ext cx="0" cy="0"/>
-          <a:chOff x="0" y="0"/>
-          <a:chExt cx="0" cy="0"/>
-        </a:xfrm>
-      </p:grpSpPr>
-      <p:sp>
-        <p:nvSpPr>
-          <p:cNvPr id="2" name="讲课提示"/>
-          <p:cNvSpPr txBox="1"/>
-          <p:nvPr/>
-        </p:nvSpPr>
-        <p:spPr>
-          <a:xfrm>
-            <a:off x="457200" y="457200"/>
-            <a:ext cx="6858000" cy="4800600"/>
-          </a:xfrm>
-          <a:prstGeom prst="rect">
-            <a:avLst/>
-          </a:prstGeom>
-        </p:spPr>
-        <p:txBody>
-          <a:bodyPr wrap="square"/>
-          <a:lstStyle/>
-          <a:p>
-            <a:r>
-              <a:rPr lang="zh-CN" dirty="0"/>
-              <a:t>第 62 节 · ★ 综合项目 3：文本统计工具</a:t>
-            </a:r>
-          </a:p>
-          <a:p>
-            <a:r>
-              <a:rPr lang="zh-CN" dirty="0"/>
-              <a:t>单元 11 · 阶段 1 总复习 + 关卡验收 · W13</a:t>
-            </a:r>
-          </a:p>
-          <a:p>
-            <a:r>
-              <a:rPr lang="zh-CN" dirty="0"/>
-              <a:t/>
-            </a:r>
-          </a:p>
-          <a:p>
-            <a:r>
-              <a:rPr lang="zh-CN" dirty="0"/>
-              <a:t>学习目标：独立写出一个能统计词频并输出报告的文本工具</a:t>
-            </a:r>
-          </a:p>
-          <a:p>
-            <a:r>
-              <a:rPr lang="zh-CN" dirty="0"/>
-              <a:t/>
-            </a:r>
-          </a:p>
-          <a:p>
-            <a:r>
-              <a:rPr lang="zh-CN" dirty="0"/>
-              <a:t>课堂实操（40 分钟，不看答案）：</a:t>
-            </a:r>
-          </a:p>
-          <a:p>
-            <a:r>
-              <a:rPr lang="zh-CN" dirty="0"/>
-              <a:t>· 先限时 40 分钟自己写，再看参考答案对照</a:t>
-            </a:r>
-          </a:p>
-          <a:p>
-            <a:r>
-              <a:rPr lang="zh-CN" dirty="0"/>
-              <a:t/>
-            </a:r>
-          </a:p>
-          <a:p>
-            <a:r>
-              <a:rPr lang="zh-CN" dirty="0"/>
-              <a:t>课后作业：</a:t>
-            </a:r>
-          </a:p>
-          <a:p>
-            <a:r>
-              <a:rPr lang="zh-CN" dirty="0"/>
-              <a:t>· 完成综合项目 3 及其测试文件</a:t>
-            </a:r>
-          </a:p>
-          <a:p>
-            <a:r>
-              <a:rPr lang="zh-CN" dirty="0"/>
-              <a:t/>
-            </a:r>
-          </a:p>
-          <a:p>
-            <a:r>
-              <a:rPr lang="zh-CN" dirty="0"/>
-              <a:t>节奏：讲 20 分钟 → 学员自己敲 40 分钟（不看答案）→ 对讲评自查 20 分钟 → 写作业 10 分钟。</a:t>
-            </a:r>
-          </a:p>
-        </p:txBody>
-      </p:sp>
-      <p:sp>
-        <p:nvSpPr>
-          <p:cNvPr id="2" name="讲课提示"/>
-          <p:cNvSpPr txBox="1"/>
-          <p:nvPr/>
-        </p:nvSpPr>
-        <p:spPr>
-          <a:xfrm>
-            <a:off x="457200" y="457200"/>
-            <a:ext cx="6858000" cy="4800600"/>
-          </a:xfrm>
-          <a:prstGeom prst="rect">
-            <a:avLst/>
-          </a:prstGeom>
-        </p:spPr>
-        <p:txBody>
-          <a:bodyPr wrap="square"/>
-          <a:lstStyle/>
-          <a:p>
-            <a:r>
-              <a:rPr lang="zh-CN" dirty="0"/>
-              <a:t>第 62 节 · ★ 综合项目 3：文本统计工具</a:t>
-            </a:r>
-          </a:p>
-          <a:p>
-            <a:r>
-              <a:rPr lang="zh-CN" dirty="0"/>
-              <a:t>单元 11 · 阶段 1 总复习 + 关卡验收 · W13</a:t>
-            </a:r>
-          </a:p>
-          <a:p>
-            <a:r>
-              <a:rPr lang="zh-CN" dirty="0"/>
-              <a:t/>
-            </a:r>
-          </a:p>
-          <a:p>
-            <a:r>
-              <a:rPr lang="zh-CN" dirty="0"/>
-              <a:t>学习目标：独立写出一个能统计词频并输出报告的文本工具</a:t>
-            </a:r>
-          </a:p>
-          <a:p>
-            <a:r>
-              <a:rPr lang="zh-CN" dirty="0"/>
-              <a:t/>
-            </a:r>
-          </a:p>
-          <a:p>
-            <a:r>
-              <a:rPr lang="zh-CN" dirty="0"/>
-              <a:t>课堂实操（40 分钟，不看答案）：</a:t>
-            </a:r>
-          </a:p>
-          <a:p>
-            <a:r>
-              <a:rPr lang="zh-CN" dirty="0"/>
-              <a:t>· 先限时 40 分钟自己写，再看参考答案对照</a:t>
-            </a:r>
-          </a:p>
-          <a:p>
-            <a:r>
-              <a:rPr lang="zh-CN" dirty="0"/>
-              <a:t/>
-            </a:r>
-          </a:p>
-          <a:p>
-            <a:r>
-              <a:rPr lang="zh-CN" dirty="0"/>
-              <a:t>课后作业：</a:t>
-            </a:r>
-          </a:p>
-          <a:p>
-            <a:r>
-              <a:rPr lang="zh-CN" dirty="0"/>
-              <a:t>· 完成综合项目 3 及其测试文件</a:t>
-            </a:r>
-          </a:p>
-          <a:p>
-            <a:r>
-              <a:rPr lang="zh-CN" dirty="0"/>
-              <a:t/>
-            </a:r>
-          </a:p>
-          <a:p>
-            <a:r>
-              <a:rPr lang="zh-CN" dirty="0"/>
-              <a:t>节奏：讲 20 分钟 → 学员自己敲 40 分钟（不看答案）→ 对讲评自查 20 分钟 → 写作业 10 分钟。</a:t>
-            </a:r>
-          </a:p>
-        </p:txBody>
-      </p:sp>
-    </p:spTree>
-  </p:cSld>
-  <p:clrMapOvr>
-    <a:masterClrMapping/>
-  </p:clrMapOvr>
-</p:notes>
-</file>
-
-<file path=ppt/notesSlides/notesSlide13.xml><?xml version="1.0" encoding="utf-8"?>
-<p:notes xmlns:a="http://schemas.openxmlformats.org/drawingml/2006/main" xmlns:p="http://schemas.openxmlformats.org/presentationml/2006/main" xmlns:r="http://schemas.openxmlformats.org/officeDocument/2006/relationships">
-  <p:cSld>
-    <p:spTree>
-      <p:nvGrpSpPr>
-        <p:cNvPr id="1" name=""/>
-        <p:cNvGrpSpPr/>
-        <p:nvPr/>
-      </p:nvGrpSpPr>
-      <p:grpSpPr>
-        <a:xfrm>
-          <a:off x="0" y="0"/>
-          <a:ext cx="0" cy="0"/>
-          <a:chOff x="0" y="0"/>
-          <a:chExt cx="0" cy="0"/>
-        </a:xfrm>
-      </p:grpSpPr>
-      <p:sp>
-        <p:nvSpPr>
-          <p:cNvPr id="2" name="讲课提示"/>
-          <p:cNvSpPr txBox="1"/>
-          <p:nvPr/>
-        </p:nvSpPr>
-        <p:spPr>
-          <a:xfrm>
-            <a:off x="457200" y="457200"/>
-            <a:ext cx="6858000" cy="4800600"/>
-          </a:xfrm>
-          <a:prstGeom prst="rect">
-            <a:avLst/>
-          </a:prstGeom>
-        </p:spPr>
-        <p:txBody>
-          <a:bodyPr wrap="square"/>
-          <a:lstStyle/>
-          <a:p>
-            <a:r>
-              <a:rPr lang="zh-CN" dirty="0"/>
-              <a:t>第 62 节 · 核心知识点：★ 综合项目 3：文本统计工具</a:t>
-            </a:r>
-          </a:p>
-          <a:p>
-            <a:r>
-              <a:rPr lang="zh-CN" dirty="0"/>
-              <a:t/>
-            </a:r>
-          </a:p>
-          <a:p>
-            <a:r>
-              <a:rPr lang="zh-CN" dirty="0"/>
-              <a:t>讲这一页时：先让学生说出上节课的结论，再逐块讲要点。</a:t>
-            </a:r>
-          </a:p>
-          <a:p>
-            <a:r>
-              <a:rPr lang="zh-CN" dirty="0"/>
-              <a:t>每讲完一块，问一句「这一步如果写错了，报错会长什么样？」——把错误提前讲。</a:t>
-            </a:r>
-          </a:p>
-          <a:p>
-            <a:r>
-              <a:rPr lang="zh-CN" dirty="0"/>
-              <a:t/>
-            </a:r>
-          </a:p>
-          <a:p>
-            <a:r>
-              <a:rPr lang="zh-CN" dirty="0"/>
-              <a:t>本节目标：独立写出一个能统计词频并输出报告的文本工具</a:t>
-            </a:r>
-          </a:p>
-          <a:p>
-            <a:r>
-              <a:rPr lang="zh-CN" dirty="0"/>
-              <a:t/>
-            </a:r>
-          </a:p>
-          <a:p>
-            <a:r>
-              <a:rPr lang="zh-CN" dirty="0"/>
-              <a:t>看不到懂的地方，回讲义对应小节读一遍，再回来对着这页复述一次——能讲出来才算真懂。</a:t>
-            </a:r>
-          </a:p>
-        </p:txBody>
-      </p:sp>
-      <p:sp>
-        <p:nvSpPr>
-          <p:cNvPr id="2" name="讲课提示"/>
-          <p:cNvSpPr txBox="1"/>
-          <p:nvPr/>
-        </p:nvSpPr>
-        <p:spPr>
-          <a:xfrm>
-            <a:off x="457200" y="457200"/>
-            <a:ext cx="6858000" cy="4800600"/>
-          </a:xfrm>
-          <a:prstGeom prst="rect">
-            <a:avLst/>
-          </a:prstGeom>
-        </p:spPr>
-        <p:txBody>
-          <a:bodyPr wrap="square"/>
-          <a:lstStyle/>
-          <a:p>
-            <a:r>
-              <a:rPr lang="zh-CN" dirty="0"/>
-              <a:t>第 62 节 · 核心知识点：★ 综合项目 3：文本统计工具</a:t>
-            </a:r>
-          </a:p>
-          <a:p>
-            <a:r>
-              <a:rPr lang="zh-CN" dirty="0"/>
-              <a:t/>
-            </a:r>
-          </a:p>
-          <a:p>
-            <a:r>
-              <a:rPr lang="zh-CN" dirty="0"/>
-              <a:t>讲这一页时：先让学生说出上节课的结论，再逐块讲要点。</a:t>
-            </a:r>
-          </a:p>
-          <a:p>
-            <a:r>
-              <a:rPr lang="zh-CN" dirty="0"/>
-              <a:t>每讲完一块，问一句「这一步如果写错了，报错会长什么样？」——把错误提前讲。</a:t>
-            </a:r>
-          </a:p>
-          <a:p>
-            <a:r>
-              <a:rPr lang="zh-CN" dirty="0"/>
-              <a:t/>
-            </a:r>
-          </a:p>
-          <a:p>
-            <a:r>
-              <a:rPr lang="zh-CN" dirty="0"/>
-              <a:t>本节目标：独立写出一个能统计词频并输出报告的文本工具</a:t>
-            </a:r>
-          </a:p>
-          <a:p>
-            <a:r>
-              <a:rPr lang="zh-CN" dirty="0"/>
-              <a:t/>
-            </a:r>
-          </a:p>
-          <a:p>
-            <a:r>
-              <a:rPr lang="zh-CN" dirty="0"/>
-              <a:t>看不到懂的地方，回讲义对应小节读一遍，再回来对着这页复述一次——能讲出来才算真懂。</a:t>
-            </a:r>
-          </a:p>
-        </p:txBody>
-      </p:sp>
-    </p:spTree>
-  </p:cSld>
-  <p:clrMapOvr>
-    <a:masterClrMapping/>
-  </p:clrMapOvr>
-</p:notes>
-</file>
-
-<file path=ppt/notesSlides/notesSlide14.xml><?xml version="1.0" encoding="utf-8"?>
-<p:notes xmlns:a="http://schemas.openxmlformats.org/drawingml/2006/main" xmlns:p="http://schemas.openxmlformats.org/presentationml/2006/main" xmlns:r="http://schemas.openxmlformats.org/officeDocument/2006/relationships">
-  <p:cSld>
-    <p:spTree>
-      <p:nvGrpSpPr>
-        <p:cNvPr id="1" name=""/>
-        <p:cNvGrpSpPr/>
-        <p:nvPr/>
-      </p:nvGrpSpPr>
-      <p:grpSpPr>
-        <a:xfrm>
-          <a:off x="0" y="0"/>
-          <a:ext cx="0" cy="0"/>
-          <a:chOff x="0" y="0"/>
-          <a:chExt cx="0" cy="0"/>
-        </a:xfrm>
-      </p:grpSpPr>
-      <p:sp>
-        <p:nvSpPr>
-          <p:cNvPr id="2" name="讲课提示"/>
-          <p:cNvSpPr txBox="1"/>
-          <p:nvPr/>
-        </p:nvSpPr>
-        <p:spPr>
-          <a:xfrm>
-            <a:off x="457200" y="457200"/>
-            <a:ext cx="6858000" cy="4800600"/>
-          </a:xfrm>
-          <a:prstGeom prst="rect">
-            <a:avLst/>
-          </a:prstGeom>
-        </p:spPr>
-        <p:txBody>
-          <a:bodyPr wrap="square"/>
-          <a:lstStyle/>
-          <a:p>
-            <a:r>
-              <a:rPr lang="zh-CN" dirty="0"/>
-              <a:t>第 63 节 · ★ 关卡 1 现场测评</a:t>
-            </a:r>
-          </a:p>
-          <a:p>
-            <a:r>
-              <a:rPr lang="zh-CN" dirty="0"/>
-              <a:t>单元 11 · 阶段 1 总复习 + 关卡验收 · W13</a:t>
-            </a:r>
-          </a:p>
-          <a:p>
-            <a:r>
-              <a:rPr lang="zh-CN" dirty="0"/>
-              <a:t/>
-            </a:r>
-          </a:p>
-          <a:p>
-            <a:r>
-              <a:rPr lang="zh-CN" dirty="0"/>
-              <a:t>学习目标：限时 2 小时完成四条硬指标，证明能独立动手</a:t>
-            </a:r>
-          </a:p>
-          <a:p>
-            <a:r>
-              <a:rPr lang="zh-CN" dirty="0"/>
-              <a:t/>
-            </a:r>
-          </a:p>
-          <a:p>
-            <a:r>
-              <a:rPr lang="zh-CN" dirty="0"/>
-              <a:t>课堂实操（40 分钟，不看答案）：</a:t>
-            </a:r>
-          </a:p>
-          <a:p>
-            <a:r>
-              <a:rPr lang="zh-CN" dirty="0"/>
-              <a:t>· 现场测评，全程不查资料，2 小时</a:t>
-            </a:r>
-          </a:p>
-          <a:p>
-            <a:r>
-              <a:rPr lang="zh-CN" dirty="0"/>
-              <a:t/>
-            </a:r>
-          </a:p>
-          <a:p>
-            <a:r>
-              <a:rPr lang="zh-CN" dirty="0"/>
-              <a:t>课后作业：</a:t>
-            </a:r>
-          </a:p>
-          <a:p>
-            <a:r>
-              <a:rPr lang="zh-CN" dirty="0"/>
-              <a:t>· ★ 关卡 1 四项逐条自测</a:t>
-            </a:r>
-          </a:p>
-          <a:p>
-            <a:r>
-              <a:rPr lang="zh-CN" dirty="0"/>
-              <a:t/>
-            </a:r>
-          </a:p>
-          <a:p>
-            <a:r>
-              <a:rPr lang="zh-CN" dirty="0"/>
-              <a:t>节奏：讲 20 分钟 → 学员自己敲 40 分钟（不看答案）→ 对讲评自查 20 分钟 → 写作业 10 分钟。</a:t>
-            </a:r>
-          </a:p>
-        </p:txBody>
-      </p:sp>
-      <p:sp>
-        <p:nvSpPr>
-          <p:cNvPr id="2" name="讲课提示"/>
-          <p:cNvSpPr txBox="1"/>
-          <p:nvPr/>
-        </p:nvSpPr>
-        <p:spPr>
-          <a:xfrm>
-            <a:off x="457200" y="457200"/>
-            <a:ext cx="6858000" cy="4800600"/>
-          </a:xfrm>
-          <a:prstGeom prst="rect">
-            <a:avLst/>
-          </a:prstGeom>
-        </p:spPr>
-        <p:txBody>
-          <a:bodyPr wrap="square"/>
-          <a:lstStyle/>
-          <a:p>
-            <a:r>
-              <a:rPr lang="zh-CN" dirty="0"/>
-              <a:t>第 63 节 · ★ 关卡 1 现场测评</a:t>
-            </a:r>
-          </a:p>
-          <a:p>
-            <a:r>
-              <a:rPr lang="zh-CN" dirty="0"/>
-              <a:t>单元 11 · 阶段 1 总复习 + 关卡验收 · W13</a:t>
-            </a:r>
-          </a:p>
-          <a:p>
-            <a:r>
-              <a:rPr lang="zh-CN" dirty="0"/>
-              <a:t/>
-            </a:r>
-          </a:p>
-          <a:p>
-            <a:r>
-              <a:rPr lang="zh-CN" dirty="0"/>
-              <a:t>学习目标：限时 2 小时完成四条硬指标，证明能独立动手</a:t>
-            </a:r>
-          </a:p>
-          <a:p>
-            <a:r>
-              <a:rPr lang="zh-CN" dirty="0"/>
-              <a:t/>
-            </a:r>
-          </a:p>
-          <a:p>
-            <a:r>
-              <a:rPr lang="zh-CN" dirty="0"/>
-              <a:t>课堂实操（40 分钟，不看答案）：</a:t>
-            </a:r>
-          </a:p>
-          <a:p>
-            <a:r>
-              <a:rPr lang="zh-CN" dirty="0"/>
-              <a:t>· 现场测评，全程不查资料，2 小时</a:t>
-            </a:r>
-          </a:p>
-          <a:p>
-            <a:r>
-              <a:rPr lang="zh-CN" dirty="0"/>
-              <a:t/>
-            </a:r>
-          </a:p>
-          <a:p>
-            <a:r>
-              <a:rPr lang="zh-CN" dirty="0"/>
-              <a:t>课后作业：</a:t>
-            </a:r>
-          </a:p>
-          <a:p>
-            <a:r>
-              <a:rPr lang="zh-CN" dirty="0"/>
-              <a:t>· ★ 关卡 1 四项逐条自测</a:t>
-            </a:r>
-          </a:p>
-          <a:p>
-            <a:r>
-              <a:rPr lang="zh-CN" dirty="0"/>
-              <a:t/>
-            </a:r>
-          </a:p>
-          <a:p>
-            <a:r>
-              <a:rPr lang="zh-CN" dirty="0"/>
-              <a:t>节奏：讲 20 分钟 → 学员自己敲 40 分钟（不看答案）→ 对讲评自查 20 分钟 → 写作业 10 分钟。</a:t>
-            </a:r>
-          </a:p>
-        </p:txBody>
-      </p:sp>
-    </p:spTree>
-  </p:cSld>
-  <p:clrMapOvr>
-    <a:masterClrMapping/>
-  </p:clrMapOvr>
-</p:notes>
-</file>
-
-<file path=ppt/notesSlides/notesSlide15.xml><?xml version="1.0" encoding="utf-8"?>
-<p:notes xmlns:a="http://schemas.openxmlformats.org/drawingml/2006/main" xmlns:p="http://schemas.openxmlformats.org/presentationml/2006/main" xmlns:r="http://schemas.openxmlformats.org/officeDocument/2006/relationships">
-  <p:cSld>
-    <p:spTree>
-      <p:nvGrpSpPr>
-        <p:cNvPr id="1" name=""/>
-        <p:cNvGrpSpPr/>
-        <p:nvPr/>
-      </p:nvGrpSpPr>
-      <p:grpSpPr>
-        <a:xfrm>
-          <a:off x="0" y="0"/>
-          <a:ext cx="0" cy="0"/>
-          <a:chOff x="0" y="0"/>
-          <a:chExt cx="0" cy="0"/>
-        </a:xfrm>
-      </p:grpSpPr>
-      <p:sp>
-        <p:nvSpPr>
-          <p:cNvPr id="2" name="讲课提示"/>
-          <p:cNvSpPr txBox="1"/>
-          <p:nvPr/>
-        </p:nvSpPr>
-        <p:spPr>
-          <a:xfrm>
-            <a:off x="457200" y="457200"/>
-            <a:ext cx="6858000" cy="4800600"/>
-          </a:xfrm>
-          <a:prstGeom prst="rect">
-            <a:avLst/>
-          </a:prstGeom>
-        </p:spPr>
-        <p:txBody>
-          <a:bodyPr wrap="square"/>
-          <a:lstStyle/>
-          <a:p>
-            <a:r>
-              <a:rPr lang="zh-CN" dirty="0"/>
-              <a:t>第 63 节 · 核心知识点：★ 关卡 1 现场测评</a:t>
-            </a:r>
-          </a:p>
-          <a:p>
-            <a:r>
-              <a:rPr lang="zh-CN" dirty="0"/>
-              <a:t/>
-            </a:r>
-          </a:p>
-          <a:p>
-            <a:r>
-              <a:rPr lang="zh-CN" dirty="0"/>
-              <a:t>讲这一页时：先让学生说出上节课的结论，再逐块讲要点。</a:t>
-            </a:r>
-          </a:p>
-          <a:p>
-            <a:r>
-              <a:rPr lang="zh-CN" dirty="0"/>
-              <a:t>每讲完一块，问一句「这一步如果写错了，报错会长什么样？」——把错误提前讲。</a:t>
-            </a:r>
-          </a:p>
-          <a:p>
-            <a:r>
-              <a:rPr lang="zh-CN" dirty="0"/>
-              <a:t/>
-            </a:r>
-          </a:p>
-          <a:p>
-            <a:r>
-              <a:rPr lang="zh-CN" dirty="0"/>
-              <a:t>本节目标：限时 2 小时完成四条硬指标，证明能独立动手</a:t>
-            </a:r>
-          </a:p>
-          <a:p>
-            <a:r>
-              <a:rPr lang="zh-CN" dirty="0"/>
-              <a:t/>
-            </a:r>
-          </a:p>
-          <a:p>
-            <a:r>
-              <a:rPr lang="zh-CN" dirty="0"/>
-              <a:t>看不到懂的地方，回讲义对应小节读一遍，再回来对着这页复述一次——能讲出来才算真懂。</a:t>
-            </a:r>
-          </a:p>
-        </p:txBody>
-      </p:sp>
-      <p:sp>
-        <p:nvSpPr>
-          <p:cNvPr id="2" name="讲课提示"/>
-          <p:cNvSpPr txBox="1"/>
-          <p:nvPr/>
-        </p:nvSpPr>
-        <p:spPr>
-          <a:xfrm>
-            <a:off x="457200" y="457200"/>
-            <a:ext cx="6858000" cy="4800600"/>
-          </a:xfrm>
-          <a:prstGeom prst="rect">
-            <a:avLst/>
-          </a:prstGeom>
-        </p:spPr>
-        <p:txBody>
-          <a:bodyPr wrap="square"/>
-          <a:lstStyle/>
-          <a:p>
-            <a:r>
-              <a:rPr lang="zh-CN" dirty="0"/>
-              <a:t>第 63 节 · 核心知识点：★ 关卡 1 现场测评</a:t>
-            </a:r>
-          </a:p>
-          <a:p>
-            <a:r>
-              <a:rPr lang="zh-CN" dirty="0"/>
-              <a:t/>
-            </a:r>
-          </a:p>
-          <a:p>
-            <a:r>
-              <a:rPr lang="zh-CN" dirty="0"/>
-              <a:t>讲这一页时：先让学生说出上节课的结论，再逐块讲要点。</a:t>
-            </a:r>
-          </a:p>
-          <a:p>
-            <a:r>
-              <a:rPr lang="zh-CN" dirty="0"/>
-              <a:t>每讲完一块，问一句「这一步如果写错了，报错会长什么样？」——把错误提前讲。</a:t>
-            </a:r>
-          </a:p>
-          <a:p>
-            <a:r>
-              <a:rPr lang="zh-CN" dirty="0"/>
-              <a:t/>
-            </a:r>
-          </a:p>
-          <a:p>
-            <a:r>
-              <a:rPr lang="zh-CN" dirty="0"/>
-              <a:t>本节目标：限时 2 小时完成四条硬指标，证明能独立动手</a:t>
-            </a:r>
-          </a:p>
-          <a:p>
-            <a:r>
-              <a:rPr lang="zh-CN" dirty="0"/>
-              <a:t/>
-            </a:r>
-          </a:p>
-          <a:p>
-            <a:r>
-              <a:rPr lang="zh-CN" dirty="0"/>
-              <a:t>看不到懂的地方，回讲义对应小节读一遍，再回来对着这页复述一次——能讲出来才算真懂。</a:t>
-            </a:r>
-          </a:p>
-        </p:txBody>
-      </p:sp>
-    </p:spTree>
-  </p:cSld>
-  <p:clrMapOvr>
-    <a:masterClrMapping/>
-  </p:clrMapOvr>
-</p:notes>
-</file>
-
-<file path=ppt/notesSlides/notesSlide16.xml><?xml version="1.0" encoding="utf-8"?>
-<p:notes xmlns:a="http://schemas.openxmlformats.org/drawingml/2006/main" xmlns:p="http://schemas.openxmlformats.org/presentationml/2006/main" xmlns:r="http://schemas.openxmlformats.org/officeDocument/2006/relationships">
-  <p:cSld>
-    <p:spTree>
-      <p:nvGrpSpPr>
-        <p:cNvPr id="1" name=""/>
-        <p:cNvGrpSpPr/>
-        <p:nvPr/>
-      </p:nvGrpSpPr>
-      <p:grpSpPr>
-        <a:xfrm>
-          <a:off x="0" y="0"/>
-          <a:ext cx="0" cy="0"/>
-          <a:chOff x="0" y="0"/>
-          <a:chExt cx="0" cy="0"/>
-        </a:xfrm>
-      </p:grpSpPr>
-      <p:sp>
-        <p:nvSpPr>
-          <p:cNvPr id="2" name="讲课提示"/>
-          <p:cNvSpPr txBox="1"/>
-          <p:nvPr/>
-        </p:nvSpPr>
-        <p:spPr>
-          <a:xfrm>
-            <a:off x="457200" y="457200"/>
-            <a:ext cx="6858000" cy="4800600"/>
-          </a:xfrm>
-          <a:prstGeom prst="rect">
-            <a:avLst/>
-          </a:prstGeom>
-        </p:spPr>
-        <p:txBody>
-          <a:bodyPr wrap="square"/>
-          <a:lstStyle/>
-          <a:p>
-            <a:r>
-              <a:rPr lang="zh-CN" dirty="0"/>
-              <a:t>第 64 节 · 结业检查与下一阶段</a:t>
-            </a:r>
-          </a:p>
-          <a:p>
-            <a:r>
-              <a:rPr lang="zh-CN" dirty="0"/>
-              <a:t>单元 11 · 阶段 1 总复习 + 关卡验收 · W13</a:t>
-            </a:r>
-          </a:p>
-          <a:p>
-            <a:r>
-              <a:rPr lang="zh-CN" dirty="0"/>
-              <a:t/>
-            </a:r>
-          </a:p>
-          <a:p>
-            <a:r>
-              <a:rPr lang="zh-CN" dirty="0"/>
-              <a:t>学习目标：确认四条验收是否全通过，明确阶段 1 的能力边界与下一步</a:t>
-            </a:r>
-          </a:p>
-          <a:p>
-            <a:r>
-              <a:rPr lang="zh-CN" dirty="0"/>
-              <a:t/>
-            </a:r>
-          </a:p>
-          <a:p>
-            <a:r>
-              <a:rPr lang="zh-CN" dirty="0"/>
-              <a:t>课堂实操（40 分钟，不看答案）：</a:t>
-            </a:r>
-          </a:p>
-          <a:p>
-            <a:r>
-              <a:rPr lang="zh-CN" dirty="0"/>
-              <a:t>· 对照四条硬指标逐条打勾</a:t>
-            </a:r>
-          </a:p>
-          <a:p>
-            <a:r>
-              <a:rPr lang="zh-CN" dirty="0"/>
-              <a:t>· 没通过的项定下补齐计划</a:t>
-            </a:r>
-          </a:p>
-          <a:p>
-            <a:r>
-              <a:rPr lang="zh-CN" dirty="0"/>
-              <a:t/>
-            </a:r>
-          </a:p>
-          <a:p>
-            <a:r>
-              <a:rPr lang="zh-CN" dirty="0"/>
-              <a:t>课后作业：</a:t>
-            </a:r>
-          </a:p>
-          <a:p>
-            <a:r>
-              <a:rPr lang="zh-CN" dirty="0"/>
-              <a:t>· 完成综合自测 10 题</a:t>
-            </a:r>
-          </a:p>
-          <a:p>
-            <a:r>
-              <a:rPr lang="zh-CN" dirty="0"/>
-              <a:t>· 产出：一份阶段 1 学习总结</a:t>
-            </a:r>
-          </a:p>
-          <a:p>
-            <a:r>
-              <a:rPr lang="zh-CN" dirty="0"/>
-              <a:t/>
-            </a:r>
-          </a:p>
-          <a:p>
-            <a:r>
-              <a:rPr lang="zh-CN" dirty="0"/>
-              <a:t>节奏：讲 20 分钟 → 学员自己敲 40 分钟（不看答案）→ 对讲评自查 20 分钟 → 写作业 10 分钟。</a:t>
-            </a:r>
-          </a:p>
-        </p:txBody>
-      </p:sp>
-      <p:sp>
-        <p:nvSpPr>
-          <p:cNvPr id="2" name="讲课提示"/>
-          <p:cNvSpPr txBox="1"/>
-          <p:nvPr/>
-        </p:nvSpPr>
-        <p:spPr>
-          <a:xfrm>
-            <a:off x="457200" y="457200"/>
-            <a:ext cx="6858000" cy="4800600"/>
-          </a:xfrm>
-          <a:prstGeom prst="rect">
-            <a:avLst/>
-          </a:prstGeom>
-        </p:spPr>
-        <p:txBody>
-          <a:bodyPr wrap="square"/>
-          <a:lstStyle/>
-          <a:p>
-            <a:r>
-              <a:rPr lang="zh-CN" dirty="0"/>
-              <a:t>第 64 节 · 结业检查与下一阶段</a:t>
-            </a:r>
-          </a:p>
-          <a:p>
-            <a:r>
-              <a:rPr lang="zh-CN" dirty="0"/>
-              <a:t>单元 11 · 阶段 1 总复习 + 关卡验收 · W13</a:t>
-            </a:r>
-          </a:p>
-          <a:p>
-            <a:r>
-              <a:rPr lang="zh-CN" dirty="0"/>
-              <a:t/>
-            </a:r>
-          </a:p>
-          <a:p>
-            <a:r>
-              <a:rPr lang="zh-CN" dirty="0"/>
-              <a:t>学习目标：确认四条验收是否全通过，明确阶段 1 的能力边界与下一步</a:t>
-            </a:r>
-          </a:p>
-          <a:p>
-            <a:r>
-              <a:rPr lang="zh-CN" dirty="0"/>
-              <a:t/>
-            </a:r>
-          </a:p>
-          <a:p>
-            <a:r>
-              <a:rPr lang="zh-CN" dirty="0"/>
-              <a:t>课堂实操（40 分钟，不看答案）：</a:t>
-            </a:r>
-          </a:p>
-          <a:p>
-            <a:r>
-              <a:rPr lang="zh-CN" dirty="0"/>
-              <a:t>· 对照四条硬指标逐条打勾</a:t>
-            </a:r>
-          </a:p>
-          <a:p>
-            <a:r>
-              <a:rPr lang="zh-CN" dirty="0"/>
-              <a:t>· 没通过的项定下补齐计划</a:t>
-            </a:r>
-          </a:p>
-          <a:p>
-            <a:r>
-              <a:rPr lang="zh-CN" dirty="0"/>
-              <a:t/>
-            </a:r>
-          </a:p>
-          <a:p>
-            <a:r>
-              <a:rPr lang="zh-CN" dirty="0"/>
-              <a:t>课后作业：</a:t>
-            </a:r>
-          </a:p>
-          <a:p>
-            <a:r>
-              <a:rPr lang="zh-CN" dirty="0"/>
-              <a:t>· 完成综合自测 10 题</a:t>
-            </a:r>
-          </a:p>
-          <a:p>
-            <a:r>
-              <a:rPr lang="zh-CN" dirty="0"/>
-              <a:t>· 产出：一份阶段 1 学习总结</a:t>
-            </a:r>
-          </a:p>
-          <a:p>
-            <a:r>
-              <a:rPr lang="zh-CN" dirty="0"/>
-              <a:t/>
-            </a:r>
-          </a:p>
-          <a:p>
-            <a:r>
-              <a:rPr lang="zh-CN" dirty="0"/>
-              <a:t>节奏：讲 20 分钟 → 学员自己敲 40 分钟（不看答案）→ 对讲评自查 20 分钟 → 写作业 10 分钟。</a:t>
-            </a:r>
-          </a:p>
-        </p:txBody>
-      </p:sp>
-    </p:spTree>
-  </p:cSld>
-  <p:clrMapOvr>
-    <a:masterClrMapping/>
-  </p:clrMapOvr>
-</p:notes>
-</file>
-
-<file path=ppt/notesSlides/notesSlide17.xml><?xml version="1.0" encoding="utf-8"?>
-<p:notes xmlns:a="http://schemas.openxmlformats.org/drawingml/2006/main" xmlns:p="http://schemas.openxmlformats.org/presentationml/2006/main" xmlns:r="http://schemas.openxmlformats.org/officeDocument/2006/relationships">
-  <p:cSld>
-    <p:spTree>
-      <p:nvGrpSpPr>
-        <p:cNvPr id="1" name=""/>
-        <p:cNvGrpSpPr/>
-        <p:nvPr/>
-      </p:nvGrpSpPr>
-      <p:grpSpPr>
-        <a:xfrm>
-          <a:off x="0" y="0"/>
-          <a:ext cx="0" cy="0"/>
-          <a:chOff x="0" y="0"/>
-          <a:chExt cx="0" cy="0"/>
-        </a:xfrm>
-      </p:grpSpPr>
-      <p:sp>
-        <p:nvSpPr>
-          <p:cNvPr id="2" name="讲课提示"/>
-          <p:cNvSpPr txBox="1"/>
-          <p:nvPr/>
-        </p:nvSpPr>
-        <p:spPr>
-          <a:xfrm>
-            <a:off x="457200" y="457200"/>
-            <a:ext cx="6858000" cy="4800600"/>
-          </a:xfrm>
-          <a:prstGeom prst="rect">
-            <a:avLst/>
-          </a:prstGeom>
-        </p:spPr>
-        <p:txBody>
-          <a:bodyPr wrap="square"/>
-          <a:lstStyle/>
-          <a:p>
-            <a:r>
-              <a:rPr lang="zh-CN" dirty="0"/>
-              <a:t>第 64 节 · 核心知识点：结业检查与下一阶段</a:t>
-            </a:r>
-          </a:p>
-          <a:p>
-            <a:r>
-              <a:rPr lang="zh-CN" dirty="0"/>
-              <a:t/>
-            </a:r>
-          </a:p>
-          <a:p>
-            <a:r>
-              <a:rPr lang="zh-CN" dirty="0"/>
-              <a:t>讲这一页时：先让学生说出上节课的结论，再逐块讲要点。</a:t>
-            </a:r>
-          </a:p>
-          <a:p>
-            <a:r>
-              <a:rPr lang="zh-CN" dirty="0"/>
-              <a:t>每讲完一块，问一句「这一步如果写错了，报错会长什么样？」——把错误提前讲。</a:t>
-            </a:r>
-          </a:p>
-          <a:p>
-            <a:r>
-              <a:rPr lang="zh-CN" dirty="0"/>
-              <a:t/>
-            </a:r>
-          </a:p>
-          <a:p>
-            <a:r>
-              <a:rPr lang="zh-CN" dirty="0"/>
-              <a:t>本节目标：确认四条验收是否全通过，明确阶段 1 的能力边界与下一步</a:t>
-            </a:r>
-          </a:p>
-          <a:p>
-            <a:r>
-              <a:rPr lang="zh-CN" dirty="0"/>
-              <a:t/>
-            </a:r>
-          </a:p>
-          <a:p>
-            <a:r>
-              <a:rPr lang="zh-CN" dirty="0"/>
-              <a:t>看不到懂的地方，回讲义对应小节读一遍，再回来对着这页复述一次——能讲出来才算真懂。</a:t>
-            </a:r>
-          </a:p>
-        </p:txBody>
-      </p:sp>
-      <p:sp>
-        <p:nvSpPr>
-          <p:cNvPr id="2" name="讲课提示"/>
-          <p:cNvSpPr txBox="1"/>
-          <p:nvPr/>
-        </p:nvSpPr>
-        <p:spPr>
-          <a:xfrm>
-            <a:off x="457200" y="457200"/>
-            <a:ext cx="6858000" cy="4800600"/>
-          </a:xfrm>
-          <a:prstGeom prst="rect">
-            <a:avLst/>
-          </a:prstGeom>
-        </p:spPr>
-        <p:txBody>
-          <a:bodyPr wrap="square"/>
-          <a:lstStyle/>
-          <a:p>
-            <a:r>
-              <a:rPr lang="zh-CN" dirty="0"/>
-              <a:t>第 64 节 · 核心知识点：结业检查与下一阶段</a:t>
-            </a:r>
-          </a:p>
-          <a:p>
-            <a:r>
-              <a:rPr lang="zh-CN" dirty="0"/>
-              <a:t/>
-            </a:r>
-          </a:p>
-          <a:p>
-            <a:r>
-              <a:rPr lang="zh-CN" dirty="0"/>
-              <a:t>讲这一页时：先让学生说出上节课的结论，再逐块讲要点。</a:t>
-            </a:r>
-          </a:p>
-          <a:p>
-            <a:r>
-              <a:rPr lang="zh-CN" dirty="0"/>
-              <a:t>每讲完一块，问一句「这一步如果写错了，报错会长什么样？」——把错误提前讲。</a:t>
-            </a:r>
-          </a:p>
-          <a:p>
-            <a:r>
-              <a:rPr lang="zh-CN" dirty="0"/>
-              <a:t/>
-            </a:r>
-          </a:p>
-          <a:p>
-            <a:r>
-              <a:rPr lang="zh-CN" dirty="0"/>
-              <a:t>本节目标：确认四条验收是否全通过，明确阶段 1 的能力边界与下一步</a:t>
-            </a:r>
-          </a:p>
-          <a:p>
-            <a:r>
-              <a:rPr lang="zh-CN" dirty="0"/>
-              <a:t/>
-            </a:r>
-          </a:p>
-          <a:p>
-            <a:r>
-              <a:rPr lang="zh-CN" dirty="0"/>
-              <a:t>看不到懂的地方，回讲义对应小节读一遍，再回来对着这页复述一次——能讲出来才算真懂。</a:t>
-            </a:r>
-          </a:p>
-        </p:txBody>
-      </p:sp>
-    </p:spTree>
-  </p:cSld>
-  <p:clrMapOvr>
-    <a:masterClrMapping/>
-  </p:clrMapOvr>
-</p:notes>
-</file>
-
-<file path=ppt/notesSlides/notesSlide18.xml><?xml version="1.0" encoding="utf-8"?>
-<p:notes xmlns:a="http://schemas.openxmlformats.org/drawingml/2006/main" xmlns:p="http://schemas.openxmlformats.org/presentationml/2006/main" xmlns:r="http://schemas.openxmlformats.org/officeDocument/2006/relationships">
-  <p:cSld>
-    <p:spTree>
-      <p:nvGrpSpPr>
-        <p:cNvPr id="1" name=""/>
-        <p:cNvGrpSpPr/>
-        <p:nvPr/>
-      </p:nvGrpSpPr>
-      <p:grpSpPr>
-        <a:xfrm>
-          <a:off x="0" y="0"/>
-          <a:ext cx="0" cy="0"/>
-          <a:chOff x="0" y="0"/>
-          <a:chExt cx="0" cy="0"/>
-        </a:xfrm>
-      </p:grpSpPr>
-      <p:sp>
-        <p:nvSpPr>
-          <p:cNvPr id="2" name="讲课提示"/>
-          <p:cNvSpPr txBox="1"/>
-          <p:nvPr/>
-        </p:nvSpPr>
-        <p:spPr>
-          <a:xfrm>
-            <a:off x="457200" y="457200"/>
-            <a:ext cx="6858000" cy="4800600"/>
-          </a:xfrm>
-          <a:prstGeom prst="rect">
-            <a:avLst/>
-          </a:prstGeom>
-        </p:spPr>
-        <p:txBody>
-          <a:bodyPr wrap="square"/>
-          <a:lstStyle/>
-          <a:p>
-            <a:r>
-              <a:rPr lang="zh-CN" dirty="0"/>
-              <a:t>单元 11 小结 · 单元 11 · 小结</a:t>
-            </a:r>
-          </a:p>
-          <a:p>
-            <a:r>
-              <a:rPr lang="zh-CN" dirty="0"/>
-              <a:t/>
-            </a:r>
-          </a:p>
-          <a:p>
-            <a:r>
-              <a:rPr lang="zh-CN" dirty="0"/>
-              <a:t>收尾动作：让学生合上讲义，口述本单元三个最重要的结论；说不出来的，回对应课节。</a:t>
-            </a:r>
-          </a:p>
-          <a:p>
-            <a:r>
-              <a:rPr lang="zh-CN" dirty="0"/>
-              <a:t>然后当场勾一遍本单元课节的「已完成」，没打勾的进下一单元前补掉。</a:t>
-            </a:r>
-          </a:p>
-        </p:txBody>
-      </p:sp>
-      <p:sp>
-        <p:nvSpPr>
-          <p:cNvPr id="2" name="讲课提示"/>
-          <p:cNvSpPr txBox="1"/>
-          <p:nvPr/>
-        </p:nvSpPr>
-        <p:spPr>
-          <a:xfrm>
-            <a:off x="457200" y="457200"/>
-            <a:ext cx="6858000" cy="4800600"/>
-          </a:xfrm>
-          <a:prstGeom prst="rect">
-            <a:avLst/>
-          </a:prstGeom>
-        </p:spPr>
-        <p:txBody>
-          <a:bodyPr wrap="square"/>
-          <a:lstStyle/>
-          <a:p>
-            <a:r>
-              <a:rPr lang="zh-CN" dirty="0"/>
-              <a:t>单元 11 小结 · 单元 11 · 小结</a:t>
-            </a:r>
-          </a:p>
-          <a:p>
-            <a:r>
-              <a:rPr lang="zh-CN" dirty="0"/>
-              <a:t/>
-            </a:r>
-          </a:p>
-          <a:p>
-            <a:r>
-              <a:rPr lang="zh-CN" dirty="0"/>
-              <a:t>收尾动作：让学生合上讲义，口述本单元三个最重要的结论；说不出来的，回对应课节。</a:t>
-            </a:r>
-          </a:p>
-          <a:p>
-            <a:r>
-              <a:rPr lang="zh-CN" dirty="0"/>
-              <a:t>然后当场勾一遍本单元课节的「已完成」，没打勾的进下一单元前补掉。</a:t>
-            </a:r>
-          </a:p>
-        </p:txBody>
-      </p:sp>
-    </p:spTree>
-  </p:cSld>
-  <p:clrMapOvr>
-    <a:masterClrMapping/>
-  </p:clrMapOvr>
-</p:notes>
-</file>
-
-<file path=ppt/notesSlides/notesSlide2.xml><?xml version="1.0" encoding="utf-8"?>
-<p:notes xmlns:a="http://schemas.openxmlformats.org/drawingml/2006/main" xmlns:p="http://schemas.openxmlformats.org/presentationml/2006/main" xmlns:r="http://schemas.openxmlformats.org/officeDocument/2006/relationships">
-  <p:cSld>
-    <p:spTree>
-      <p:nvGrpSpPr>
-        <p:cNvPr id="1" name=""/>
-        <p:cNvGrpSpPr/>
-        <p:nvPr/>
-      </p:nvGrpSpPr>
-      <p:grpSpPr>
-        <a:xfrm>
-          <a:off x="0" y="0"/>
-          <a:ext cx="0" cy="0"/>
-          <a:chOff x="0" y="0"/>
-          <a:chExt cx="0" cy="0"/>
-        </a:xfrm>
-      </p:grpSpPr>
-      <p:sp>
-        <p:nvSpPr>
-          <p:cNvPr id="2" name="讲课提示"/>
-          <p:cNvSpPr txBox="1"/>
-          <p:nvPr/>
-        </p:nvSpPr>
-        <p:spPr>
-          <a:xfrm>
-            <a:off x="457200" y="457200"/>
-            <a:ext cx="6858000" cy="4800600"/>
-          </a:xfrm>
-          <a:prstGeom prst="rect">
-            <a:avLst/>
-          </a:prstGeom>
-        </p:spPr>
-        <p:txBody>
-          <a:bodyPr wrap="square"/>
-          <a:lstStyle/>
-          <a:p>
-            <a:r>
-              <a:rPr lang="zh-CN" dirty="0"/>
-              <a:t>第 57 节 · 知识串讲与能力地图</a:t>
-            </a:r>
-          </a:p>
-          <a:p>
-            <a:r>
-              <a:rPr lang="zh-CN" dirty="0"/>
-              <a:t>单元 11 · 阶段 1 总复习 + 关卡验收 · W13</a:t>
-            </a:r>
-          </a:p>
-          <a:p>
-            <a:r>
-              <a:rPr lang="zh-CN" dirty="0"/>
-              <a:t/>
-            </a:r>
-          </a:p>
-          <a:p>
-            <a:r>
-              <a:rPr lang="zh-CN" dirty="0"/>
-              <a:t>学习目标：把 11 章串成一条线，能说出每个知识点解决什么问题</a:t>
-            </a:r>
-          </a:p>
-          <a:p>
-            <a:r>
-              <a:rPr lang="zh-CN" dirty="0"/>
-              <a:t/>
-            </a:r>
-          </a:p>
-          <a:p>
-            <a:r>
-              <a:rPr lang="zh-CN" dirty="0"/>
-              <a:t>课堂实操（40 分钟，不看答案）：</a:t>
-            </a:r>
-          </a:p>
-          <a:p>
-            <a:r>
-              <a:rPr lang="zh-CN" dirty="0"/>
-              <a:t>· 画一张从变量到类的知识图谱</a:t>
-            </a:r>
-          </a:p>
-          <a:p>
-            <a:r>
-              <a:rPr lang="zh-CN" dirty="0"/>
-              <a:t>· 互相考 10 个最易错的点</a:t>
-            </a:r>
-          </a:p>
-          <a:p>
-            <a:r>
-              <a:rPr lang="zh-CN" dirty="0"/>
-              <a:t/>
-            </a:r>
-          </a:p>
-          <a:p>
-            <a:r>
-              <a:rPr lang="zh-CN" dirty="0"/>
-              <a:t>课后作业：</a:t>
-            </a:r>
-          </a:p>
-          <a:p>
-            <a:r>
-              <a:rPr lang="zh-CN" dirty="0"/>
-              <a:t>· 完成单元 11 动手练习基础档</a:t>
-            </a:r>
-          </a:p>
-          <a:p>
-            <a:r>
-              <a:rPr lang="zh-CN" dirty="0"/>
-              <a:t/>
-            </a:r>
-          </a:p>
-          <a:p>
-            <a:r>
-              <a:rPr lang="zh-CN" dirty="0"/>
-              <a:t>节奏：讲 20 分钟 → 学员自己敲 40 分钟（不看答案）→ 对讲评自查 20 分钟 → 写作业 10 分钟。</a:t>
-            </a:r>
-          </a:p>
-        </p:txBody>
-      </p:sp>
-      <p:sp>
-        <p:nvSpPr>
-          <p:cNvPr id="2" name="讲课提示"/>
-          <p:cNvSpPr txBox="1"/>
-          <p:nvPr/>
-        </p:nvSpPr>
-        <p:spPr>
-          <a:xfrm>
-            <a:off x="457200" y="457200"/>
-            <a:ext cx="6858000" cy="4800600"/>
-          </a:xfrm>
-          <a:prstGeom prst="rect">
-            <a:avLst/>
-          </a:prstGeom>
-        </p:spPr>
-        <p:txBody>
-          <a:bodyPr wrap="square"/>
-          <a:lstStyle/>
-          <a:p>
-            <a:r>
-              <a:rPr lang="zh-CN" dirty="0"/>
-              <a:t>第 57 节 · 知识串讲与能力地图</a:t>
-            </a:r>
-          </a:p>
-          <a:p>
-            <a:r>
-              <a:rPr lang="zh-CN" dirty="0"/>
-              <a:t>单元 11 · 阶段 1 总复习 + 关卡验收 · W13</a:t>
-            </a:r>
-          </a:p>
-          <a:p>
-            <a:r>
-              <a:rPr lang="zh-CN" dirty="0"/>
-              <a:t/>
-            </a:r>
-          </a:p>
-          <a:p>
-            <a:r>
-              <a:rPr lang="zh-CN" dirty="0"/>
-              <a:t>学习目标：把 11 章串成一条线，能说出每个知识点解决什么问题</a:t>
-            </a:r>
-          </a:p>
-          <a:p>
-            <a:r>
-              <a:rPr lang="zh-CN" dirty="0"/>
-              <a:t/>
-            </a:r>
-          </a:p>
-          <a:p>
-            <a:r>
-              <a:rPr lang="zh-CN" dirty="0"/>
-              <a:t>课堂实操（40 分钟，不看答案）：</a:t>
-            </a:r>
-          </a:p>
-          <a:p>
-            <a:r>
-              <a:rPr lang="zh-CN" dirty="0"/>
-              <a:t>· 画一张从变量到类的知识图谱</a:t>
-            </a:r>
-          </a:p>
-          <a:p>
-            <a:r>
-              <a:rPr lang="zh-CN" dirty="0"/>
-              <a:t>· 互相考 10 个最易错的点</a:t>
-            </a:r>
-          </a:p>
-          <a:p>
-            <a:r>
-              <a:rPr lang="zh-CN" dirty="0"/>
-              <a:t/>
-            </a:r>
-          </a:p>
-          <a:p>
-            <a:r>
-              <a:rPr lang="zh-CN" dirty="0"/>
-              <a:t>课后作业：</a:t>
-            </a:r>
-          </a:p>
-          <a:p>
-            <a:r>
-              <a:rPr lang="zh-CN" dirty="0"/>
-              <a:t>· 完成单元 11 动手练习基础档</a:t>
-            </a:r>
-          </a:p>
-          <a:p>
-            <a:r>
-              <a:rPr lang="zh-CN" dirty="0"/>
-              <a:t/>
-            </a:r>
-          </a:p>
-          <a:p>
-            <a:r>
-              <a:rPr lang="zh-CN" dirty="0"/>
-              <a:t>节奏：讲 20 分钟 → 学员自己敲 40 分钟（不看答案）→ 对讲评自查 20 分钟 → 写作业 10 分钟。</a:t>
-            </a:r>
-          </a:p>
-        </p:txBody>
-      </p:sp>
-    </p:spTree>
-  </p:cSld>
-  <p:clrMapOvr>
-    <a:masterClrMapping/>
-  </p:clrMapOvr>
-</p:notes>
-</file>
-
-<file path=ppt/notesSlides/notesSlide3.xml><?xml version="1.0" encoding="utf-8"?>
-<p:notes xmlns:a="http://schemas.openxmlformats.org/drawingml/2006/main" xmlns:p="http://schemas.openxmlformats.org/presentationml/2006/main" xmlns:r="http://schemas.openxmlformats.org/officeDocument/2006/relationships">
-  <p:cSld>
-    <p:spTree>
-      <p:nvGrpSpPr>
-        <p:cNvPr id="1" name=""/>
-        <p:cNvGrpSpPr/>
-        <p:nvPr/>
-      </p:nvGrpSpPr>
-      <p:grpSpPr>
-        <a:xfrm>
-          <a:off x="0" y="0"/>
-          <a:ext cx="0" cy="0"/>
-          <a:chOff x="0" y="0"/>
-          <a:chExt cx="0" cy="0"/>
-        </a:xfrm>
-      </p:grpSpPr>
-      <p:sp>
-        <p:nvSpPr>
-          <p:cNvPr id="2" name="讲课提示"/>
-          <p:cNvSpPr txBox="1"/>
-          <p:nvPr/>
-        </p:nvSpPr>
-        <p:spPr>
-          <a:xfrm>
-            <a:off x="457200" y="457200"/>
-            <a:ext cx="6858000" cy="4800600"/>
-          </a:xfrm>
-          <a:prstGeom prst="rect">
-            <a:avLst/>
-          </a:prstGeom>
-        </p:spPr>
-        <p:txBody>
-          <a:bodyPr wrap="square"/>
-          <a:lstStyle/>
-          <a:p>
-            <a:r>
-              <a:rPr lang="zh-CN" dirty="0"/>
-              <a:t>第 57 节 · 核心知识点：知识串讲与能力地图</a:t>
-            </a:r>
-          </a:p>
-          <a:p>
-            <a:r>
-              <a:rPr lang="zh-CN" dirty="0"/>
-              <a:t/>
-            </a:r>
-          </a:p>
-          <a:p>
-            <a:r>
-              <a:rPr lang="zh-CN" dirty="0"/>
-              <a:t>讲这一页时：先让学生说出上节课的结论，再逐块讲要点。</a:t>
-            </a:r>
-          </a:p>
-          <a:p>
-            <a:r>
-              <a:rPr lang="zh-CN" dirty="0"/>
-              <a:t>每讲完一块，问一句「这一步如果写错了，报错会长什么样？」——把错误提前讲。</a:t>
-            </a:r>
-          </a:p>
-          <a:p>
-            <a:r>
-              <a:rPr lang="zh-CN" dirty="0"/>
-              <a:t/>
-            </a:r>
-          </a:p>
-          <a:p>
-            <a:r>
-              <a:rPr lang="zh-CN" dirty="0"/>
-              <a:t>本节目标：把 11 章串成一条线，能说出每个知识点解决什么问题</a:t>
-            </a:r>
-          </a:p>
-          <a:p>
-            <a:r>
-              <a:rPr lang="zh-CN" dirty="0"/>
-              <a:t/>
-            </a:r>
-          </a:p>
-          <a:p>
-            <a:r>
-              <a:rPr lang="zh-CN" dirty="0"/>
-              <a:t>看不到懂的地方，回讲义对应小节读一遍，再回来对着这页复述一次——能讲出来才算真懂。</a:t>
-            </a:r>
-          </a:p>
-        </p:txBody>
-      </p:sp>
-      <p:sp>
-        <p:nvSpPr>
-          <p:cNvPr id="2" name="讲课提示"/>
-          <p:cNvSpPr txBox="1"/>
-          <p:nvPr/>
-        </p:nvSpPr>
-        <p:spPr>
-          <a:xfrm>
-            <a:off x="457200" y="457200"/>
-            <a:ext cx="6858000" cy="4800600"/>
-          </a:xfrm>
-          <a:prstGeom prst="rect">
-            <a:avLst/>
-          </a:prstGeom>
-        </p:spPr>
-        <p:txBody>
-          <a:bodyPr wrap="square"/>
-          <a:lstStyle/>
-          <a:p>
-            <a:r>
-              <a:rPr lang="zh-CN" dirty="0"/>
-              <a:t>第 57 节 · 核心知识点：知识串讲与能力地图</a:t>
-            </a:r>
-          </a:p>
-          <a:p>
-            <a:r>
-              <a:rPr lang="zh-CN" dirty="0"/>
-              <a:t/>
-            </a:r>
-          </a:p>
-          <a:p>
-            <a:r>
-              <a:rPr lang="zh-CN" dirty="0"/>
-              <a:t>讲这一页时：先让学生说出上节课的结论，再逐块讲要点。</a:t>
-            </a:r>
-          </a:p>
-          <a:p>
-            <a:r>
-              <a:rPr lang="zh-CN" dirty="0"/>
-              <a:t>每讲完一块，问一句「这一步如果写错了，报错会长什么样？」——把错误提前讲。</a:t>
-            </a:r>
-          </a:p>
-          <a:p>
-            <a:r>
-              <a:rPr lang="zh-CN" dirty="0"/>
-              <a:t/>
-            </a:r>
-          </a:p>
-          <a:p>
-            <a:r>
-              <a:rPr lang="zh-CN" dirty="0"/>
-              <a:t>本节目标：把 11 章串成一条线，能说出每个知识点解决什么问题</a:t>
-            </a:r>
-          </a:p>
-          <a:p>
-            <a:r>
-              <a:rPr lang="zh-CN" dirty="0"/>
-              <a:t/>
-            </a:r>
-          </a:p>
-          <a:p>
-            <a:r>
-              <a:rPr lang="zh-CN" dirty="0"/>
-              <a:t>看不到懂的地方，回讲义对应小节读一遍，再回来对着这页复述一次——能讲出来才算真懂。</a:t>
-            </a:r>
-          </a:p>
-        </p:txBody>
-      </p:sp>
-    </p:spTree>
-  </p:cSld>
-  <p:clrMapOvr>
-    <a:masterClrMapping/>
-  </p:clrMapOvr>
-</p:notes>
-</file>
-
-<file path=ppt/notesSlides/notesSlide4.xml><?xml version="1.0" encoding="utf-8"?>
-<p:notes xmlns:a="http://schemas.openxmlformats.org/drawingml/2006/main" xmlns:p="http://schemas.openxmlformats.org/presentationml/2006/main" xmlns:r="http://schemas.openxmlformats.org/officeDocument/2006/relationships">
-  <p:cSld>
-    <p:spTree>
-      <p:nvGrpSpPr>
-        <p:cNvPr id="1" name=""/>
-        <p:cNvGrpSpPr/>
-        <p:nvPr/>
-      </p:nvGrpSpPr>
-      <p:grpSpPr>
-        <a:xfrm>
-          <a:off x="0" y="0"/>
-          <a:ext cx="0" cy="0"/>
-          <a:chOff x="0" y="0"/>
-          <a:chExt cx="0" cy="0"/>
-        </a:xfrm>
-      </p:grpSpPr>
-      <p:sp>
-        <p:nvSpPr>
-          <p:cNvPr id="2" name="讲课提示"/>
-          <p:cNvSpPr txBox="1"/>
-          <p:nvPr/>
-        </p:nvSpPr>
-        <p:spPr>
-          <a:xfrm>
-            <a:off x="457200" y="457200"/>
-            <a:ext cx="6858000" cy="4800600"/>
-          </a:xfrm>
-          <a:prstGeom prst="rect">
-            <a:avLst/>
-          </a:prstGeom>
-        </p:spPr>
-        <p:txBody>
-          <a:bodyPr wrap="square"/>
-          <a:lstStyle/>
-          <a:p>
-            <a:r>
-              <a:rPr lang="zh-CN" dirty="0"/>
-              <a:t>第 58 节 · 排错思路与项目骨架</a:t>
-            </a:r>
-          </a:p>
-          <a:p>
-            <a:r>
-              <a:rPr lang="zh-CN" dirty="0"/>
-              <a:t>单元 11 · 阶段 1 总复习 + 关卡验收 · W13</a:t>
-            </a:r>
-          </a:p>
-          <a:p>
-            <a:r>
-              <a:rPr lang="zh-CN" dirty="0"/>
-              <a:t/>
-            </a:r>
-          </a:p>
-          <a:p>
-            <a:r>
-              <a:rPr lang="zh-CN" dirty="0"/>
-              <a:t>学习目标：掌握读 traceback 的方法，能把模糊需求拆成步骤和函数</a:t>
-            </a:r>
-          </a:p>
-          <a:p>
-            <a:r>
-              <a:rPr lang="zh-CN" dirty="0"/>
-              <a:t/>
-            </a:r>
-          </a:p>
-          <a:p>
-            <a:r>
-              <a:rPr lang="zh-CN" dirty="0"/>
-              <a:t>课堂实操（40 分钟，不看答案）：</a:t>
-            </a:r>
-          </a:p>
-          <a:p>
-            <a:r>
-              <a:rPr lang="zh-CN" dirty="0"/>
-              <a:t>· 现场给一段含 3 个 bug 的脚本限时 15 分钟修复</a:t>
-            </a:r>
-          </a:p>
-          <a:p>
-            <a:r>
-              <a:rPr lang="zh-CN" dirty="0"/>
-              <a:t>· 现场把一个模糊需求拆成步骤清单</a:t>
-            </a:r>
-          </a:p>
-          <a:p>
-            <a:r>
-              <a:rPr lang="zh-CN" dirty="0"/>
-              <a:t/>
-            </a:r>
-          </a:p>
-          <a:p>
-            <a:r>
-              <a:rPr lang="zh-CN" dirty="0"/>
-              <a:t>课后作业：</a:t>
-            </a:r>
-          </a:p>
-          <a:p>
-            <a:r>
-              <a:rPr lang="zh-CN" dirty="0"/>
-              <a:t>· 完成动手练习进阶档 11-1 ~ 11-2</a:t>
-            </a:r>
-          </a:p>
-          <a:p>
-            <a:r>
-              <a:rPr lang="zh-CN" dirty="0"/>
-              <a:t/>
-            </a:r>
-          </a:p>
-          <a:p>
-            <a:r>
-              <a:rPr lang="zh-CN" dirty="0"/>
-              <a:t>节奏：讲 20 分钟 → 学员自己敲 40 分钟（不看答案）→ 对讲评自查 20 分钟 → 写作业 10 分钟。</a:t>
-            </a:r>
-          </a:p>
-        </p:txBody>
-      </p:sp>
-      <p:sp>
-        <p:nvSpPr>
-          <p:cNvPr id="2" name="讲课提示"/>
-          <p:cNvSpPr txBox="1"/>
-          <p:nvPr/>
-        </p:nvSpPr>
-        <p:spPr>
-          <a:xfrm>
-            <a:off x="457200" y="457200"/>
-            <a:ext cx="6858000" cy="4800600"/>
-          </a:xfrm>
-          <a:prstGeom prst="rect">
-            <a:avLst/>
-          </a:prstGeom>
-        </p:spPr>
-        <p:txBody>
-          <a:bodyPr wrap="square"/>
-          <a:lstStyle/>
-          <a:p>
-            <a:r>
-              <a:rPr lang="zh-CN" dirty="0"/>
-              <a:t>第 58 节 · 排错思路与项目骨架</a:t>
-            </a:r>
-          </a:p>
-          <a:p>
-            <a:r>
-              <a:rPr lang="zh-CN" dirty="0"/>
-              <a:t>单元 11 · 阶段 1 总复习 + 关卡验收 · W13</a:t>
-            </a:r>
-          </a:p>
-          <a:p>
-            <a:r>
-              <a:rPr lang="zh-CN" dirty="0"/>
-              <a:t/>
-            </a:r>
-          </a:p>
-          <a:p>
-            <a:r>
-              <a:rPr lang="zh-CN" dirty="0"/>
-              <a:t>学习目标：掌握读 traceback 的方法，能把模糊需求拆成步骤和函数</a:t>
-            </a:r>
-          </a:p>
-          <a:p>
-            <a:r>
-              <a:rPr lang="zh-CN" dirty="0"/>
-              <a:t/>
-            </a:r>
-          </a:p>
-          <a:p>
-            <a:r>
-              <a:rPr lang="zh-CN" dirty="0"/>
-              <a:t>课堂实操（40 分钟，不看答案）：</a:t>
-            </a:r>
-          </a:p>
-          <a:p>
-            <a:r>
-              <a:rPr lang="zh-CN" dirty="0"/>
-              <a:t>· 现场给一段含 3 个 bug 的脚本限时 15 分钟修复</a:t>
-            </a:r>
-          </a:p>
-          <a:p>
-            <a:r>
-              <a:rPr lang="zh-CN" dirty="0"/>
-              <a:t>· 现场把一个模糊需求拆成步骤清单</a:t>
-            </a:r>
-          </a:p>
-          <a:p>
-            <a:r>
-              <a:rPr lang="zh-CN" dirty="0"/>
-              <a:t/>
-            </a:r>
-          </a:p>
-          <a:p>
-            <a:r>
-              <a:rPr lang="zh-CN" dirty="0"/>
-              <a:t>课后作业：</a:t>
-            </a:r>
-          </a:p>
-          <a:p>
-            <a:r>
-              <a:rPr lang="zh-CN" dirty="0"/>
-              <a:t>· 完成动手练习进阶档 11-1 ~ 11-2</a:t>
-            </a:r>
-          </a:p>
-          <a:p>
-            <a:r>
-              <a:rPr lang="zh-CN" dirty="0"/>
-              <a:t/>
-            </a:r>
-          </a:p>
-          <a:p>
-            <a:r>
-              <a:rPr lang="zh-CN" dirty="0"/>
-              <a:t>节奏：讲 20 分钟 → 学员自己敲 40 分钟（不看答案）→ 对讲评自查 20 分钟 → 写作业 10 分钟。</a:t>
-            </a:r>
-          </a:p>
-        </p:txBody>
-      </p:sp>
-    </p:spTree>
-  </p:cSld>
-  <p:clrMapOvr>
-    <a:masterClrMapping/>
-  </p:clrMapOvr>
-</p:notes>
-</file>
-
-<file path=ppt/notesSlides/notesSlide5.xml><?xml version="1.0" encoding="utf-8"?>
-<p:notes xmlns:a="http://schemas.openxmlformats.org/drawingml/2006/main" xmlns:p="http://schemas.openxmlformats.org/presentationml/2006/main" xmlns:r="http://schemas.openxmlformats.org/officeDocument/2006/relationships">
-  <p:cSld>
-    <p:spTree>
-      <p:nvGrpSpPr>
-        <p:cNvPr id="1" name=""/>
-        <p:cNvGrpSpPr/>
-        <p:nvPr/>
-      </p:nvGrpSpPr>
-      <p:grpSpPr>
-        <a:xfrm>
-          <a:off x="0" y="0"/>
-          <a:ext cx="0" cy="0"/>
-          <a:chOff x="0" y="0"/>
-          <a:chExt cx="0" cy="0"/>
-        </a:xfrm>
-      </p:grpSpPr>
-      <p:sp>
-        <p:nvSpPr>
-          <p:cNvPr id="2" name="讲课提示"/>
-          <p:cNvSpPr txBox="1"/>
-          <p:nvPr/>
-        </p:nvSpPr>
-        <p:spPr>
-          <a:xfrm>
-            <a:off x="457200" y="457200"/>
-            <a:ext cx="6858000" cy="4800600"/>
-          </a:xfrm>
-          <a:prstGeom prst="rect">
-            <a:avLst/>
-          </a:prstGeom>
-        </p:spPr>
-        <p:txBody>
-          <a:bodyPr wrap="square"/>
-          <a:lstStyle/>
-          <a:p>
-            <a:r>
-              <a:rPr lang="zh-CN" dirty="0"/>
-              <a:t>第 58 节 · 核心知识点：排错思路与项目骨架</a:t>
-            </a:r>
-          </a:p>
-          <a:p>
-            <a:r>
-              <a:rPr lang="zh-CN" dirty="0"/>
-              <a:t/>
-            </a:r>
-          </a:p>
-          <a:p>
-            <a:r>
-              <a:rPr lang="zh-CN" dirty="0"/>
-              <a:t>讲这一页时：先让学生说出上节课的结论，再逐块讲要点。</a:t>
-            </a:r>
-          </a:p>
-          <a:p>
-            <a:r>
-              <a:rPr lang="zh-CN" dirty="0"/>
-              <a:t>每讲完一块，问一句「这一步如果写错了，报错会长什么样？」——把错误提前讲。</a:t>
-            </a:r>
-          </a:p>
-          <a:p>
-            <a:r>
-              <a:rPr lang="zh-CN" dirty="0"/>
-              <a:t/>
-            </a:r>
-          </a:p>
-          <a:p>
-            <a:r>
-              <a:rPr lang="zh-CN" dirty="0"/>
-              <a:t>本节目标：掌握读 traceback 的方法，能把模糊需求拆成步骤和函数</a:t>
-            </a:r>
-          </a:p>
-          <a:p>
-            <a:r>
-              <a:rPr lang="zh-CN" dirty="0"/>
-              <a:t/>
-            </a:r>
-          </a:p>
-          <a:p>
-            <a:r>
-              <a:rPr lang="zh-CN" dirty="0"/>
-              <a:t>看不到懂的地方，回讲义对应小节读一遍，再回来对着这页复述一次——能讲出来才算真懂。</a:t>
-            </a:r>
-          </a:p>
-        </p:txBody>
-      </p:sp>
-      <p:sp>
-        <p:nvSpPr>
-          <p:cNvPr id="2" name="讲课提示"/>
-          <p:cNvSpPr txBox="1"/>
-          <p:nvPr/>
-        </p:nvSpPr>
-        <p:spPr>
-          <a:xfrm>
-            <a:off x="457200" y="457200"/>
-            <a:ext cx="6858000" cy="4800600"/>
-          </a:xfrm>
-          <a:prstGeom prst="rect">
-            <a:avLst/>
-          </a:prstGeom>
-        </p:spPr>
-        <p:txBody>
-          <a:bodyPr wrap="square"/>
-          <a:lstStyle/>
-          <a:p>
-            <a:r>
-              <a:rPr lang="zh-CN" dirty="0"/>
-              <a:t>第 58 节 · 核心知识点：排错思路与项目骨架</a:t>
-            </a:r>
-          </a:p>
-          <a:p>
-            <a:r>
-              <a:rPr lang="zh-CN" dirty="0"/>
-              <a:t/>
-            </a:r>
-          </a:p>
-          <a:p>
-            <a:r>
-              <a:rPr lang="zh-CN" dirty="0"/>
-              <a:t>讲这一页时：先让学生说出上节课的结论，再逐块讲要点。</a:t>
-            </a:r>
-          </a:p>
-          <a:p>
-            <a:r>
-              <a:rPr lang="zh-CN" dirty="0"/>
-              <a:t>每讲完一块，问一句「这一步如果写错了，报错会长什么样？」——把错误提前讲。</a:t>
-            </a:r>
-          </a:p>
-          <a:p>
-            <a:r>
-              <a:rPr lang="zh-CN" dirty="0"/>
-              <a:t/>
-            </a:r>
-          </a:p>
-          <a:p>
-            <a:r>
-              <a:rPr lang="zh-CN" dirty="0"/>
-              <a:t>本节目标：掌握读 traceback 的方法，能把模糊需求拆成步骤和函数</a:t>
-            </a:r>
-          </a:p>
-          <a:p>
-            <a:r>
-              <a:rPr lang="zh-CN" dirty="0"/>
-              <a:t/>
-            </a:r>
-          </a:p>
-          <a:p>
-            <a:r>
-              <a:rPr lang="zh-CN" dirty="0"/>
-              <a:t>看不到懂的地方，回讲义对应小节读一遍，再回来对着这页复述一次——能讲出来才算真懂。</a:t>
-            </a:r>
-          </a:p>
-        </p:txBody>
-      </p:sp>
-    </p:spTree>
-  </p:cSld>
-  <p:clrMapOvr>
-    <a:masterClrMapping/>
-  </p:clrMapOvr>
-</p:notes>
-</file>
-
-<file path=ppt/notesSlides/notesSlide6.xml><?xml version="1.0" encoding="utf-8"?>
-<p:notes xmlns:a="http://schemas.openxmlformats.org/drawingml/2006/main" xmlns:p="http://schemas.openxmlformats.org/presentationml/2006/main" xmlns:r="http://schemas.openxmlformats.org/officeDocument/2006/relationships">
-  <p:cSld>
-    <p:spTree>
-      <p:nvGrpSpPr>
-        <p:cNvPr id="1" name=""/>
-        <p:cNvGrpSpPr/>
-        <p:nvPr/>
-      </p:nvGrpSpPr>
-      <p:grpSpPr>
-        <a:xfrm>
-          <a:off x="0" y="0"/>
-          <a:ext cx="0" cy="0"/>
-          <a:chOff x="0" y="0"/>
-          <a:chExt cx="0" cy="0"/>
-        </a:xfrm>
-      </p:grpSpPr>
-      <p:sp>
-        <p:nvSpPr>
-          <p:cNvPr id="2" name="讲课提示"/>
-          <p:cNvSpPr txBox="1"/>
-          <p:nvPr/>
-        </p:nvSpPr>
-        <p:spPr>
-          <a:xfrm>
-            <a:off x="457200" y="457200"/>
-            <a:ext cx="6858000" cy="4800600"/>
-          </a:xfrm>
-          <a:prstGeom prst="rect">
-            <a:avLst/>
-          </a:prstGeom>
-        </p:spPr>
-        <p:txBody>
-          <a:bodyPr wrap="square"/>
-          <a:lstStyle/>
-          <a:p>
-            <a:r>
-              <a:rPr lang="zh-CN" dirty="0"/>
-              <a:t>第 59 节 · 四个复习示例串讲</a:t>
-            </a:r>
-          </a:p>
-          <a:p>
-            <a:r>
-              <a:rPr lang="zh-CN" dirty="0"/>
-              <a:t>单元 11 · 阶段 1 总复习 + 关卡验收 · W13</a:t>
-            </a:r>
-          </a:p>
-          <a:p>
-            <a:r>
-              <a:rPr lang="zh-CN" dirty="0"/>
-              <a:t/>
-            </a:r>
-          </a:p>
-          <a:p>
-            <a:r>
-              <a:rPr lang="zh-CN" dirty="0"/>
-              <a:t>学习目标：把类、文件异常、pytest 三块复习串成可运行的完整程序</a:t>
-            </a:r>
-          </a:p>
-          <a:p>
-            <a:r>
-              <a:rPr lang="zh-CN" dirty="0"/>
-              <a:t/>
-            </a:r>
-          </a:p>
-          <a:p>
-            <a:r>
-              <a:rPr lang="zh-CN" dirty="0"/>
-              <a:t>课堂实操（40 分钟，不看答案）：</a:t>
-            </a:r>
-          </a:p>
-          <a:p>
-            <a:r>
-              <a:rPr lang="zh-CN" dirty="0"/>
-              <a:t>· 对照示例跑通四个复习程序</a:t>
-            </a:r>
-          </a:p>
-          <a:p>
-            <a:r>
-              <a:rPr lang="zh-CN" dirty="0"/>
-              <a:t>· 讲清每个程序综合了哪几章</a:t>
-            </a:r>
-          </a:p>
-          <a:p>
-            <a:r>
-              <a:rPr lang="zh-CN" dirty="0"/>
-              <a:t/>
-            </a:r>
-          </a:p>
-          <a:p>
-            <a:r>
-              <a:rPr lang="zh-CN" dirty="0"/>
-              <a:t>课后作业：</a:t>
-            </a:r>
-          </a:p>
-          <a:p>
-            <a:r>
-              <a:rPr lang="zh-CN" dirty="0"/>
-              <a:t>· 把四个复习程序各改一个需求</a:t>
-            </a:r>
-          </a:p>
-          <a:p>
-            <a:r>
-              <a:rPr lang="zh-CN" dirty="0"/>
-              <a:t/>
-            </a:r>
-          </a:p>
-          <a:p>
-            <a:r>
-              <a:rPr lang="zh-CN" dirty="0"/>
-              <a:t>节奏：讲 20 分钟 → 学员自己敲 40 分钟（不看答案）→ 对讲评自查 20 分钟 → 写作业 10 分钟。</a:t>
-            </a:r>
-          </a:p>
-        </p:txBody>
-      </p:sp>
-      <p:sp>
-        <p:nvSpPr>
-          <p:cNvPr id="2" name="讲课提示"/>
-          <p:cNvSpPr txBox="1"/>
-          <p:nvPr/>
-        </p:nvSpPr>
-        <p:spPr>
-          <a:xfrm>
-            <a:off x="457200" y="457200"/>
-            <a:ext cx="6858000" cy="4800600"/>
-          </a:xfrm>
-          <a:prstGeom prst="rect">
-            <a:avLst/>
-          </a:prstGeom>
-        </p:spPr>
-        <p:txBody>
-          <a:bodyPr wrap="square"/>
-          <a:lstStyle/>
-          <a:p>
-            <a:r>
-              <a:rPr lang="zh-CN" dirty="0"/>
-              <a:t>第 59 节 · 四个复习示例串讲</a:t>
-            </a:r>
-          </a:p>
-          <a:p>
-            <a:r>
-              <a:rPr lang="zh-CN" dirty="0"/>
-              <a:t>单元 11 · 阶段 1 总复习 + 关卡验收 · W13</a:t>
-            </a:r>
-          </a:p>
-          <a:p>
-            <a:r>
-              <a:rPr lang="zh-CN" dirty="0"/>
-              <a:t/>
-            </a:r>
-          </a:p>
-          <a:p>
-            <a:r>
-              <a:rPr lang="zh-CN" dirty="0"/>
-              <a:t>学习目标：把类、文件异常、pytest 三块复习串成可运行的完整程序</a:t>
-            </a:r>
-          </a:p>
-          <a:p>
-            <a:r>
-              <a:rPr lang="zh-CN" dirty="0"/>
-              <a:t/>
-            </a:r>
-          </a:p>
-          <a:p>
-            <a:r>
-              <a:rPr lang="zh-CN" dirty="0"/>
-              <a:t>课堂实操（40 分钟，不看答案）：</a:t>
-            </a:r>
-          </a:p>
-          <a:p>
-            <a:r>
-              <a:rPr lang="zh-CN" dirty="0"/>
-              <a:t>· 对照示例跑通四个复习程序</a:t>
-            </a:r>
-          </a:p>
-          <a:p>
-            <a:r>
-              <a:rPr lang="zh-CN" dirty="0"/>
-              <a:t>· 讲清每个程序综合了哪几章</a:t>
-            </a:r>
-          </a:p>
-          <a:p>
-            <a:r>
-              <a:rPr lang="zh-CN" dirty="0"/>
-              <a:t/>
-            </a:r>
-          </a:p>
-          <a:p>
-            <a:r>
-              <a:rPr lang="zh-CN" dirty="0"/>
-              <a:t>课后作业：</a:t>
-            </a:r>
-          </a:p>
-          <a:p>
-            <a:r>
-              <a:rPr lang="zh-CN" dirty="0"/>
-              <a:t>· 把四个复习程序各改一个需求</a:t>
-            </a:r>
-          </a:p>
-          <a:p>
-            <a:r>
-              <a:rPr lang="zh-CN" dirty="0"/>
-              <a:t/>
-            </a:r>
-          </a:p>
-          <a:p>
-            <a:r>
-              <a:rPr lang="zh-CN" dirty="0"/>
-              <a:t>节奏：讲 20 分钟 → 学员自己敲 40 分钟（不看答案）→ 对讲评自查 20 分钟 → 写作业 10 分钟。</a:t>
-            </a:r>
-          </a:p>
-        </p:txBody>
-      </p:sp>
-    </p:spTree>
-  </p:cSld>
-  <p:clrMapOvr>
-    <a:masterClrMapping/>
-  </p:clrMapOvr>
-</p:notes>
-</file>
-
-<file path=ppt/notesSlides/notesSlide7.xml><?xml version="1.0" encoding="utf-8"?>
-<p:notes xmlns:a="http://schemas.openxmlformats.org/drawingml/2006/main" xmlns:p="http://schemas.openxmlformats.org/presentationml/2006/main" xmlns:r="http://schemas.openxmlformats.org/officeDocument/2006/relationships">
-  <p:cSld>
-    <p:spTree>
-      <p:nvGrpSpPr>
-        <p:cNvPr id="1" name=""/>
-        <p:cNvGrpSpPr/>
-        <p:nvPr/>
-      </p:nvGrpSpPr>
-      <p:grpSpPr>
-        <a:xfrm>
-          <a:off x="0" y="0"/>
-          <a:ext cx="0" cy="0"/>
-          <a:chOff x="0" y="0"/>
-          <a:chExt cx="0" cy="0"/>
-        </a:xfrm>
-      </p:grpSpPr>
-      <p:sp>
-        <p:nvSpPr>
-          <p:cNvPr id="2" name="讲课提示"/>
-          <p:cNvSpPr txBox="1"/>
-          <p:nvPr/>
-        </p:nvSpPr>
-        <p:spPr>
-          <a:xfrm>
-            <a:off x="457200" y="457200"/>
-            <a:ext cx="6858000" cy="4800600"/>
-          </a:xfrm>
-          <a:prstGeom prst="rect">
-            <a:avLst/>
-          </a:prstGeom>
-        </p:spPr>
-        <p:txBody>
-          <a:bodyPr wrap="square"/>
-          <a:lstStyle/>
-          <a:p>
-            <a:r>
-              <a:rPr lang="zh-CN" dirty="0"/>
-              <a:t>第 59 节 · 核心知识点：四个复习示例串讲</a:t>
-            </a:r>
-          </a:p>
-          <a:p>
-            <a:r>
-              <a:rPr lang="zh-CN" dirty="0"/>
-              <a:t/>
-            </a:r>
-          </a:p>
-          <a:p>
-            <a:r>
-              <a:rPr lang="zh-CN" dirty="0"/>
-              <a:t>讲这一页时：先让学生说出上节课的结论，再逐块讲要点。</a:t>
-            </a:r>
-          </a:p>
-          <a:p>
-            <a:r>
-              <a:rPr lang="zh-CN" dirty="0"/>
-              <a:t>每讲完一块，问一句「这一步如果写错了，报错会长什么样？」——把错误提前讲。</a:t>
-            </a:r>
-          </a:p>
-          <a:p>
-            <a:r>
-              <a:rPr lang="zh-CN" dirty="0"/>
-              <a:t/>
-            </a:r>
-          </a:p>
-          <a:p>
-            <a:r>
-              <a:rPr lang="zh-CN" dirty="0"/>
-              <a:t>本节目标：把类、文件异常、pytest 三块复习串成可运行的完整程序</a:t>
-            </a:r>
-          </a:p>
-          <a:p>
-            <a:r>
-              <a:rPr lang="zh-CN" dirty="0"/>
-              <a:t/>
-            </a:r>
-          </a:p>
-          <a:p>
-            <a:r>
-              <a:rPr lang="zh-CN" dirty="0"/>
-              <a:t>看不到懂的地方，回讲义对应小节读一遍，再回来对着这页复述一次——能讲出来才算真懂。</a:t>
-            </a:r>
-          </a:p>
-        </p:txBody>
-      </p:sp>
-      <p:sp>
-        <p:nvSpPr>
-          <p:cNvPr id="2" name="讲课提示"/>
-          <p:cNvSpPr txBox="1"/>
-          <p:nvPr/>
-        </p:nvSpPr>
-        <p:spPr>
-          <a:xfrm>
-            <a:off x="457200" y="457200"/>
-            <a:ext cx="6858000" cy="4800600"/>
-          </a:xfrm>
-          <a:prstGeom prst="rect">
-            <a:avLst/>
-          </a:prstGeom>
-        </p:spPr>
-        <p:txBody>
-          <a:bodyPr wrap="square"/>
-          <a:lstStyle/>
-          <a:p>
-            <a:r>
-              <a:rPr lang="zh-CN" dirty="0"/>
-              <a:t>第 59 节 · 核心知识点：四个复习示例串讲</a:t>
-            </a:r>
-          </a:p>
-          <a:p>
-            <a:r>
-              <a:rPr lang="zh-CN" dirty="0"/>
-              <a:t/>
-            </a:r>
-          </a:p>
-          <a:p>
-            <a:r>
-              <a:rPr lang="zh-CN" dirty="0"/>
-              <a:t>讲这一页时：先让学生说出上节课的结论，再逐块讲要点。</a:t>
-            </a:r>
-          </a:p>
-          <a:p>
-            <a:r>
-              <a:rPr lang="zh-CN" dirty="0"/>
-              <a:t>每讲完一块，问一句「这一步如果写错了，报错会长什么样？」——把错误提前讲。</a:t>
-            </a:r>
-          </a:p>
-          <a:p>
-            <a:r>
-              <a:rPr lang="zh-CN" dirty="0"/>
-              <a:t/>
-            </a:r>
-          </a:p>
-          <a:p>
-            <a:r>
-              <a:rPr lang="zh-CN" dirty="0"/>
-              <a:t>本节目标：把类、文件异常、pytest 三块复习串成可运行的完整程序</a:t>
-            </a:r>
-          </a:p>
-          <a:p>
-            <a:r>
-              <a:rPr lang="zh-CN" dirty="0"/>
-              <a:t/>
-            </a:r>
-          </a:p>
-          <a:p>
-            <a:r>
-              <a:rPr lang="zh-CN" dirty="0"/>
-              <a:t>看不到懂的地方，回讲义对应小节读一遍，再回来对着这页复述一次——能讲出来才算真懂。</a:t>
-            </a:r>
-          </a:p>
-        </p:txBody>
-      </p:sp>
-    </p:spTree>
-  </p:cSld>
-  <p:clrMapOvr>
-    <a:masterClrMapping/>
-  </p:clrMapOvr>
-</p:notes>
-</file>
-
-<file path=ppt/notesSlides/notesSlide8.xml><?xml version="1.0" encoding="utf-8"?>
-<p:notes xmlns:a="http://schemas.openxmlformats.org/drawingml/2006/main" xmlns:p="http://schemas.openxmlformats.org/presentationml/2006/main" xmlns:r="http://schemas.openxmlformats.org/officeDocument/2006/relationships">
-  <p:cSld>
-    <p:spTree>
-      <p:nvGrpSpPr>
-        <p:cNvPr id="1" name=""/>
-        <p:cNvGrpSpPr/>
-        <p:nvPr/>
-      </p:nvGrpSpPr>
-      <p:grpSpPr>
-        <a:xfrm>
-          <a:off x="0" y="0"/>
-          <a:ext cx="0" cy="0"/>
-          <a:chOff x="0" y="0"/>
-          <a:chExt cx="0" cy="0"/>
-        </a:xfrm>
-      </p:grpSpPr>
-      <p:sp>
-        <p:nvSpPr>
-          <p:cNvPr id="2" name="讲课提示"/>
-          <p:cNvSpPr txBox="1"/>
-          <p:nvPr/>
-        </p:nvSpPr>
-        <p:spPr>
-          <a:xfrm>
-            <a:off x="457200" y="457200"/>
-            <a:ext cx="6858000" cy="4800600"/>
-          </a:xfrm>
-          <a:prstGeom prst="rect">
-            <a:avLst/>
-          </a:prstGeom>
-        </p:spPr>
-        <p:txBody>
-          <a:bodyPr wrap="square"/>
-          <a:lstStyle/>
-          <a:p>
-            <a:r>
-              <a:rPr lang="zh-CN" dirty="0"/>
-              <a:t>第 60 节 · ★ 综合项目 1：待办管理器</a:t>
-            </a:r>
-          </a:p>
-          <a:p>
-            <a:r>
-              <a:rPr lang="zh-CN" dirty="0"/>
-              <a:t>单元 11 · 阶段 1 总复习 + 关卡验收 · W13</a:t>
-            </a:r>
-          </a:p>
-          <a:p>
-            <a:r>
-              <a:rPr lang="zh-CN" dirty="0"/>
-              <a:t/>
-            </a:r>
-          </a:p>
-          <a:p>
-            <a:r>
-              <a:rPr lang="zh-CN" dirty="0"/>
-              <a:t>学习目标：独立写出一个可增删改查并能存盘的待办管理器</a:t>
-            </a:r>
-          </a:p>
-          <a:p>
-            <a:r>
-              <a:rPr lang="zh-CN" dirty="0"/>
-              <a:t/>
-            </a:r>
-          </a:p>
-          <a:p>
-            <a:r>
-              <a:rPr lang="zh-CN" dirty="0"/>
-              <a:t>课堂实操（40 分钟，不看答案）：</a:t>
-            </a:r>
-          </a:p>
-          <a:p>
-            <a:r>
-              <a:rPr lang="zh-CN" dirty="0"/>
-              <a:t>· 先限时 40 分钟自己写，再看参考答案对照</a:t>
-            </a:r>
-          </a:p>
-          <a:p>
-            <a:r>
-              <a:rPr lang="zh-CN" dirty="0"/>
-              <a:t>· 逐行读懂参考答案的实现思路</a:t>
-            </a:r>
-          </a:p>
-          <a:p>
-            <a:r>
-              <a:rPr lang="zh-CN" dirty="0"/>
-              <a:t/>
-            </a:r>
-          </a:p>
-          <a:p>
-            <a:r>
-              <a:rPr lang="zh-CN" dirty="0"/>
-              <a:t>课后作业：</a:t>
-            </a:r>
-          </a:p>
-          <a:p>
-            <a:r>
-              <a:rPr lang="zh-CN" dirty="0"/>
-              <a:t>· 完成综合项目 1 并写 3 条测试</a:t>
-            </a:r>
-          </a:p>
-          <a:p>
-            <a:r>
-              <a:rPr lang="zh-CN" dirty="0"/>
-              <a:t/>
-            </a:r>
-          </a:p>
-          <a:p>
-            <a:r>
-              <a:rPr lang="zh-CN" dirty="0"/>
-              <a:t>节奏：讲 20 分钟 → 学员自己敲 40 分钟（不看答案）→ 对讲评自查 20 分钟 → 写作业 10 分钟。</a:t>
-            </a:r>
-          </a:p>
-        </p:txBody>
-      </p:sp>
-      <p:sp>
-        <p:nvSpPr>
-          <p:cNvPr id="2" name="讲课提示"/>
-          <p:cNvSpPr txBox="1"/>
-          <p:nvPr/>
-        </p:nvSpPr>
-        <p:spPr>
-          <a:xfrm>
-            <a:off x="457200" y="457200"/>
-            <a:ext cx="6858000" cy="4800600"/>
-          </a:xfrm>
-          <a:prstGeom prst="rect">
-            <a:avLst/>
-          </a:prstGeom>
-        </p:spPr>
-        <p:txBody>
-          <a:bodyPr wrap="square"/>
-          <a:lstStyle/>
-          <a:p>
-            <a:r>
-              <a:rPr lang="zh-CN" dirty="0"/>
-              <a:t>第 60 节 · ★ 综合项目 1：待办管理器</a:t>
-            </a:r>
-          </a:p>
-          <a:p>
-            <a:r>
-              <a:rPr lang="zh-CN" dirty="0"/>
-              <a:t>单元 11 · 阶段 1 总复习 + 关卡验收 · W13</a:t>
-            </a:r>
-          </a:p>
-          <a:p>
-            <a:r>
-              <a:rPr lang="zh-CN" dirty="0"/>
-              <a:t/>
-            </a:r>
-          </a:p>
-          <a:p>
-            <a:r>
-              <a:rPr lang="zh-CN" dirty="0"/>
-              <a:t>学习目标：独立写出一个可增删改查并能存盘的待办管理器</a:t>
-            </a:r>
-          </a:p>
-          <a:p>
-            <a:r>
-              <a:rPr lang="zh-CN" dirty="0"/>
-              <a:t/>
-            </a:r>
-          </a:p>
-          <a:p>
-            <a:r>
-              <a:rPr lang="zh-CN" dirty="0"/>
-              <a:t>课堂实操（40 分钟，不看答案）：</a:t>
-            </a:r>
-          </a:p>
-          <a:p>
-            <a:r>
-              <a:rPr lang="zh-CN" dirty="0"/>
-              <a:t>· 先限时 40 分钟自己写，再看参考答案对照</a:t>
-            </a:r>
-          </a:p>
-          <a:p>
-            <a:r>
-              <a:rPr lang="zh-CN" dirty="0"/>
-              <a:t>· 逐行读懂参考答案的实现思路</a:t>
-            </a:r>
-          </a:p>
-          <a:p>
-            <a:r>
-              <a:rPr lang="zh-CN" dirty="0"/>
-              <a:t/>
-            </a:r>
-          </a:p>
-          <a:p>
-            <a:r>
-              <a:rPr lang="zh-CN" dirty="0"/>
-              <a:t>课后作业：</a:t>
-            </a:r>
-          </a:p>
-          <a:p>
-            <a:r>
-              <a:rPr lang="zh-CN" dirty="0"/>
-              <a:t>· 完成综合项目 1 并写 3 条测试</a:t>
-            </a:r>
-          </a:p>
-          <a:p>
-            <a:r>
-              <a:rPr lang="zh-CN" dirty="0"/>
-              <a:t/>
-            </a:r>
-          </a:p>
-          <a:p>
-            <a:r>
-              <a:rPr lang="zh-CN" dirty="0"/>
-              <a:t>节奏：讲 20 分钟 → 学员自己敲 40 分钟（不看答案）→ 对讲评自查 20 分钟 → 写作业 10 分钟。</a:t>
-            </a:r>
-          </a:p>
-        </p:txBody>
-      </p:sp>
-    </p:spTree>
-  </p:cSld>
-  <p:clrMapOvr>
-    <a:masterClrMapping/>
-  </p:clrMapOvr>
-</p:notes>
-</file>
-
-<file path=ppt/notesSlides/notesSlide9.xml><?xml version="1.0" encoding="utf-8"?>
-<p:notes xmlns:a="http://schemas.openxmlformats.org/drawingml/2006/main" xmlns:p="http://schemas.openxmlformats.org/presentationml/2006/main" xmlns:r="http://schemas.openxmlformats.org/officeDocument/2006/relationships">
-  <p:cSld>
-    <p:spTree>
-      <p:nvGrpSpPr>
-        <p:cNvPr id="1" name=""/>
-        <p:cNvGrpSpPr/>
-        <p:nvPr/>
-      </p:nvGrpSpPr>
-      <p:grpSpPr>
-        <a:xfrm>
-          <a:off x="0" y="0"/>
-          <a:ext cx="0" cy="0"/>
-          <a:chOff x="0" y="0"/>
-          <a:chExt cx="0" cy="0"/>
-        </a:xfrm>
-      </p:grpSpPr>
-      <p:sp>
-        <p:nvSpPr>
-          <p:cNvPr id="2" name="讲课提示"/>
-          <p:cNvSpPr txBox="1"/>
-          <p:nvPr/>
-        </p:nvSpPr>
-        <p:spPr>
-          <a:xfrm>
-            <a:off x="457200" y="457200"/>
-            <a:ext cx="6858000" cy="4800600"/>
-          </a:xfrm>
-          <a:prstGeom prst="rect">
-            <a:avLst/>
-          </a:prstGeom>
-        </p:spPr>
-        <p:txBody>
-          <a:bodyPr wrap="square"/>
-          <a:lstStyle/>
-          <a:p>
-            <a:r>
-              <a:rPr lang="zh-CN" dirty="0"/>
-              <a:t>第 60 节 · 核心知识点：★ 综合项目 1：待办管理器</a:t>
-            </a:r>
-          </a:p>
-          <a:p>
-            <a:r>
-              <a:rPr lang="zh-CN" dirty="0"/>
-              <a:t/>
-            </a:r>
-          </a:p>
-          <a:p>
-            <a:r>
-              <a:rPr lang="zh-CN" dirty="0"/>
-              <a:t>讲这一页时：先让学生说出上节课的结论，再逐块讲要点。</a:t>
-            </a:r>
-          </a:p>
-          <a:p>
-            <a:r>
-              <a:rPr lang="zh-CN" dirty="0"/>
-              <a:t>每讲完一块，问一句「这一步如果写错了，报错会长什么样？」——把错误提前讲。</a:t>
-            </a:r>
-          </a:p>
-          <a:p>
-            <a:r>
-              <a:rPr lang="zh-CN" dirty="0"/>
-              <a:t/>
-            </a:r>
-          </a:p>
-          <a:p>
-            <a:r>
-              <a:rPr lang="zh-CN" dirty="0"/>
-              <a:t>本节目标：独立写出一个可增删改查并能存盘的待办管理器</a:t>
-            </a:r>
-          </a:p>
-          <a:p>
-            <a:r>
-              <a:rPr lang="zh-CN" dirty="0"/>
-              <a:t/>
-            </a:r>
-          </a:p>
-          <a:p>
-            <a:r>
-              <a:rPr lang="zh-CN" dirty="0"/>
-              <a:t>看不到懂的地方，回讲义对应小节读一遍，再回来对着这页复述一次——能讲出来才算真懂。</a:t>
-            </a:r>
-          </a:p>
-        </p:txBody>
-      </p:sp>
-      <p:sp>
-        <p:nvSpPr>
-          <p:cNvPr id="2" name="讲课提示"/>
-          <p:cNvSpPr txBox="1"/>
-          <p:nvPr/>
-        </p:nvSpPr>
-        <p:spPr>
-          <a:xfrm>
-            <a:off x="457200" y="457200"/>
-            <a:ext cx="6858000" cy="4800600"/>
-          </a:xfrm>
-          <a:prstGeom prst="rect">
-            <a:avLst/>
-          </a:prstGeom>
-        </p:spPr>
-        <p:txBody>
-          <a:bodyPr wrap="square"/>
-          <a:lstStyle/>
-          <a:p>
-            <a:r>
-              <a:rPr lang="zh-CN" dirty="0"/>
-              <a:t>第 60 节 · 核心知识点：★ 综合项目 1：待办管理器</a:t>
-            </a:r>
-          </a:p>
-          <a:p>
-            <a:r>
-              <a:rPr lang="zh-CN" dirty="0"/>
-              <a:t/>
-            </a:r>
-          </a:p>
-          <a:p>
-            <a:r>
-              <a:rPr lang="zh-CN" dirty="0"/>
-              <a:t>讲这一页时：先让学生说出上节课的结论，再逐块讲要点。</a:t>
-            </a:r>
-          </a:p>
-          <a:p>
-            <a:r>
-              <a:rPr lang="zh-CN" dirty="0"/>
-              <a:t>每讲完一块，问一句「这一步如果写错了，报错会长什么样？」——把错误提前讲。</a:t>
-            </a:r>
-          </a:p>
-          <a:p>
-            <a:r>
-              <a:rPr lang="zh-CN" dirty="0"/>
-              <a:t/>
-            </a:r>
-          </a:p>
-          <a:p>
-            <a:r>
-              <a:rPr lang="zh-CN" dirty="0"/>
-              <a:t>本节目标：独立写出一个可增删改查并能存盘的待办管理器</a:t>
-            </a:r>
-          </a:p>
-          <a:p>
-            <a:r>
-              <a:rPr lang="zh-CN" dirty="0"/>
-              <a:t/>
-            </a:r>
-          </a:p>
-          <a:p>
-            <a:r>
-              <a:rPr lang="zh-CN" dirty="0"/>
-              <a:t>看不到懂的地方，回讲义对应小节读一遍，再回来对着这页复述一次——能讲出来才算真懂。</a:t>
-            </a:r>
-          </a:p>
-        </p:txBody>
-      </p:sp>
-    </p:spTree>
-  </p:cSld>
-  <p:clrMapOvr>
-    <a:masterClrMapping/>
-  </p:clrMapOvr>
-</p:notes>
-</file>
-
 <file path=ppt/slideLayouts/slideLayout1.xml><?xml version="1.0" encoding="utf-8"?>
 <p:sldLayout xmlns:p="http://schemas.openxmlformats.org/presentationml/2006/main" xmlns:a="http://schemas.openxmlformats.org/drawingml/2006/main">
   <p:cSld name="DEFAULT">
@@ -3939,7 +561,7 @@
   <p:cSld>
     <p:spTree>
       <p:nvGrpSpPr>
-        <p:cNvPr id="1" name="" descr="&lt;Slide style={{ width: '1280px', height: '720px', backgroundColor: '#FAFCFE', padding: 0, position: 'relative', overflow: 'hidden' }}&gt;&#13;&#10;    &lt;Box style={{ position: 'absolute', left: 0, top: 0, width: '1280px', height: '150px', background: '#1F5FA8' }} /&gt;&#13;&#10;    &lt;Box style={{ position: 'absolute', left: 64, top: 34, width: '1152px', flexDirection: 'column' }}&gt;&#13;&#10;        &lt;Text style={{ fontSize: 15, fontWeight: 'bold', color: '#BFD9F2', letterSpacing: 2 }}&gt;阶段 1 · 单元 11&lt;/Text&gt;&#13;&#10;        &lt;Text style={{ fontSize: 38, fontWeight: 'bold', color: '#FFFFFF', marginTop: 6 }}&gt;阶段 1 总复习 + 关卡验收&lt;/Text&gt;&#13;&#10;    &lt;/Box&gt;&#13;&#10;    &lt;Box style={{ position: 'absolute', left: 64, top: 168, width: '1152px', height: 470 }}&gt;&#13;&#10;        &lt;svg width='1152' height='470' viewBox='0 0 1152 470'&gt;&#13;&#10;            &lt;text x='0' y='18' fontSize='15' fontWeight='bold' fill='#16232E' fontFamily='Microsoft YaHei'&gt;本单元共 8 节课&lt;/text&gt;&#13;&#10;            &lt;rect x='0' y='196' width='1152' height='38' rx='7' fill='#FFFFFF' /&gt;&lt;text x='16' y='221' fontSize='15' fontWeight='bold' fill='#1F5FA8' fontFamily='Microsoft YaHei'&gt;第 57 节&lt;/text&gt;&lt;text x='96' y='221' fontSize='15' fill='#16232E' fontFamily='Microsoft YaHei'&gt;知识串讲与能力地图&lt;/text&gt;&lt;text x='1080' y='221' fontSize='13' fill='#5A6B7A' textAnchor='end' fontFamily='Microsoft YaHei'&gt;W13&lt;/text&gt;&lt;rect x='0' y='238' width='1152' height='38' rx='7' fill='#F2F7FD' /&gt;&lt;text x='16' y='263' fontSize='15' fontWeight='bold' fill='#1F5FA8' fontFamily='Microsoft YaHei'&gt;第 58 节&lt;/text&gt;&lt;text x='96' y='263' fontSize='15' fill='#16232E' fontFamily='Microsoft YaHei'&gt;排错思路与项目骨架&lt;/text&gt;&lt;text x='1080' y='263' fontSize='13' fill='#5A6B7A' textAnchor='end' fontFamily='Microsoft YaHei'&gt;W13&lt;/text&gt;&lt;rect x='0' y='280' width='1152' height='38' rx='7' fill='#FFFFFF' /&gt;&lt;text x='16' y='305' fontSize='15' fontWeight='bold' fill='#1F5FA8' fontFamily='Microsoft YaHei'&gt;第 59 节&lt;/text&gt;&lt;text x='96' y='305' fontSize='15' fill='#16232E' fontFamily='Microsoft YaHei'&gt;四个复习示例串讲&lt;/text&gt;&lt;text x='1080' y='305' fontSize='13' fill='#5A6B7A' textAnchor='end' fontFamily='Microsoft YaHei'&gt;W13&lt;/text&gt;&lt;rect x='0' y='322' width='1152' height='38' rx='7' fill='#F2F7FD' /&gt;&lt;text x='16' y='347' fontSize='15' fontWeight='bold' fill='#1F5FA8' fontFamily='Microsoft YaHei'&gt;第 60 节&lt;/text&gt;&lt;text x='96' y='347' fontSize='15' fill='#16232E' fontFamily='Microsoft YaHei'&gt;★ 综合项目 1：待办管理器&lt;/text&gt;&lt;text x='1080' y='347' fontSize='13' fill='#5A6B7A' textAnchor='end' fontFamily='Microsoft YaHei'&gt;W13&lt;/text&gt;&lt;rect x='0' y='364' width='1152' height='38' rx='7' fill='#FFFFFF' /&gt;&lt;text x='16' y='389' fontSize='15' fontWeight='bold' fill='#1F5FA8' fontFamily='Microsoft YaHei'&gt;第 61 节&lt;/text&gt;&lt;text x='96' y='389' fontSize='15' fill='#16232E' fontFamily='Microsoft YaHei'&gt;★ 综合项目 2：成绩分析器&lt;/text&gt;&lt;text x='1080' y='389' fontSize='13' fill='#5A6B7A' textAnchor='end' fontFamily='Microsoft YaHei'&gt;W13&lt;/text&gt;&lt;rect x='0' y='406' width='1152' height='38' rx='7' fill='#F2F7FD' /&gt;&lt;text x='16' y='431' fontSize='15' fontWeight='bold' fill='#1F5FA8' fontFamily='Microsoft YaHei'&gt;第 62 节&lt;/text&gt;&lt;text x='96' y='431' fontSize='15' fill='#16232E' fontFamily='Microsoft YaHei'&gt;★ 综合项目 3：文本统计工具&lt;/text&gt;&lt;text x='1080' y='431' fontSize='13' fill='#5A6B7A' textAnchor='end' fontFamily='Microsoft YaHei'&gt;W13&lt;/text&gt;&lt;rect x='0' y='448' width='1152' height='38' rx='7' fill='#FFFFFF' /&gt;&lt;text x='16' y='473' fontSize='15' fontWeight='bold' fill='#1F5FA8' fontFamily='Microsoft YaHei'&gt;第 63 节&lt;/text&gt;&lt;text x='96' y='473' fontSize='15' fill='#16232E' fontFamily='Microsoft YaHei'&gt;★ 关卡 1 现场测评&lt;/text&gt;&lt;text x='1080' y='473' fontSize='13' fill='#5A6B7A' textAnchor='end' fontFamily='Microsoft YaHei'&gt;W13&lt;/text&gt;&lt;rect x='0' y='490' width='1152' height='38' rx='7' fill='#F2F7FD' /&gt;&lt;text x='16' y='515' fontSize='15' fontWeight='bold' fill='#1F5FA8' fontFamily='Microsoft YaHei'&gt;第 64 节&lt;/text&gt;&lt;text x='96' y='515' fontSize='15' fill='#16232E' fontFamily='Microsoft YaHei'&gt;结业检查与下一阶段&lt;/text&gt;&lt;text x='1080' y='515' fontSize='13' fill='#5A6B7A' textAnchor='end' fontFamily='Microsoft YaHei'&gt;W13&lt;/text&gt;&#13;&#10;        &lt;/svg&gt;&#13;&#10;    &lt;/Box&gt;&#13;&#10;    &lt;Box style={{ position: 'absolute', left: 64, bottom: 22, width: '1152px', flexDirection: 'row', justifyContent: 'space-between' }}&gt;&#13;&#10;        &lt;Text style={{ fontSize: 13, color: '#8A9AAA' }}&gt;Python 讲授课件 · 逐节版&lt;/Text&gt;&#13;&#10;        &lt;Text style={{ fontSize: 13, color: '#8A9AAA' }}&gt;单元 11 · 封面&lt;/Text&gt;&#13;&#10;    &lt;/Box&gt;&#13;&#10;&lt;/Slide&gt;&#13;&#10;"/>
+        <p:cNvPr id="1" name="" descr="&lt;Slide style={{ width: '1280px', height: '720px', backgroundColor: '#FAFCFE', padding: 0, position: 'relative', overflow: 'hidden' }}&gt;&#13;&#10;    &lt;Box style={{ position: 'absolute', left: 0, top: 0, width: '1280px', height: '150px', background: '#1F5FA8' }} /&gt;&#13;&#10;    &lt;Box style={{ position: 'absolute', left: 64, top: 34, width: '1152px', flexDirection: 'column' }}&gt;&#13;&#10;        &lt;Text style={{ fontSize: 15, fontWeight: 'bold', color: '#BFD9F2', letterSpacing: 2 }}&gt;阶段 1 · 单元 11&lt;/Text&gt;&#13;&#10;        &lt;Text style={{ fontSize: 38, fontWeight: 'bold', color: '#FFFFFF', marginTop: 6 }}&gt;阶段 1 总复习 + 关卡验收&lt;/Text&gt;&#13;&#10;    &lt;/Box&gt;&#13;&#10;    &lt;Box style={{ position: 'absolute', left: 64, top: 168, width: '1152px', height: 470 }}&gt;&#13;&#10;        &lt;svg width='1152' height='470' viewBox='0 0 1152 470'&gt;&#13;&#10;            &lt;text x='0' y='18' fontSize='15' fontWeight='bold' fill='#16232E' fontFamily='Microsoft YaHei'&gt;本单元共 8 节课&lt;/text&gt;&#13;&#10;            &lt;rect x='0' y='56.0' width='1152' height='39.5' rx='7' fill='#FFFFFF' /&gt;&lt;text x='16' y='80.8' fontSize='15' fontWeight='bold' fill='#1F5FA8' fontFamily='Microsoft YaHei'&gt;第 57 节&lt;/text&gt;&lt;text x='96' y='80.8' fontSize='15' fill='#16232E' fontFamily='Microsoft YaHei'&gt;知识串讲与能力地图&lt;/text&gt;&lt;text x='1080' y='80.8' fontSize='13' fill='#5A6B7A' textAnchor='end' fontFamily='Microsoft YaHei'&gt;W13&lt;/text&gt;&lt;rect x='0' y='105.5' width='1152' height='39.5' rx='7' fill='#F2F7FD' /&gt;&lt;text x='16' y='130.2' fontSize='15' fontWeight='bold' fill='#1F5FA8' fontFamily='Microsoft YaHei'&gt;第 58 节&lt;/text&gt;&lt;text x='96' y='130.2' fontSize='15' fill='#16232E' fontFamily='Microsoft YaHei'&gt;排错思路与项目骨架&lt;/text&gt;&lt;text x='1080' y='130.2' fontSize='13' fill='#5A6B7A' textAnchor='end' fontFamily='Microsoft YaHei'&gt;W13&lt;/text&gt;&lt;rect x='0' y='155.0' width='1152' height='39.5' rx='7' fill='#FFFFFF' /&gt;&lt;text x='16' y='179.8' fontSize='15' fontWeight='bold' fill='#1F5FA8' fontFamily='Microsoft YaHei'&gt;第 59 节&lt;/text&gt;&lt;text x='96' y='179.8' fontSize='15' fill='#16232E' fontFamily='Microsoft YaHei'&gt;四个复习示例串讲&lt;/text&gt;&lt;text x='1080' y='179.8' fontSize='13' fill='#5A6B7A' textAnchor='end' fontFamily='Microsoft YaHei'&gt;W13&lt;/text&gt;&lt;rect x='0' y='204.5' width='1152' height='39.5' rx='7' fill='#F2F7FD' /&gt;&lt;text x='16' y='229.2' fontSize='15' fontWeight='bold' fill='#1F5FA8' fontFamily='Microsoft YaHei'&gt;第 60 节&lt;/text&gt;&lt;text x='96' y='229.2' fontSize='15' fill='#16232E' fontFamily='Microsoft YaHei'&gt;★ 综合项目 1：待办管理器&lt;/text&gt;&lt;text x='1080' y='229.2' fontSize='13' fill='#5A6B7A' textAnchor='end' fontFamily='Microsoft YaHei'&gt;W13&lt;/text&gt;&lt;rect x='0' y='254.0' width='1152' height='39.5' rx='7' fill='#FFFFFF' /&gt;&lt;text x='16' y='278.8' fontSize='15' fontWeight='bold' fill='#1F5FA8' fontFamily='Microsoft YaHei'&gt;第 61 节&lt;/text&gt;&lt;text x='96' y='278.8' fontSize='15' fill='#16232E' fontFamily='Microsoft YaHei'&gt;★ 综合项目 2：成绩分析器&lt;/text&gt;&lt;text x='1080' y='278.8' fontSize='13' fill='#5A6B7A' textAnchor='end' fontFamily='Microsoft YaHei'&gt;W13&lt;/text&gt;&lt;rect x='0' y='303.5' width='1152' height='39.5' rx='7' fill='#F2F7FD' /&gt;&lt;text x='16' y='328.2' fontSize='15' fontWeight='bold' fill='#1F5FA8' fontFamily='Microsoft YaHei'&gt;第 62 节&lt;/text&gt;&lt;text x='96' y='328.2' fontSize='15' fill='#16232E' fontFamily='Microsoft YaHei'&gt;★ 综合项目 3：文本统计工具&lt;/text&gt;&lt;text x='1080' y='328.2' fontSize='13' fill='#5A6B7A' textAnchor='end' fontFamily='Microsoft YaHei'&gt;W13&lt;/text&gt;&lt;rect x='0' y='353.0' width='1152' height='39.5' rx='7' fill='#FFFFFF' /&gt;&lt;text x='16' y='377.8' fontSize='15' fontWeight='bold' fill='#1F5FA8' fontFamily='Microsoft YaHei'&gt;第 63 节&lt;/text&gt;&lt;text x='96' y='377.8' fontSize='15' fill='#16232E' fontFamily='Microsoft YaHei'&gt;★ 关卡 1 现场测评&lt;/text&gt;&lt;text x='1080' y='377.8' fontSize='13' fill='#5A6B7A' textAnchor='end' fontFamily='Microsoft YaHei'&gt;W13&lt;/text&gt;&lt;rect x='0' y='402.5' width='1152' height='39.5' rx='7' fill='#F2F7FD' /&gt;&lt;text x='16' y='427.2' fontSize='15' fontWeight='bold' fill='#1F5FA8' fontFamily='Microsoft YaHei'&gt;第 64 节&lt;/text&gt;&lt;text x='96' y='427.2' fontSize='15' fill='#16232E' fontFamily='Microsoft YaHei'&gt;结业检查与下一阶段&lt;/text&gt;&lt;text x='1080' y='427.2' fontSize='13' fill='#5A6B7A' textAnchor='end' fontFamily='Microsoft YaHei'&gt;W13&lt;/text&gt;&#13;&#10;        &lt;/svg&gt;&#13;&#10;    &lt;/Box&gt;&#13;&#10;    &lt;Box style={{ position: 'absolute', left: 64, bottom: 22, width: '1152px', flexDirection: 'row', justifyContent: 'space-between' }}&gt;&#13;&#10;        &lt;Text style={{ fontSize: 13, color: '#8A9AAA' }}&gt;Python 讲授课件 · 逐节版&lt;/Text&gt;&#13;&#10;        &lt;Text style={{ fontSize: 13, color: '#8A9AAA' }}&gt;单元 11 · 封面&lt;/Text&gt;&#13;&#10;    &lt;/Box&gt;&#13;&#10;&lt;/Slide&gt;&#13;&#10;"/>
         <p:cNvGrpSpPr/>
         <p:nvPr/>
       </p:nvGrpSpPr>
@@ -4523,7 +1145,7 @@
   <p:cSld>
     <p:spTree>
       <p:nvGrpSpPr>
-        <p:cNvPr id="15" name="" descr="&lt;Slide style={{ width: '1280px', height: '720px', backgroundColor: '#FAFCFE', padding: 0, position: 'relative', overflow: 'hidden' }}&gt;&#13;&#10;    &lt;Box style={{ position: 'absolute', left: 64, top: 36, width: '1152px', flexDirection: 'row', alignItems: 'center', gap: 12 }}&gt;&#13;&#10;        &lt;Box style={{ background: '#0E9B78', borderRadius: 5, padding: '3px 11px' }}&gt;&#13;&#10;            &lt;Text style={{ fontSize: 14, fontWeight: 'bold', color: '#FFFFFF' }}&gt;第 61 节&lt;/Text&gt;&#13;&#10;        &lt;/Box&gt;&#13;&#10;        &lt;Text style={{ fontSize: 30, fontWeight: 'bold', color: '#16232E' }}&gt;核心知识点&lt;/Text&gt;&#13;&#10;        &lt;Text style={{ fontSize: 15, color: '#5A6B7A', marginTop: 10 }}&gt;· ★ 综合项目 2：成绩分析器&lt;/Text&gt;&#13;&#10;    &lt;/Box&gt;&#13;&#10;    &lt;Box style={{ position: 'absolute', left: 0, top: 0, width: '1280px', height: '720px' }}&gt;&#13;&#10;        &lt;svg width='1280' height='720' viewBox='0 0 1280 720'&gt;&#13;&#10;            &lt;rect x='64' y='96' width='548' height='330' rx='12' fill='#FFFFFF' stroke='#D8E3EE' /&gt;&lt;rect x='64' y='96' width='548' height='4' rx='2' fill='#1F5FA8' /&gt;&lt;text x='82' y='130' fontSize='15.5' fontWeight='bold' fill='#1F5FA8' textAnchor='start' fontFamily='Microsoft YaHei'&gt;参考答案 11-3（综合项目 2：成绩分析器完整实现）&lt;/text&gt;&lt;text x='82' y='169.0' fontSize='13' fill='#3A4A58' textAnchor='start' fontFamily='Microsoft YaHei'&gt;· import json&lt;/text&gt;&lt;rect x='668' y='96' width='548' height='330' rx='12' fill='#FFFFFF' stroke='#D8E3EE' /&gt;&lt;rect x='668' y='96' width='548' height='4' rx='2' fill='#1F5FA8' /&gt;&lt;text x='686' y='130' fontSize='15.5' fontWeight='bold' fill='#1F5FA8' textAnchor='start' fontFamily='Microsoft YaHei'&gt;参考答案 11-3 的测试文件&lt;/text&gt;&lt;text x='686' y='169.0' fontSize='13' fill='#3A4A58' textAnchor='start' fontFamily='Microsoft YaHei'&gt;· import json&lt;/text&gt;&lt;rect x='64' y='574' width='1152' height='66' rx='12' fill='#EEF5FB' /&gt;&lt;text x='84' y='616' fontSize='14' fill='#243444' textAnchor='start' fontFamily='Microsoft YaHei'&gt;看不懂的地方先回讲义对应小节读一遍，再回来对着这页复述一次——能讲出来才算真懂。&lt;/text&gt;&#13;&#10;            &lt;text x='64' y='684' fontSize='13' fill='#8A9AAA' fontFamily='Microsoft YaHei'&gt;Python 讲授课件 · 逐节版&lt;/text&gt;&#13;&#10;            &lt;text x='1216' y='684' fontSize='13' fill='#8A9AAA' textAnchor='end' fontFamily='Microsoft YaHei'&gt;单元 11 · 第 61 节&lt;/text&gt;&#13;&#10;        &lt;/svg&gt;&#13;&#10;    &lt;/Box&gt;&#13;&#10;&lt;/Slide&gt;&#13;&#10;"/>
+        <p:cNvPr id="15" name="" descr="&lt;Slide style={{ width: '1280px', height: '720px', backgroundColor: '#FAFCFE', padding: 0, position: 'relative', overflow: 'hidden' }}&gt;&#13;&#10;    &lt;Box style={{ position: 'absolute', left: 64, top: 36, width: '1152px', flexDirection: 'row', alignItems: 'center', gap: 12 }}&gt;&#13;&#10;        &lt;Box style={{ background: '#0E9B78', borderRadius: 5, padding: '3px 11px' }}&gt;&#13;&#10;            &lt;Text style={{ fontSize: 14, fontWeight: 'bold', color: '#FFFFFF' }}&gt;第 61 节&lt;/Text&gt;&#13;&#10;        &lt;/Box&gt;&#13;&#10;        &lt;Text style={{ fontSize: 30, fontWeight: 'bold', color: '#16232E' }}&gt;核心知识点&lt;/Text&gt;&#13;&#10;        &lt;Text style={{ fontSize: 15, color: '#5A6B7A', marginTop: 10 }}&gt;· ★ 综合项目 2：成绩分析器&lt;/Text&gt;&#13;&#10;    &lt;/Box&gt;&#13;&#10;    &lt;Box style={{ position: 'absolute', left: 0, top: 0, width: '1280px', height: '720px' }}&gt;&#13;&#10;        &lt;svg width='1280' height='720' viewBox='0 0 1280 720'&gt;&#13;&#10;            &lt;rect x='64' y='574' width='1152' height='66' rx='12' fill='#EEF5FB' /&gt;&lt;text x='84' y='616' fontSize='14' fill='#243444' textAnchor='start' fontFamily='Microsoft YaHei'&gt;看不懂的地方先回讲义对应小节读一遍，再回来对着这页复述一次——能讲出来才算真懂。&lt;/text&gt;&#13;&#10;            &lt;text x='64' y='684' fontSize='13' fill='#8A9AAA' fontFamily='Microsoft YaHei'&gt;Python 讲授课件 · 逐节版&lt;/text&gt;&#13;&#10;            &lt;text x='1216' y='684' fontSize='13' fill='#8A9AAA' textAnchor='end' fontFamily='Microsoft YaHei'&gt;单元 11 · 第 61 节&lt;/text&gt;&#13;&#10;        &lt;/svg&gt;&#13;&#10;    &lt;/Box&gt;&#13;&#10;&lt;/Slide&gt;&#13;&#10;"/>
         <p:cNvGrpSpPr/>
         <p:nvPr/>
       </p:nvGrpSpPr>
@@ -5004,7 +1626,7 @@
   <p:cSld>
     <p:spTree>
       <p:nvGrpSpPr>
-        <p:cNvPr id="28" name="" descr="&lt;Slide style={{ width: '1280px', height: '720px', backgroundColor: '#FAFCFE', padding: 0, position: 'relative', overflow: 'hidden' }}&gt;&#13;&#10;    &lt;Box style={{ position: 'absolute', left: 64, top: 36, width: '1152px', flexDirection: 'row', alignItems: 'center', gap: 12 }}&gt;&#13;&#10;        &lt;Box style={{ background: '#0E9B78', borderRadius: 5, padding: '3px 11px' }}&gt;&#13;&#10;            &lt;Text style={{ fontSize: 14, fontWeight: 'bold', color: '#FFFFFF' }}&gt;第 62 节&lt;/Text&gt;&#13;&#10;        &lt;/Box&gt;&#13;&#10;        &lt;Text style={{ fontSize: 30, fontWeight: 'bold', color: '#16232E' }}&gt;核心知识点&lt;/Text&gt;&#13;&#10;        &lt;Text style={{ fontSize: 15, color: '#5A6B7A', marginTop: 10 }}&gt;· ★ 综合项目 3：文本统计工具&lt;/Text&gt;&#13;&#10;    &lt;/Box&gt;&#13;&#10;    &lt;Box style={{ position: 'absolute', left: 0, top: 0, width: '1280px', height: '720px' }}&gt;&#13;&#10;        &lt;svg width='1280' height='720' viewBox='0 0 1280 720'&gt;&#13;&#10;            &lt;rect x='64' y='96' width='548' height='330' rx='12' fill='#FFFFFF' stroke='#D8E3EE' /&gt;&lt;rect x='64' y='96' width='548' height='4' rx='2' fill='#1F5FA8' /&gt;&lt;text x='82' y='130' fontSize='15.5' fontWeight='bold' fill='#1F5FA8' textAnchor='start' fontFamily='Microsoft YaHei'&gt;参考答案 11-4（综合项目 3：文本统计工具完整实现）&lt;/text&gt;&lt;text x='82' y='169.0' fontSize='13' fill='#3A4A58' textAnchor='start' fontFamily='Microsoft YaHei'&gt;· import json&lt;/text&gt;&lt;rect x='668' y='96' width='548' height='330' rx='12' fill='#FFFFFF' stroke='#D8E3EE' /&gt;&lt;rect x='668' y='96' width='548' height='4' rx='2' fill='#1F5FA8' /&gt;&lt;text x='686' y='130' fontSize='15.5' fontWeight='bold' fill='#1F5FA8' textAnchor='start' fontFamily='Microsoft YaHei'&gt;参考答案 11-4 的测试文件&lt;/text&gt;&lt;text x='686' y='169.0' fontSize='13' fill='#3A4A58' textAnchor='start' fontFamily='Microsoft YaHei'&gt;· import os&lt;/text&gt;&lt;rect x='64' y='574' width='1152' height='66' rx='12' fill='#EEF5FB' /&gt;&lt;text x='84' y='616' fontSize='14' fill='#243444' textAnchor='start' fontFamily='Microsoft YaHei'&gt;看不懂的地方先回讲义对应小节读一遍，再回来对着这页复述一次——能讲出来才算真懂。&lt;/text&gt;&#13;&#10;            &lt;text x='64' y='684' fontSize='13' fill='#8A9AAA' fontFamily='Microsoft YaHei'&gt;Python 讲授课件 · 逐节版&lt;/text&gt;&#13;&#10;            &lt;text x='1216' y='684' fontSize='13' fill='#8A9AAA' textAnchor='end' fontFamily='Microsoft YaHei'&gt;单元 11 · 第 62 节&lt;/text&gt;&#13;&#10;        &lt;/svg&gt;&#13;&#10;    &lt;/Box&gt;&#13;&#10;&lt;/Slide&gt;&#13;&#10;"/>
+        <p:cNvPr id="28" name="" descr="&lt;Slide style={{ width: '1280px', height: '720px', backgroundColor: '#FAFCFE', padding: 0, position: 'relative', overflow: 'hidden' }}&gt;&#13;&#10;    &lt;Box style={{ position: 'absolute', left: 64, top: 36, width: '1152px', flexDirection: 'row', alignItems: 'center', gap: 12 }}&gt;&#13;&#10;        &lt;Box style={{ background: '#0E9B78', borderRadius: 5, padding: '3px 11px' }}&gt;&#13;&#10;            &lt;Text style={{ fontSize: 14, fontWeight: 'bold', color: '#FFFFFF' }}&gt;第 62 节&lt;/Text&gt;&#13;&#10;        &lt;/Box&gt;&#13;&#10;        &lt;Text style={{ fontSize: 30, fontWeight: 'bold', color: '#16232E' }}&gt;核心知识点&lt;/Text&gt;&#13;&#10;        &lt;Text style={{ fontSize: 15, color: '#5A6B7A', marginTop: 10 }}&gt;· ★ 综合项目 3：文本统计工具&lt;/Text&gt;&#13;&#10;    &lt;/Box&gt;&#13;&#10;    &lt;Box style={{ position: 'absolute', left: 0, top: 0, width: '1280px', height: '720px' }}&gt;&#13;&#10;        &lt;svg width='1280' height='720' viewBox='0 0 1280 720'&gt;&#13;&#10;            &lt;rect x='64' y='574' width='1152' height='66' rx='12' fill='#EEF5FB' /&gt;&lt;text x='84' y='616' fontSize='14' fill='#243444' textAnchor='start' fontFamily='Microsoft YaHei'&gt;看不懂的地方先回讲义对应小节读一遍，再回来对着这页复述一次——能讲出来才算真懂。&lt;/text&gt;&#13;&#10;            &lt;text x='64' y='684' fontSize='13' fill='#8A9AAA' fontFamily='Microsoft YaHei'&gt;Python 讲授课件 · 逐节版&lt;/text&gt;&#13;&#10;            &lt;text x='1216' y='684' fontSize='13' fill='#8A9AAA' textAnchor='end' fontFamily='Microsoft YaHei'&gt;单元 11 · 第 62 节&lt;/text&gt;&#13;&#10;        &lt;/svg&gt;&#13;&#10;    &lt;/Box&gt;&#13;&#10;&lt;/Slide&gt;&#13;&#10;"/>
         <p:cNvGrpSpPr/>
         <p:nvPr/>
       </p:nvGrpSpPr>
@@ -5485,7 +2107,7 @@
   <p:cSld>
     <p:spTree>
       <p:nvGrpSpPr>
-        <p:cNvPr id="41" name="" descr="&lt;Slide style={{ width: '1280px', height: '720px', backgroundColor: '#FAFCFE', padding: 0, position: 'relative', overflow: 'hidden' }}&gt;&#13;&#10;    &lt;Box style={{ position: 'absolute', left: 64, top: 36, width: '1152px', flexDirection: 'row', alignItems: 'center', gap: 12 }}&gt;&#13;&#10;        &lt;Box style={{ background: '#0E9B78', borderRadius: 5, padding: '3px 11px' }}&gt;&#13;&#10;            &lt;Text style={{ fontSize: 14, fontWeight: 'bold', color: '#FFFFFF' }}&gt;第 63 节&lt;/Text&gt;&#13;&#10;        &lt;/Box&gt;&#13;&#10;        &lt;Text style={{ fontSize: 30, fontWeight: 'bold', color: '#16232E' }}&gt;核心知识点&lt;/Text&gt;&#13;&#10;        &lt;Text style={{ fontSize: 15, color: '#5A6B7A', marginTop: 10 }}&gt;· ★ 关卡 1 现场测评&lt;/Text&gt;&#13;&#10;    &lt;/Box&gt;&#13;&#10;    &lt;Box style={{ position: 'absolute', left: 0, top: 0, width: '1280px', height: '720px' }}&gt;&#13;&#10;        &lt;svg width='1280' height='720' viewBox='0 0 1280 720'&gt;&#13;&#10;            &lt;rect x='64' y='96' width='368' height='330' rx='12' fill='#FFFFFF' stroke='#D8E3EE' /&gt;&lt;rect x='64' y='96' width='368' height='4' rx='2' fill='#1F5FA8' /&gt;&lt;text x='82' y='130' fontSize='15.5' fontWeight='bold' fill='#1F5FA8' textAnchor='start' fontFamily='Microsoft YaHei'&gt;✅ 验收 1：手写猜数字游戏&lt;/text&gt;&lt;text x='82' y='169.0' fontSize='13' fill='#3A4A58' textAnchor='start' fontFamily='Microsoft YaHei'&gt;· 必须包含：&lt;/text&gt;&lt;text x='82' y='197.5' fontSize='13' fill='#3A4A58' textAnchor='start' fontFamily='Microsoft YaHei'&gt;· random.randint(1, 100) 生成随机数&lt;/text&gt;&lt;text x='82' y='226.0' fontSize='13' fill='#3A4A58' textAnchor='start' fontFamily='Microsoft YaHei'&gt;· while 循环持续接收猜测&lt;/text&gt;&lt;rect x='468' y='96' width='368' height='330' rx='12' fill='#FFFFFF' stroke='#D8E3EE' /&gt;&lt;rect x='468' y='96' width='368' height='4' rx='2' fill='#1F5FA8' /&gt;&lt;text x='486' y='130' fontSize='15.5' fontWeight='bold' fill='#1F5FA8' textAnchor='start' fontFamily='Microsoft YaHei'&gt;✅ 验收 2：手写一个含继承的类&lt;/text&gt;&lt;text x='486' y='169.0' fontSize='13' fill='#3A4A58' textAnchor='start' fontFamily='Microsoft YaHei'&gt;· 参考实现：&lt;/text&gt;&lt;text x='486' y='197.5' fontSize='13' fill='#3A4A58' textAnchor='start' fontFamily='Microsoft YaHei'&gt;· 自检清单：&lt;/text&gt;&lt;text x='486' y='226.0' fontSize='13' fill='#3A4A58' textAnchor='start' fontFamily='Microsoft YaHei'&gt;· [ ] 至少三层（基类 + 两个子类）&lt;/text&gt;&lt;rect x='872' y='96' width='368' height='330' rx='12' fill='#FFFFFF' stroke='#D8E3EE' /&gt;&lt;rect x='872' y='96' width='368' height='4' rx='2' fill='#1F5FA8' /&gt;&lt;text x='890' y='130' fontSize='15.5' fontWeight='bold' fill='#1F5FA8' textAnchor='start' fontFamily='Microsoft YaHei'&gt;✅ 验收 3：用 pytest 写 3 条测试并全部通&lt;/text&gt;&lt;text x='890' y='153' fontSize='15.5' fontWeight='bold' fill='#1F5FA8' textAnchor='start' fontFamily='Microsoft YaHei'&gt;过&lt;/text&gt;&lt;text x='890' y='192.0' fontSize='13' fill='#3A4A58' textAnchor='start' fontFamily='Microsoft YaHei'&gt;· 参考实现：&lt;/text&gt;&lt;text x='890' y='220.5' fontSize='13' fill='#3A4A58' textAnchor='start' fontFamily='Microsoft YaHei'&gt;· 运行结果必须是这样：&lt;/text&gt;&lt;text x='890' y='249.0' fontSize='13' fill='#3A4A58' textAnchor='start' fontFamily='Microsoft YaHei'&gt;· 自检清单：&lt;/text&gt;&lt;rect x='64' y='574' width='1152' height='66' rx='12' fill='#EEF5FB' /&gt;&lt;text x='84' y='616' fontSize='14' fill='#243444' textAnchor='start' fontFamily='Microsoft YaHei'&gt;看不懂的地方先回讲义对应小节读一遍，再回来对着这页复述一次——能讲出来才算真懂。&lt;/text&gt;&#13;&#10;            &lt;text x='64' y='684' fontSize='13' fill='#8A9AAA' fontFamily='Microsoft YaHei'&gt;Python 讲授课件 · 逐节版&lt;/text&gt;&#13;&#10;            &lt;text x='1216' y='684' fontSize='13' fill='#8A9AAA' textAnchor='end' fontFamily='Microsoft YaHei'&gt;单元 11 · 第 63 节&lt;/text&gt;&#13;&#10;        &lt;/svg&gt;&#13;&#10;    &lt;/Box&gt;&#13;&#10;&lt;/Slide&gt;&#13;&#10;"/>
+        <p:cNvPr id="41" name="" descr="&lt;Slide style={{ width: '1280px', height: '720px', backgroundColor: '#FAFCFE', padding: 0, position: 'relative', overflow: 'hidden' }}&gt;&#13;&#10;    &lt;Box style={{ position: 'absolute', left: 64, top: 36, width: '1152px', flexDirection: 'row', alignItems: 'center', gap: 12 }}&gt;&#13;&#10;        &lt;Box style={{ background: '#0E9B78', borderRadius: 5, padding: '3px 11px' }}&gt;&#13;&#10;            &lt;Text style={{ fontSize: 14, fontWeight: 'bold', color: '#FFFFFF' }}&gt;第 63 节&lt;/Text&gt;&#13;&#10;        &lt;/Box&gt;&#13;&#10;        &lt;Text style={{ fontSize: 30, fontWeight: 'bold', color: '#16232E' }}&gt;核心知识点&lt;/Text&gt;&#13;&#10;        &lt;Text style={{ fontSize: 15, color: '#5A6B7A', marginTop: 10 }}&gt;· ★ 关卡 1 现场测评&lt;/Text&gt;&#13;&#10;    &lt;/Box&gt;&#13;&#10;    &lt;Box style={{ position: 'absolute', left: 0, top: 0, width: '1280px', height: '720px' }}&gt;&#13;&#10;        &lt;svg width='1280' height='720' viewBox='0 0 1280 720'&gt;&#13;&#10;            &lt;rect x='64' y='96' width='368' height='330' rx='12' fill='#FFFFFF' stroke='#D8E3EE' /&gt;&lt;rect x='64' y='96' width='368' height='4' rx='2' fill='#1F5FA8' /&gt;&lt;text x='82' y='130' fontSize='15.5' fontWeight='bold' fill='#1F5FA8' textAnchor='start' fontFamily='Microsoft YaHei'&gt;✅ 验收 1：手写猜数字游戏&lt;/text&gt;&lt;text x='82' y='169.0' fontSize='13' fill='#3A4A58' textAnchor='start' fontFamily='Microsoft YaHei'&gt;· 必须包含&lt;/text&gt;&lt;text x='82' y='197.5' fontSize='13' fill='#3A4A58' textAnchor='start' fontFamily='Microsoft YaHei'&gt;· random.randint(1, 100) 生成随机数&lt;/text&gt;&lt;text x='82' y='226.0' fontSize='13' fill='#3A4A58' textAnchor='start' fontFamily='Microsoft YaHei'&gt;· while 循环持续接收猜测&lt;/text&gt;&lt;rect x='468' y='96' width='368' height='330' rx='12' fill='#FFFFFF' stroke='#D8E3EE' /&gt;&lt;rect x='468' y='96' width='368' height='4' rx='2' fill='#1F5FA8' /&gt;&lt;text x='486' y='130' fontSize='15.5' fontWeight='bold' fill='#1F5FA8' textAnchor='start' fontFamily='Microsoft YaHei'&gt;✅ 验收 2：手写一个含继承的类&lt;/text&gt;&lt;text x='486' y='169.0' fontSize='13' fill='#3A4A58' textAnchor='start' fontFamily='Microsoft YaHei'&gt;· 参考实现&lt;/text&gt;&lt;text x='486' y='197.5' fontSize='13' fill='#3A4A58' textAnchor='start' fontFamily='Microsoft YaHei'&gt;· 自检清单&lt;/text&gt;&lt;text x='486' y='226.0' fontSize='13' fill='#3A4A58' textAnchor='start' fontFamily='Microsoft YaHei'&gt;· [ ] 至少三层（基类 + 两个子类）&lt;/text&gt;&lt;rect x='872' y='96' width='368' height='330' rx='12' fill='#FFFFFF' stroke='#D8E3EE' /&gt;&lt;rect x='872' y='96' width='368' height='4' rx='2' fill='#1F5FA8' /&gt;&lt;text x='890' y='130' fontSize='15.5' fontWeight='bold' fill='#1F5FA8' textAnchor='start' fontFamily='Microsoft YaHei'&gt;✅ 验收 3：用 pytest 写 3&lt;/text&gt;&lt;text x='890' y='153' fontSize='15.5' fontWeight='bold' fill='#1F5FA8' textAnchor='start' fontFamily='Microsoft YaHei'&gt;条测试并全部通过&lt;/text&gt;&lt;text x='890' y='192.0' fontSize='13' fill='#3A4A58' textAnchor='start' fontFamily='Microsoft YaHei'&gt;· 参考实现&lt;/text&gt;&lt;text x='890' y='220.5' fontSize='13' fill='#3A4A58' textAnchor='start' fontFamily='Microsoft YaHei'&gt;· 运行结果必须是这样&lt;/text&gt;&lt;text x='890' y='249.0' fontSize='13' fill='#3A4A58' textAnchor='start' fontFamily='Microsoft YaHei'&gt;· 自检清单&lt;/text&gt;&lt;rect x='64' y='574' width='1152' height='66' rx='12' fill='#EEF5FB' /&gt;&lt;text x='84' y='616' fontSize='14' fill='#243444' textAnchor='start' fontFamily='Microsoft YaHei'&gt;看不懂的地方先回讲义对应小节读一遍，再回来对着这页复述一次——能讲出来才算真懂。&lt;/text&gt;&#13;&#10;            &lt;text x='64' y='684' fontSize='13' fill='#8A9AAA' fontFamily='Microsoft YaHei'&gt;Python 讲授课件 · 逐节版&lt;/text&gt;&#13;&#10;            &lt;text x='1216' y='684' fontSize='13' fill='#8A9AAA' textAnchor='end' fontFamily='Microsoft YaHei'&gt;单元 11 · 第 63 节&lt;/text&gt;&#13;&#10;        &lt;/svg&gt;&#13;&#10;    &lt;/Box&gt;&#13;&#10;&lt;/Slide&gt;&#13;&#10;"/>
         <p:cNvGrpSpPr/>
         <p:nvPr/>
       </p:nvGrpSpPr>
@@ -5936,7 +2558,7 @@
   <p:cSld>
     <p:spTree>
       <p:nvGrpSpPr>
-        <p:cNvPr id="54" name="" descr="&lt;Slide style={{ width: '1280px', height: '720px', backgroundColor: '#FAFCFE', padding: 0, position: 'relative', overflow: 'hidden' }}&gt;&#13;&#10;    &lt;Box style={{ position: 'absolute', left: 64, top: 36, width: '1152px', flexDirection: 'row', alignItems: 'center', gap: 12 }}&gt;&#13;&#10;        &lt;Box style={{ background: '#0E9B78', borderRadius: 5, padding: '3px 11px' }}&gt;&#13;&#10;            &lt;Text style={{ fontSize: 14, fontWeight: 'bold', color: '#FFFFFF' }}&gt;第 64 节&lt;/Text&gt;&#13;&#10;        &lt;/Box&gt;&#13;&#10;        &lt;Text style={{ fontSize: 30, fontWeight: 'bold', color: '#16232E' }}&gt;核心知识点&lt;/Text&gt;&#13;&#10;        &lt;Text style={{ fontSize: 15, color: '#5A6B7A', marginTop: 10 }}&gt;· 结业检查与下一阶段&lt;/Text&gt;&#13;&#10;    &lt;/Box&gt;&#13;&#10;    &lt;Box style={{ position: 'absolute', left: 0, top: 0, width: '1280px', height: '720px' }}&gt;&#13;&#10;        &lt;svg width='1280' height='720' viewBox='0 0 1280 720'&gt;&#13;&#10;            &lt;rect x='64' y='96' width='368' height='330' rx='12' fill='#FFFFFF' stroke='#D8E3EE' /&gt;&lt;rect x='64' y='96' width='368' height='4' rx='2' fill='#1F5FA8' /&gt;&lt;text x='82' y='130' fontSize='15.5' fontWeight='bold' fill='#1F5FA8' textAnchor='start' fontFamily='Microsoft YaHei'&gt;完成情况自查&lt;/text&gt;&lt;text x='82' y='169.0' fontSize='13' fill='#3A4A58' textAnchor='start' fontFamily='Microsoft YaHei'&gt;· 知识层面&lt;/text&gt;&lt;text x='82' y='197.5' fontSize='13' fill='#3A4A58' textAnchor='start' fontFamily='Microsoft YaHei'&gt;· [ ] 能默写出前 11 章的核心能力（不查资料）&lt;/text&gt;&lt;text x='82' y='226.0' fontSize='13' fill='#3A4A58' textAnchor='start' fontFamily='Microsoft YaHei'&gt;· [ ] 能解释六个&quot;选什么&quot;的决策标准&lt;/text&gt;&lt;rect x='468' y='96' width='368' height='330' rx='12' fill='#FFFFFF' stroke='#D8E3EE' /&gt;&lt;rect x='468' y='96' width='368' height='4' rx='2' fill='#1F5FA8' /&gt;&lt;text x='486' y='130' fontSize='15.5' fontWeight='bold' fill='#1F5FA8' textAnchor='start' fontFamily='Microsoft YaHei'&gt;如果四条验收全部通过&lt;/text&gt;&lt;text x='486' y='169.0' fontSize='13' fill='#3A4A58' textAnchor='start' fontFamily='Microsoft YaHei'&gt;· 接下来进入阶段 2：项目篇。 你会学到：&lt;/text&gt;&lt;text x='486' y='197.5' fontSize='13' fill='#3A4A58' textAnchor='start' fontFamily='Microsoft YaHei'&gt;· 导入并使用第三方库（requests、pygame、matplotli&lt;/text&gt;&lt;text x='486' y='217.0' fontSize='13' fill='#3A4A58' textAnchor='start' fontFamily='Microsoft YaHei'&gt;b）&lt;/text&gt;&lt;text x='486' y='245.5' fontSize='13' fill='#3A4A58' textAnchor='start' fontFamily='Microsoft YaHei'&gt;· 把程序拆成多个文件组织&lt;/text&gt;&lt;rect x='872' y='96' width='368' height='330' rx='12' fill='#FFFFFF' stroke='#D8E3EE' /&gt;&lt;rect x='872' y='96' width='368' height='4' rx='2' fill='#1F5FA8' /&gt;&lt;text x='890' y='130' fontSize='15.5' fontWeight='bold' fill='#1F5FA8' textAnchor='start' fontFamily='Microsoft YaHei'&gt;如果某条没通过&lt;/text&gt;&lt;text x='890' y='169.0' fontSize='13' fill='#3A4A58' textAnchor='start' fontFamily='Microsoft YaHei'&gt;· 完全正常。 对照下面找到薄弱环节，补做对应的练习：&lt;/text&gt;&lt;text x='890' y='197.5' fontSize='13' fill='#3A4A58' textAnchor='start' fontFamily='Microsoft YaHei'&gt;· 给你的一句话：卡住的时候，不要往下走，回头把那个知&lt;/text&gt;&lt;text x='890' y='217.0' fontSize='13' fill='#3A4A58' textAnchor='start' fontFamily='Microsoft YaHei'&gt;识点再做三道题。阶段 1 的每一关都是后面所有项目的&lt;/text&gt;&lt;text x='890' y='236.5' fontSize='13' fill='#3A4A58' textAnchor='start' fontFamily='Microsoft YaHei'&gt;…&lt;/text&gt;&lt;text x='890' y='265.0' fontSize='13' fill='#3A4A58' textAnchor='start' fontFamily='Microsoft YaHei'&gt;· 阶段 1 完结。 恭喜你走完这段路。&lt;/text&gt;&lt;rect x='64' y='574' width='1152' height='66' rx='12' fill='#EEF5FB' /&gt;&lt;text x='84' y='616' fontSize='14' fill='#243444' textAnchor='start' fontFamily='Microsoft YaHei'&gt;看不懂的地方先回讲义对应小节读一遍，再回来对着这页复述一次——能讲出来才算真懂。&lt;/text&gt;&#13;&#10;            &lt;text x='64' y='684' fontSize='13' fill='#8A9AAA' fontFamily='Microsoft YaHei'&gt;Python 讲授课件 · 逐节版&lt;/text&gt;&#13;&#10;            &lt;text x='1216' y='684' fontSize='13' fill='#8A9AAA' textAnchor='end' fontFamily='Microsoft YaHei'&gt;单元 11 · 第 64 节&lt;/text&gt;&#13;&#10;        &lt;/svg&gt;&#13;&#10;    &lt;/Box&gt;&#13;&#10;&lt;/Slide&gt;&#13;&#10;"/>
+        <p:cNvPr id="54" name="" descr="&lt;Slide style={{ width: '1280px', height: '720px', backgroundColor: '#FAFCFE', padding: 0, position: 'relative', overflow: 'hidden' }}&gt;&#13;&#10;    &lt;Box style={{ position: 'absolute', left: 64, top: 36, width: '1152px', flexDirection: 'row', alignItems: 'center', gap: 12 }}&gt;&#13;&#10;        &lt;Box style={{ background: '#0E9B78', borderRadius: 5, padding: '3px 11px' }}&gt;&#13;&#10;            &lt;Text style={{ fontSize: 14, fontWeight: 'bold', color: '#FFFFFF' }}&gt;第 64 节&lt;/Text&gt;&#13;&#10;        &lt;/Box&gt;&#13;&#10;        &lt;Text style={{ fontSize: 30, fontWeight: 'bold', color: '#16232E' }}&gt;核心知识点&lt;/Text&gt;&#13;&#10;        &lt;Text style={{ fontSize: 15, color: '#5A6B7A', marginTop: 10 }}&gt;· 结业检查与下一阶段&lt;/Text&gt;&#13;&#10;    &lt;/Box&gt;&#13;&#10;    &lt;Box style={{ position: 'absolute', left: 0, top: 0, width: '1280px', height: '720px' }}&gt;&#13;&#10;        &lt;svg width='1280' height='720' viewBox='0 0 1280 720'&gt;&#13;&#10;            &lt;rect x='64' y='96' width='368' height='330' rx='12' fill='#FFFFFF' stroke='#D8E3EE' /&gt;&lt;rect x='64' y='96' width='368' height='4' rx='2' fill='#1F5FA8' /&gt;&lt;text x='82' y='130' fontSize='15.5' fontWeight='bold' fill='#1F5FA8' textAnchor='start' fontFamily='Microsoft YaHei'&gt;完成情况自查&lt;/text&gt;&lt;text x='82' y='169.0' fontSize='13' fill='#3A4A58' textAnchor='start' fontFamily='Microsoft YaHei'&gt;· 知识层面&lt;/text&gt;&lt;text x='82' y='197.5' fontSize='13' fill='#3A4A58' textAnchor='start' fontFamily='Microsoft YaHei'&gt;· [ ] 能默写出前 11 章的核心能力（不查资料）&lt;/text&gt;&lt;text x='82' y='226.0' fontSize='13' fill='#3A4A58' textAnchor='start' fontFamily='Microsoft YaHei'&gt;· [ ] 能解释六个&quot;选什么&quot;的决策标准&lt;/text&gt;&lt;rect x='468' y='96' width='368' height='330' rx='12' fill='#FFFFFF' stroke='#D8E3EE' /&gt;&lt;rect x='468' y='96' width='368' height='4' rx='2' fill='#1F5FA8' /&gt;&lt;text x='486' y='130' fontSize='15.5' fontWeight='bold' fill='#1F5FA8' textAnchor='start' fontFamily='Microsoft YaHei'&gt;如果四条验收全部通过&lt;/text&gt;&lt;text x='486' y='169.0' fontSize='13' fill='#3A4A58' textAnchor='start' fontFamily='Microsoft YaHei'&gt;· 接下来进入阶段 2：项目篇。&lt;/text&gt;&lt;text x='486' y='197.5' fontSize='13' fill='#3A4A58' textAnchor='start' fontFamily='Microsoft YaHei'&gt;· 导入并使用第三方库（requests、pygame、&lt;/text&gt;&lt;text x='486' y='217.0' fontSize='13' fill='#3A4A58' textAnchor='start' fontFamily='Microsoft YaHei'&gt;matplotlib）&lt;/text&gt;&lt;text x='486' y='245.5' fontSize='13' fill='#3A4A58' textAnchor='start' fontFamily='Microsoft YaHei'&gt;· 把程序拆成多个文件组织&lt;/text&gt;&lt;rect x='872' y='96' width='368' height='330' rx='12' fill='#FFFFFF' stroke='#D8E3EE' /&gt;&lt;rect x='872' y='96' width='368' height='4' rx='2' fill='#1F5FA8' /&gt;&lt;text x='890' y='130' fontSize='15.5' fontWeight='bold' fill='#1F5FA8' textAnchor='start' fontFamily='Microsoft YaHei'&gt;如果某条没通过&lt;/text&gt;&lt;text x='890' y='169.0' fontSize='13' fill='#3A4A58' textAnchor='start' fontFamily='Microsoft YaHei'&gt;· 完全正常。&lt;/text&gt;&lt;text x='890' y='197.5' fontSize='13' fill='#3A4A58' textAnchor='start' fontFamily='Microsoft YaHei'&gt;· 给你的一句话&lt;/text&gt;&lt;text x='890' y='226.0' fontSize='13' fill='#3A4A58' textAnchor='start' fontFamily='Microsoft YaHei'&gt;· 阶段 1 完结。&lt;/text&gt;&lt;rect x='64' y='574' width='1152' height='66' rx='12' fill='#EEF5FB' /&gt;&lt;text x='84' y='616' fontSize='14' fill='#243444' textAnchor='start' fontFamily='Microsoft YaHei'&gt;看不懂的地方先回讲义对应小节读一遍，再回来对着这页复述一次——能讲出来才算真懂。&lt;/text&gt;&#13;&#10;            &lt;text x='64' y='684' fontSize='13' fill='#8A9AAA' fontFamily='Microsoft YaHei'&gt;Python 讲授课件 · 逐节版&lt;/text&gt;&#13;&#10;            &lt;text x='1216' y='684' fontSize='13' fill='#8A9AAA' textAnchor='end' fontFamily='Microsoft YaHei'&gt;单元 11 · 第 64 节&lt;/text&gt;&#13;&#10;        &lt;/svg&gt;&#13;&#10;    &lt;/Box&gt;&#13;&#10;&lt;/Slide&gt;&#13;&#10;"/>
         <p:cNvGrpSpPr/>
         <p:nvPr/>
       </p:nvGrpSpPr>
@@ -6997,7 +3619,7 @@
   <p:cSld>
     <p:spTree>
       <p:nvGrpSpPr>
-        <p:cNvPr id="81" name="" descr="&lt;Slide style={{ width: '1280px', height: '720px', backgroundColor: '#FAFCFE', padding: 0, position: 'relative', overflow: 'hidden' }}&gt;&#13;&#10;    &lt;Box style={{ position: 'absolute', left: 64, top: 36, width: '1152px', flexDirection: 'row', alignItems: 'center', gap: 12 }}&gt;&#13;&#10;        &lt;Box style={{ background: '#0E9B78', borderRadius: 5, padding: '3px 11px' }}&gt;&#13;&#10;            &lt;Text style={{ fontSize: 14, fontWeight: 'bold', color: '#FFFFFF' }}&gt;第 57 节&lt;/Text&gt;&#13;&#10;        &lt;/Box&gt;&#13;&#10;        &lt;Text style={{ fontSize: 30, fontWeight: 'bold', color: '#16232E' }}&gt;核心知识点&lt;/Text&gt;&#13;&#10;        &lt;Text style={{ fontSize: 15, color: '#5A6B7A', marginTop: 10 }}&gt;· 知识串讲与能力地图&lt;/Text&gt;&#13;&#10;    &lt;/Box&gt;&#13;&#10;    &lt;Box style={{ position: 'absolute', left: 0, top: 0, width: '1280px', height: '720px' }}&gt;&#13;&#10;        &lt;svg width='1280' height='720' viewBox='0 0 1280 720'&gt;&#13;&#10;            &lt;rect x='64' y='96' width='548' height='330' rx='12' fill='#FFFFFF' stroke='#D8E3EE' /&gt;&lt;rect x='64' y='96' width='548' height='4' rx='2' fill='#1F5FA8' /&gt;&lt;text x='82' y='130' fontSize='15.5' fontWeight='bold' fill='#1F5FA8' textAnchor='start' fontFamily='Microsoft YaHei'&gt;2.1 前 11 章的能力地图&lt;/text&gt;&lt;text x='82' y='169.0' fontSize='13' fill='#3A4A58' textAnchor='start' fontFamily='Microsoft YaHei'&gt;· 最关键的一张依赖图（箭头表示&quot;前者是后者的基础&quot;）：&lt;/text&gt;&lt;text x='82' y='197.5' fontSize='13' fill='#3A4A58' textAnchor='start' fontFamily='Microsoft YaHei'&gt;· 一句话总结每个单元：环境能跑起来 → 数据能存住 → 批量能处理 → 条件能判断 →&lt;/text&gt;&lt;text x='82' y='217.0' fontSize='13' fill='#3A4A58' textAnchor='start' fontFamily='Microsoft YaHei'&gt; 循环能重复 →…&lt;/text&gt;&lt;rect x='668' y='96' width='548' height='330' rx='12' fill='#FFFFFF' stroke='#D8E3EE' /&gt;&lt;rect x='668' y='96' width='548' height='4' rx='2' fill='#1F5FA8' /&gt;&lt;text x='686' y='130' fontSize='15.5' fontWeight='bold' fill='#1F5FA8' textAnchor='start' fontFamily='Microsoft YaHei'&gt;2.2 六个&quot;选什么&quot;的高频决策&lt;/text&gt;&lt;text x='686' y='169.0' fontSize='13' fill='#3A4A58' textAnchor='start' fontFamily='Microsoft YaHei'&gt;· 做项目时反复遇到的问题，答案都在这里：&lt;/text&gt;&lt;rect x='64' y='574' width='1152' height='66' rx='12' fill='#EEF5FB' /&gt;&lt;text x='84' y='616' fontSize='14' fill='#243444' textAnchor='start' fontFamily='Microsoft YaHei'&gt;看不懂的地方先回讲义对应小节读一遍，再回来对着这页复述一次——能讲出来才算真懂。&lt;/text&gt;&#13;&#10;            &lt;text x='64' y='684' fontSize='13' fill='#8A9AAA' fontFamily='Microsoft YaHei'&gt;Python 讲授课件 · 逐节版&lt;/text&gt;&#13;&#10;            &lt;text x='1216' y='684' fontSize='13' fill='#8A9AAA' textAnchor='end' fontFamily='Microsoft YaHei'&gt;单元 11 · 第 57 节&lt;/text&gt;&#13;&#10;        &lt;/svg&gt;&#13;&#10;    &lt;/Box&gt;&#13;&#10;&lt;/Slide&gt;&#13;&#10;"/>
+        <p:cNvPr id="81" name="" descr="&lt;Slide style={{ width: '1280px', height: '720px', backgroundColor: '#FAFCFE', padding: 0, position: 'relative', overflow: 'hidden' }}&gt;&#13;&#10;    &lt;Box style={{ position: 'absolute', left: 64, top: 36, width: '1152px', flexDirection: 'row', alignItems: 'center', gap: 12 }}&gt;&#13;&#10;        &lt;Box style={{ background: '#0E9B78', borderRadius: 5, padding: '3px 11px' }}&gt;&#13;&#10;            &lt;Text style={{ fontSize: 14, fontWeight: 'bold', color: '#FFFFFF' }}&gt;第 57 节&lt;/Text&gt;&#13;&#10;        &lt;/Box&gt;&#13;&#10;        &lt;Text style={{ fontSize: 30, fontWeight: 'bold', color: '#16232E' }}&gt;核心知识点&lt;/Text&gt;&#13;&#10;        &lt;Text style={{ fontSize: 15, color: '#5A6B7A', marginTop: 10 }}&gt;· 知识串讲与能力地图&lt;/Text&gt;&#13;&#10;    &lt;/Box&gt;&#13;&#10;    &lt;Box style={{ position: 'absolute', left: 0, top: 0, width: '1280px', height: '720px' }}&gt;&#13;&#10;        &lt;svg width='1280' height='720' viewBox='0 0 1280 720'&gt;&#13;&#10;            &lt;rect x='64' y='96' width='1152' height='330' rx='12' fill='#FFFFFF' stroke='#D8E3EE' /&gt;&lt;rect x='64' y='96' width='1152' height='4' rx='2' fill='#1F5FA8' /&gt;&lt;text x='82' y='130' fontSize='15.5' fontWeight='bold' fill='#1F5FA8' textAnchor='start' fontFamily='Microsoft YaHei'&gt;2.1 前 11 章的能力地图&lt;/text&gt;&lt;text x='82' y='169.0' fontSize='13' fill='#3A4A58' textAnchor='start' fontFamily='Microsoft YaHei'&gt;· 最关键的一张依赖图&lt;/text&gt;&lt;text x='82' y='197.5' fontSize='13' fill='#3A4A58' textAnchor='start' fontFamily='Microsoft YaHei'&gt;· 一句话总结每个单元&lt;/text&gt;&lt;rect x='64' y='574' width='1152' height='66' rx='12' fill='#EEF5FB' /&gt;&lt;text x='84' y='616' fontSize='14' fill='#243444' textAnchor='start' fontFamily='Microsoft YaHei'&gt;看不懂的地方先回讲义对应小节读一遍，再回来对着这页复述一次——能讲出来才算真懂。&lt;/text&gt;&#13;&#10;            &lt;text x='64' y='684' fontSize='13' fill='#8A9AAA' fontFamily='Microsoft YaHei'&gt;Python 讲授课件 · 逐节版&lt;/text&gt;&#13;&#10;            &lt;text x='1216' y='684' fontSize='13' fill='#8A9AAA' textAnchor='end' fontFamily='Microsoft YaHei'&gt;单元 11 · 第 57 节&lt;/text&gt;&#13;&#10;        &lt;/svg&gt;&#13;&#10;    &lt;/Box&gt;&#13;&#10;&lt;/Slide&gt;&#13;&#10;"/>
         <p:cNvGrpSpPr/>
         <p:nvPr/>
       </p:nvGrpSpPr>
@@ -7428,7 +4050,7 @@
   <p:cSld>
     <p:spTree>
       <p:nvGrpSpPr>
-        <p:cNvPr id="94" name="" descr="&lt;Slide style={{ width: '1280px', height: '720px', backgroundColor: '#FAFCFE', padding: 0, position: 'relative', overflow: 'hidden' }}&gt;&#13;&#10;    &lt;Box style={{ position: 'absolute', left: 64, top: 36, width: '1152px', flexDirection: 'row', alignItems: 'center', gap: 12 }}&gt;&#13;&#10;        &lt;Box style={{ background: '#0E9B78', borderRadius: 5, padding: '3px 11px' }}&gt;&#13;&#10;            &lt;Text style={{ fontSize: 14, fontWeight: 'bold', color: '#FFFFFF' }}&gt;第 58 节&lt;/Text&gt;&#13;&#10;        &lt;/Box&gt;&#13;&#10;        &lt;Text style={{ fontSize: 30, fontWeight: 'bold', color: '#16232E' }}&gt;核心知识点&lt;/Text&gt;&#13;&#10;        &lt;Text style={{ fontSize: 15, color: '#5A6B7A', marginTop: 10 }}&gt;· 排错思路与项目骨架&lt;/Text&gt;&#13;&#10;    &lt;/Box&gt;&#13;&#10;    &lt;Box style={{ position: 'absolute', left: 0, top: 0, width: '1280px', height: '720px' }}&gt;&#13;&#10;        &lt;svg width='1280' height='720' viewBox='0 0 1280 720'&gt;&#13;&#10;            &lt;rect x='64' y='96' width='368' height='330' rx='12' fill='#FFFFFF' stroke='#D8E3EE' /&gt;&lt;rect x='64' y='96' width='368' height='4' rx='2' fill='#1F5FA8' /&gt;&lt;text x='82' y='130' fontSize='15.5' fontWeight='bold' fill='#1F5FA8' textAnchor='start' fontFamily='Microsoft YaHei'&gt;2.3 一个完整项目的骨架&lt;/text&gt;&lt;text x='82' y='169.0' fontSize='13' fill='#3A4A58' textAnchor='start' fontFamily='Microsoft YaHei'&gt;· 这个骨架的四个设计要点（每个都是阶段 1 的知识点）&lt;/text&gt;&lt;text x='82' y='188.5' fontSize='13' fill='#3A4A58' textAnchor='start' fontFamily='Microsoft YaHei'&gt;：&lt;/text&gt;&lt;rect x='468' y='96' width='368' height='330' rx='12' fill='#FFFFFF' stroke='#D8E3EE' /&gt;&lt;rect x='468' y='96' width='368' height='4' rx='2' fill='#1F5FA8' /&gt;&lt;text x='486' y='130' fontSize='15.5' fontWeight='bold' fill='#1F5FA8' textAnchor='start' fontFamily='Microsoft YaHei'&gt;2.4 排错思路（最实用的一节）&lt;/text&gt;&lt;text x='486' y='169.0' fontSize='13' fill='#3A4A58' textAnchor='start' fontFamily='Microsoft YaHei'&gt;· 三个最高频报错的快速定位：&lt;/text&gt;&lt;text x='486' y='197.5' fontSize='13' fill='#3A4A58' textAnchor='start' fontFamily='Microsoft YaHei'&gt;· ① IndentationError&lt;/text&gt;&lt;text x='486' y='226.0' fontSize='13' fill='#3A4A58' textAnchor='start' fontFamily='Microsoft YaHei'&gt;· ② NameError&lt;/text&gt;&lt;rect x='872' y='96' width='368' height='330' rx='12' fill='#FFFFFF' stroke='#D8E3EE' /&gt;&lt;rect x='872' y='96' width='368' height='4' rx='2' fill='#1F5FA8' /&gt;&lt;text x='890' y='130' fontSize='15.5' fontWeight='bold' fill='#1F5FA8' textAnchor='start' fontFamily='Microsoft YaHei'&gt;2.5 阶段 1 的能力边界&lt;/text&gt;&lt;text x='890' y='169.0' fontSize='13' fill='#3A4A58' textAnchor='start' fontFamily='Microsoft YaHei'&gt;· 你现在能做到的：&lt;/text&gt;&lt;text x='890' y='197.5' fontSize='13' fill='#3A4A58' textAnchor='start' fontFamily='Microsoft YaHei'&gt;· 写一个几十到几百行的单文件程序&lt;/text&gt;&lt;text x='890' y='226.0' fontSize='13' fill='#3A4A58' textAnchor='start' fontFamily='Microsoft YaHei'&gt;· 用类和函数组织代码&lt;/text&gt;&lt;rect x='64' y='574' width='1152' height='66' rx='12' fill='#EEF5FB' /&gt;&lt;text x='84' y='616' fontSize='14' fill='#243444' textAnchor='start' fontFamily='Microsoft YaHei'&gt;看不懂的地方先回讲义对应小节读一遍，再回来对着这页复述一次——能讲出来才算真懂。&lt;/text&gt;&#13;&#10;            &lt;text x='64' y='684' fontSize='13' fill='#8A9AAA' fontFamily='Microsoft YaHei'&gt;Python 讲授课件 · 逐节版&lt;/text&gt;&#13;&#10;            &lt;text x='1216' y='684' fontSize='13' fill='#8A9AAA' textAnchor='end' fontFamily='Microsoft YaHei'&gt;单元 11 · 第 58 节&lt;/text&gt;&#13;&#10;        &lt;/svg&gt;&#13;&#10;    &lt;/Box&gt;&#13;&#10;&lt;/Slide&gt;&#13;&#10;"/>
+        <p:cNvPr id="94" name="" descr="&lt;Slide style={{ width: '1280px', height: '720px', backgroundColor: '#FAFCFE', padding: 0, position: 'relative', overflow: 'hidden' }}&gt;&#13;&#10;    &lt;Box style={{ position: 'absolute', left: 64, top: 36, width: '1152px', flexDirection: 'row', alignItems: 'center', gap: 12 }}&gt;&#13;&#10;        &lt;Box style={{ background: '#0E9B78', borderRadius: 5, padding: '3px 11px' }}&gt;&#13;&#10;            &lt;Text style={{ fontSize: 14, fontWeight: 'bold', color: '#FFFFFF' }}&gt;第 58 节&lt;/Text&gt;&#13;&#10;        &lt;/Box&gt;&#13;&#10;        &lt;Text style={{ fontSize: 30, fontWeight: 'bold', color: '#16232E' }}&gt;核心知识点&lt;/Text&gt;&#13;&#10;        &lt;Text style={{ fontSize: 15, color: '#5A6B7A', marginTop: 10 }}&gt;· 排错思路与项目骨架&lt;/Text&gt;&#13;&#10;    &lt;/Box&gt;&#13;&#10;    &lt;Box style={{ position: 'absolute', left: 0, top: 0, width: '1280px', height: '720px' }}&gt;&#13;&#10;        &lt;svg width='1280' height='720' viewBox='0 0 1280 720'&gt;&#13;&#10;            &lt;rect x='64' y='96' width='368' height='330' rx='12' fill='#FFFFFF' stroke='#D8E3EE' /&gt;&lt;rect x='64' y='96' width='368' height='4' rx='2' fill='#1F5FA8' /&gt;&lt;text x='82' y='130' fontSize='15.5' fontWeight='bold' fill='#1F5FA8' textAnchor='start' fontFamily='Microsoft YaHei'&gt;2.3 一个完整项目的骨架&lt;/text&gt;&lt;text x='82' y='169.0' fontSize='13' fill='#3A4A58' textAnchor='start' fontFamily='Microsoft YaHei'&gt;· 这个骨架的四个设计要点&lt;/text&gt;&lt;rect x='468' y='96' width='368' height='330' rx='12' fill='#FFFFFF' stroke='#D8E3EE' /&gt;&lt;rect x='468' y='96' width='368' height='4' rx='2' fill='#1F5FA8' /&gt;&lt;text x='486' y='130' fontSize='15.5' fontWeight='bold' fill='#1F5FA8' textAnchor='start' fontFamily='Microsoft YaHei'&gt;2.4 排错思路（最实用的一节）&lt;/text&gt;&lt;text x='486' y='169.0' fontSize='13' fill='#3A4A58' textAnchor='start' fontFamily='Microsoft YaHei'&gt;· 三个最高频报错的快速定位&lt;/text&gt;&lt;text x='486' y='197.5' fontSize='13' fill='#3A4A58' textAnchor='start' fontFamily='Microsoft YaHei'&gt;· ① IndentationError&lt;/text&gt;&lt;text x='486' y='226.0' fontSize='13' fill='#3A4A58' textAnchor='start' fontFamily='Microsoft YaHei'&gt;· ② NameError&lt;/text&gt;&lt;rect x='872' y='96' width='368' height='330' rx='12' fill='#FFFFFF' stroke='#D8E3EE' /&gt;&lt;rect x='872' y='96' width='368' height='4' rx='2' fill='#1F5FA8' /&gt;&lt;text x='890' y='130' fontSize='15.5' fontWeight='bold' fill='#1F5FA8' textAnchor='start' fontFamily='Microsoft YaHei'&gt;2.5 阶段 1 的能力边界&lt;/text&gt;&lt;text x='890' y='169.0' fontSize='13' fill='#3A4A58' textAnchor='start' fontFamily='Microsoft YaHei'&gt;· 写一个几十到几百行的单文件程序&lt;/text&gt;&lt;text x='890' y='197.5' fontSize='13' fill='#3A4A58' textAnchor='start' fontFamily='Microsoft YaHei'&gt;· 用类和函数组织代码&lt;/text&gt;&lt;text x='890' y='226.0' fontSize='13' fill='#3A4A58' textAnchor='start' fontFamily='Microsoft YaHei'&gt;· 让程序读写 JSON / CSV 文件&lt;/text&gt;&lt;rect x='64' y='574' width='1152' height='66' rx='12' fill='#EEF5FB' /&gt;&lt;text x='84' y='616' fontSize='14' fill='#243444' textAnchor='start' fontFamily='Microsoft YaHei'&gt;看不懂的地方先回讲义对应小节读一遍，再回来对着这页复述一次——能讲出来才算真懂。&lt;/text&gt;&#13;&#10;            &lt;text x='64' y='684' fontSize='13' fill='#8A9AAA' fontFamily='Microsoft YaHei'&gt;Python 讲授课件 · 逐节版&lt;/text&gt;&#13;&#10;            &lt;text x='1216' y='684' fontSize='13' fill='#8A9AAA' textAnchor='end' fontFamily='Microsoft YaHei'&gt;单元 11 · 第 58 节&lt;/text&gt;&#13;&#10;        &lt;/svg&gt;&#13;&#10;    &lt;/Box&gt;&#13;&#10;&lt;/Slide&gt;&#13;&#10;"/>
         <p:cNvGrpSpPr/>
         <p:nvPr/>
       </p:nvGrpSpPr>
@@ -8320,7 +4942,7 @@
   <p:cSld>
     <p:spTree>
       <p:nvGrpSpPr>
-        <p:cNvPr id="120" name="" descr="&lt;Slide style={{ width: '1280px', height: '720px', backgroundColor: '#FAFCFE', padding: 0, position: 'relative', overflow: 'hidden' }}&gt;&#13;&#10;    &lt;Box style={{ position: 'absolute', left: 64, top: 36, width: '1152px', flexDirection: 'row', alignItems: 'center', gap: 12 }}&gt;&#13;&#10;        &lt;Box style={{ background: '#0E9B78', borderRadius: 5, padding: '3px 11px' }}&gt;&#13;&#10;            &lt;Text style={{ fontSize: 14, fontWeight: 'bold', color: '#FFFFFF' }}&gt;第 60 节&lt;/Text&gt;&#13;&#10;        &lt;/Box&gt;&#13;&#10;        &lt;Text style={{ fontSize: 30, fontWeight: 'bold', color: '#16232E' }}&gt;核心知识点&lt;/Text&gt;&#13;&#10;        &lt;Text style={{ fontSize: 15, color: '#5A6B7A', marginTop: 10 }}&gt;· ★ 综合项目 1：待办管理器&lt;/Text&gt;&#13;&#10;    &lt;/Box&gt;&#13;&#10;    &lt;Box style={{ position: 'absolute', left: 0, top: 0, width: '1280px', height: '720px' }}&gt;&#13;&#10;        &lt;svg width='1280' height='720' viewBox='0 0 1280 720'&gt;&#13;&#10;            &lt;rect x='64' y='96' width='368' height='330' rx='12' fill='#FFFFFF' stroke='#D8E3EE' /&gt;&lt;rect x='64' y='96' width='368' height='4' rx='2' fill='#1F5FA8' /&gt;&lt;text x='82' y='130' fontSize='15.5' fontWeight='bold' fill='#1F5FA8' textAnchor='start' fontFamily='Microsoft YaHei'&gt;基础档&lt;/text&gt;&lt;text x='82' y='169.0' fontSize='13' fill='#3A4A58' textAnchor='start' fontFamily='Microsoft YaHei'&gt;· 练习 11-1【知识自查表】&lt;/text&gt;&lt;rect x='468' y='96' width='368' height='330' rx='12' fill='#FFFFFF' stroke='#D8E3EE' /&gt;&lt;rect x='468' y='96' width='368' height='4' rx='2' fill='#1F5FA8' /&gt;&lt;text x='486' y='130' fontSize='15.5' fontWeight='bold' fill='#1F5FA8' textAnchor='start' fontFamily='Microsoft YaHei'&gt;进阶档&lt;/text&gt;&lt;text x='486' y='169.0' fontSize='13' fill='#3A4A58' textAnchor='start' fontFamily='Microsoft YaHei'&gt;· 练习 11-2【综合项目 1：命令行待办事项管理器】&lt;/text&gt;&lt;text x='486' y='197.5' fontSize='13' fill='#3A4A58' textAnchor='start' fontFamily='Microsoft YaHei'&gt;· 功能需求：&lt;/text&gt;&lt;text x='486' y='226.0' fontSize='13' fill='#3A4A58' textAnchor='start' fontFamily='Microsoft YaHei'&gt;· 技术要求：&lt;/text&gt;&lt;rect x='872' y='96' width='368' height='330' rx='12' fill='#FFFFFF' stroke='#D8E3EE' /&gt;&lt;rect x='872' y='96' width='368' height='4' rx='2' fill='#1F5FA8' /&gt;&lt;text x='890' y='130' fontSize='15.5' fontWeight='bold' fill='#1F5FA8' textAnchor='start' fontFamily='Microsoft YaHei'&gt;参考答案 11-2（综合项目 1：待办管理器完整&lt;/text&gt;&lt;text x='890' y='153' fontSize='15.5' fontWeight='bold' fill='#1F5FA8' textAnchor='start' fontFamily='Microsoft YaHei'&gt;实现）&lt;/text&gt;&lt;text x='890' y='192.0' fontSize='13' fill='#3A4A58' textAnchor='start' fontFamily='Microsoft YaHei'&gt;· import json&lt;/text&gt;&lt;rect x='64' y='574' width='1152' height='66' rx='12' fill='#EEF5FB' /&gt;&lt;text x='84' y='616' fontSize='14' fill='#243444' textAnchor='start' fontFamily='Microsoft YaHei'&gt;看不懂的地方先回讲义对应小节读一遍，再回来对着这页复述一次——能讲出来才算真懂。&lt;/text&gt;&#13;&#10;            &lt;text x='64' y='684' fontSize='13' fill='#8A9AAA' fontFamily='Microsoft YaHei'&gt;Python 讲授课件 · 逐节版&lt;/text&gt;&#13;&#10;            &lt;text x='1216' y='684' fontSize='13' fill='#8A9AAA' textAnchor='end' fontFamily='Microsoft YaHei'&gt;单元 11 · 第 60 节&lt;/text&gt;&#13;&#10;        &lt;/svg&gt;&#13;&#10;    &lt;/Box&gt;&#13;&#10;&lt;/Slide&gt;&#13;&#10;"/>
+        <p:cNvPr id="120" name="" descr="&lt;Slide style={{ width: '1280px', height: '720px', backgroundColor: '#FAFCFE', padding: 0, position: 'relative', overflow: 'hidden' }}&gt;&#13;&#10;    &lt;Box style={{ position: 'absolute', left: 64, top: 36, width: '1152px', flexDirection: 'row', alignItems: 'center', gap: 12 }}&gt;&#13;&#10;        &lt;Box style={{ background: '#0E9B78', borderRadius: 5, padding: '3px 11px' }}&gt;&#13;&#10;            &lt;Text style={{ fontSize: 14, fontWeight: 'bold', color: '#FFFFFF' }}&gt;第 60 节&lt;/Text&gt;&#13;&#10;        &lt;/Box&gt;&#13;&#10;        &lt;Text style={{ fontSize: 30, fontWeight: 'bold', color: '#16232E' }}&gt;核心知识点&lt;/Text&gt;&#13;&#10;        &lt;Text style={{ fontSize: 15, color: '#5A6B7A', marginTop: 10 }}&gt;· ★ 综合项目 1：待办管理器&lt;/Text&gt;&#13;&#10;    &lt;/Box&gt;&#13;&#10;    &lt;Box style={{ position: 'absolute', left: 0, top: 0, width: '1280px', height: '720px' }}&gt;&#13;&#10;        &lt;svg width='1280' height='720' viewBox='0 0 1280 720'&gt;&#13;&#10;            &lt;rect x='64' y='96' width='548' height='330' rx='12' fill='#FFFFFF' stroke='#D8E3EE' /&gt;&lt;rect x='64' y='96' width='548' height='4' rx='2' fill='#1F5FA8' /&gt;&lt;text x='82' y='130' fontSize='15.5' fontWeight='bold' fill='#1F5FA8' textAnchor='start' fontFamily='Microsoft YaHei'&gt;基础档&lt;/text&gt;&lt;text x='82' y='169.0' fontSize='13' fill='#3A4A58' textAnchor='start' fontFamily='Microsoft YaHei'&gt;· 练习 11-1【知识自查表】&lt;/text&gt;&lt;rect x='668' y='96' width='548' height='330' rx='12' fill='#FFFFFF' stroke='#D8E3EE' /&gt;&lt;rect x='668' y='96' width='548' height='4' rx='2' fill='#1F5FA8' /&gt;&lt;text x='686' y='130' fontSize='15.5' fontWeight='bold' fill='#1F5FA8' textAnchor='start' fontFamily='Microsoft YaHei'&gt;进阶档&lt;/text&gt;&lt;text x='686' y='169.0' fontSize='13' fill='#3A4A58' textAnchor='start' fontFamily='Microsoft YaHei'&gt;· 练习 11-2【综合项目 1：命令行待办事项管理器】&lt;/text&gt;&lt;text x='686' y='197.5' fontSize='13' fill='#3A4A58' textAnchor='start' fontFamily='Microsoft YaHei'&gt;· 功能需求&lt;/text&gt;&lt;text x='686' y='226.0' fontSize='13' fill='#3A4A58' textAnchor='start' fontFamily='Microsoft YaHei'&gt;· 技术要求&lt;/text&gt;&lt;rect x='64' y='574' width='1152' height='66' rx='12' fill='#EEF5FB' /&gt;&lt;text x='84' y='616' fontSize='14' fill='#243444' textAnchor='start' fontFamily='Microsoft YaHei'&gt;看不懂的地方先回讲义对应小节读一遍，再回来对着这页复述一次——能讲出来才算真懂。&lt;/text&gt;&#13;&#10;            &lt;text x='64' y='684' fontSize='13' fill='#8A9AAA' fontFamily='Microsoft YaHei'&gt;Python 讲授课件 · 逐节版&lt;/text&gt;&#13;&#10;            &lt;text x='1216' y='684' fontSize='13' fill='#8A9AAA' textAnchor='end' fontFamily='Microsoft YaHei'&gt;单元 11 · 第 60 节&lt;/text&gt;&#13;&#10;        &lt;/svg&gt;&#13;&#10;    &lt;/Box&gt;&#13;&#10;&lt;/Slide&gt;&#13;&#10;"/>
         <p:cNvGrpSpPr/>
         <p:nvPr/>
       </p:nvGrpSpPr>

--- a/python-course-ppt/逐节课件/Python讲授课件-单元11.pptx
+++ b/python-course-ppt/逐节课件/Python讲授课件-单元11.pptx
@@ -242,6 +242,1920 @@
     </a:lvl9pPr>
   </p:notesStyle>
 </p:notesMaster>
+</file>
+
+<file path=ppt/notesSlides/notesSlide1.xml><?xml version="1.0" encoding="utf-8"?>
+<p:notes xmlns:a="http://schemas.openxmlformats.org/drawingml/2006/main" xmlns:p="http://schemas.openxmlformats.org/presentationml/2006/main" xmlns:r="http://schemas.openxmlformats.org/officeDocument/2006/relationships">
+  <p:cSld>
+    <p:spTree>
+      <p:nvGrpSpPr>
+        <p:cNvPr id="1" name=""/>
+        <p:cNvGrpSpPr/>
+        <p:nvPr/>
+      </p:nvGrpSpPr>
+      <p:grpSpPr>
+        <a:xfrm>
+          <a:off x="0" y="0"/>
+          <a:ext cx="0" cy="0"/>
+          <a:chOff x="0" y="0"/>
+          <a:chExt cx="0" cy="0"/>
+        </a:xfrm>
+      </p:grpSpPr>
+      <p:sp>
+        <p:nvSpPr>
+          <p:cNvPr id="2" name="讲课提示"/>
+          <p:cNvSpPr txBox="1"/>
+          <p:nvPr/>
+        </p:nvSpPr>
+        <p:spPr>
+          <a:xfrm>
+            <a:off x="457200" y="457200"/>
+            <a:ext cx="6858000" cy="4800600"/>
+          </a:xfrm>
+          <a:prstGeom prst="rect">
+            <a:avLst/>
+          </a:prstGeom>
+        </p:spPr>
+        <p:txBody>
+          <a:bodyPr wrap="square"/>
+          <a:lstStyle/>
+          <a:p>
+            <a:r>
+              <a:rPr lang="zh-CN" dirty="0"/>
+              <a:t>单元 11 · 单元 11 · 阶段 1 总复习 + 关卡验收</a:t>
+            </a:r>
+          </a:p>
+          <a:p>
+            <a:r>
+              <a:rPr lang="zh-CN" dirty="0"/>
+              <a:t/>
+            </a:r>
+          </a:p>
+          <a:p>
+            <a:r>
+              <a:rPr lang="zh-CN" dirty="0"/>
+              <a:t>本单元包含以下课节：</a:t>
+            </a:r>
+          </a:p>
+          <a:p>
+            <a:r>
+              <a:rPr lang="zh-CN" dirty="0"/>
+              <a:t>· 第 57 节 知识串讲与能力地图</a:t>
+            </a:r>
+          </a:p>
+          <a:p>
+            <a:r>
+              <a:rPr lang="zh-CN" dirty="0"/>
+              <a:t>· 第 58 节 排错思路与项目骨架</a:t>
+            </a:r>
+          </a:p>
+          <a:p>
+            <a:r>
+              <a:rPr lang="zh-CN" dirty="0"/>
+              <a:t>· 第 59 节 四个复习示例串讲</a:t>
+            </a:r>
+          </a:p>
+          <a:p>
+            <a:r>
+              <a:rPr lang="zh-CN" dirty="0"/>
+              <a:t>· 第 60 节 ★ 综合项目 1：待办管理器</a:t>
+            </a:r>
+          </a:p>
+          <a:p>
+            <a:r>
+              <a:rPr lang="zh-CN" dirty="0"/>
+              <a:t>· 第 61 节 ★ 综合项目 2：成绩分析器</a:t>
+            </a:r>
+          </a:p>
+          <a:p>
+            <a:r>
+              <a:rPr lang="zh-CN" dirty="0"/>
+              <a:t>· 第 62 节 ★ 综合项目 3：文本统计工具</a:t>
+            </a:r>
+          </a:p>
+          <a:p>
+            <a:r>
+              <a:rPr lang="zh-CN" dirty="0"/>
+              <a:t>· 第 63 节 ★ 关卡 1 现场测评</a:t>
+            </a:r>
+          </a:p>
+          <a:p>
+            <a:r>
+              <a:rPr lang="zh-CN" dirty="0"/>
+              <a:t>· 第 64 节 结业检查与下一阶段</a:t>
+            </a:r>
+          </a:p>
+          <a:p>
+            <a:r>
+              <a:rPr lang="zh-CN" dirty="0"/>
+              <a:t/>
+            </a:r>
+          </a:p>
+          <a:p>
+            <a:r>
+              <a:rPr lang="zh-CN" dirty="0"/>
+              <a:t>开场用 3 分钟讲清：这个单元学完能做出什么，最后会被关卡怎么验。</a:t>
+            </a:r>
+          </a:p>
+        </p:txBody>
+      </p:sp>
+    </p:spTree>
+  </p:cSld>
+  <p:clrMapOvr>
+    <a:masterClrMapping/>
+  </p:clrMapOvr>
+</p:notes>
+</file>
+
+<file path=ppt/notesSlides/notesSlide10.xml><?xml version="1.0" encoding="utf-8"?>
+<p:notes xmlns:a="http://schemas.openxmlformats.org/drawingml/2006/main" xmlns:p="http://schemas.openxmlformats.org/presentationml/2006/main" xmlns:r="http://schemas.openxmlformats.org/officeDocument/2006/relationships">
+  <p:cSld>
+    <p:spTree>
+      <p:nvGrpSpPr>
+        <p:cNvPr id="1" name=""/>
+        <p:cNvGrpSpPr/>
+        <p:nvPr/>
+      </p:nvGrpSpPr>
+      <p:grpSpPr>
+        <a:xfrm>
+          <a:off x="0" y="0"/>
+          <a:ext cx="0" cy="0"/>
+          <a:chOff x="0" y="0"/>
+          <a:chExt cx="0" cy="0"/>
+        </a:xfrm>
+      </p:grpSpPr>
+      <p:sp>
+        <p:nvSpPr>
+          <p:cNvPr id="2" name="讲课提示"/>
+          <p:cNvSpPr txBox="1"/>
+          <p:nvPr/>
+        </p:nvSpPr>
+        <p:spPr>
+          <a:xfrm>
+            <a:off x="457200" y="457200"/>
+            <a:ext cx="6858000" cy="4800600"/>
+          </a:xfrm>
+          <a:prstGeom prst="rect">
+            <a:avLst/>
+          </a:prstGeom>
+        </p:spPr>
+        <p:txBody>
+          <a:bodyPr wrap="square"/>
+          <a:lstStyle/>
+          <a:p>
+            <a:r>
+              <a:rPr lang="zh-CN" dirty="0"/>
+              <a:t>第 61 节 · ★ 综合项目 2：成绩分析器</a:t>
+            </a:r>
+          </a:p>
+          <a:p>
+            <a:r>
+              <a:rPr lang="zh-CN" dirty="0"/>
+              <a:t>单元 11 · 阶段 1 总复习 + 关卡验收 · W13</a:t>
+            </a:r>
+          </a:p>
+          <a:p>
+            <a:r>
+              <a:rPr lang="zh-CN" dirty="0"/>
+              <a:t/>
+            </a:r>
+          </a:p>
+          <a:p>
+            <a:r>
+              <a:rPr lang="zh-CN" dirty="0"/>
+              <a:t>学习目标：独立写出一个能统计平均分、最高分并画图的成绩分析器</a:t>
+            </a:r>
+          </a:p>
+          <a:p>
+            <a:r>
+              <a:rPr lang="zh-CN" dirty="0"/>
+              <a:t/>
+            </a:r>
+          </a:p>
+          <a:p>
+            <a:r>
+              <a:rPr lang="zh-CN" dirty="0"/>
+              <a:t>课堂实操（40 分钟，不看答案）：</a:t>
+            </a:r>
+          </a:p>
+          <a:p>
+            <a:r>
+              <a:rPr lang="zh-CN" dirty="0"/>
+              <a:t>· 先限时 40 分钟自己写，再看参考答案对照</a:t>
+            </a:r>
+          </a:p>
+          <a:p>
+            <a:r>
+              <a:rPr lang="zh-CN" dirty="0"/>
+              <a:t>· 对照参考答案补齐自己漏掉的功能</a:t>
+            </a:r>
+          </a:p>
+          <a:p>
+            <a:r>
+              <a:rPr lang="zh-CN" dirty="0"/>
+              <a:t/>
+            </a:r>
+          </a:p>
+          <a:p>
+            <a:r>
+              <a:rPr lang="zh-CN" dirty="0"/>
+              <a:t>课后作业：</a:t>
+            </a:r>
+          </a:p>
+          <a:p>
+            <a:r>
+              <a:rPr lang="zh-CN" dirty="0"/>
+              <a:t>· 完成综合项目 2 及其测试文件</a:t>
+            </a:r>
+          </a:p>
+          <a:p>
+            <a:r>
+              <a:rPr lang="zh-CN" dirty="0"/>
+              <a:t/>
+            </a:r>
+          </a:p>
+          <a:p>
+            <a:r>
+              <a:rPr lang="zh-CN" dirty="0"/>
+              <a:t>节奏：讲 20 分钟 → 学员自己敲 40 分钟（不看答案）→ 对讲评自查 20 分钟 → 写作业 10 分钟。</a:t>
+            </a:r>
+          </a:p>
+        </p:txBody>
+      </p:sp>
+    </p:spTree>
+  </p:cSld>
+  <p:clrMapOvr>
+    <a:masterClrMapping/>
+  </p:clrMapOvr>
+</p:notes>
+</file>
+
+<file path=ppt/notesSlides/notesSlide11.xml><?xml version="1.0" encoding="utf-8"?>
+<p:notes xmlns:a="http://schemas.openxmlformats.org/drawingml/2006/main" xmlns:p="http://schemas.openxmlformats.org/presentationml/2006/main" xmlns:r="http://schemas.openxmlformats.org/officeDocument/2006/relationships">
+  <p:cSld>
+    <p:spTree>
+      <p:nvGrpSpPr>
+        <p:cNvPr id="1" name=""/>
+        <p:cNvGrpSpPr/>
+        <p:nvPr/>
+      </p:nvGrpSpPr>
+      <p:grpSpPr>
+        <a:xfrm>
+          <a:off x="0" y="0"/>
+          <a:ext cx="0" cy="0"/>
+          <a:chOff x="0" y="0"/>
+          <a:chExt cx="0" cy="0"/>
+        </a:xfrm>
+      </p:grpSpPr>
+      <p:sp>
+        <p:nvSpPr>
+          <p:cNvPr id="2" name="讲课提示"/>
+          <p:cNvSpPr txBox="1"/>
+          <p:nvPr/>
+        </p:nvSpPr>
+        <p:spPr>
+          <a:xfrm>
+            <a:off x="457200" y="457200"/>
+            <a:ext cx="6858000" cy="4800600"/>
+          </a:xfrm>
+          <a:prstGeom prst="rect">
+            <a:avLst/>
+          </a:prstGeom>
+        </p:spPr>
+        <p:txBody>
+          <a:bodyPr wrap="square"/>
+          <a:lstStyle/>
+          <a:p>
+            <a:r>
+              <a:rPr lang="zh-CN" dirty="0"/>
+              <a:t>第 61 节 · 核心知识点：★ 综合项目 2：成绩分析器</a:t>
+            </a:r>
+          </a:p>
+          <a:p>
+            <a:r>
+              <a:rPr lang="zh-CN" dirty="0"/>
+              <a:t/>
+            </a:r>
+          </a:p>
+          <a:p>
+            <a:r>
+              <a:rPr lang="zh-CN" dirty="0"/>
+              <a:t>讲这一页时：先让学生说出上节课的结论，再逐块讲要点。</a:t>
+            </a:r>
+          </a:p>
+          <a:p>
+            <a:r>
+              <a:rPr lang="zh-CN" dirty="0"/>
+              <a:t>每讲完一块，问一句「这一步如果写错了，报错会长什么样？」——把错误提前讲。</a:t>
+            </a:r>
+          </a:p>
+          <a:p>
+            <a:r>
+              <a:rPr lang="zh-CN" dirty="0"/>
+              <a:t/>
+            </a:r>
+          </a:p>
+          <a:p>
+            <a:r>
+              <a:rPr lang="zh-CN" dirty="0"/>
+              <a:t>本节目标：独立写出一个能统计平均分、最高分并画图的成绩分析器</a:t>
+            </a:r>
+          </a:p>
+          <a:p>
+            <a:r>
+              <a:rPr lang="zh-CN" dirty="0"/>
+              <a:t/>
+            </a:r>
+          </a:p>
+          <a:p>
+            <a:r>
+              <a:rPr lang="zh-CN" dirty="0"/>
+              <a:t>看不到懂的地方，回讲义对应小节读一遍，再回来对着这页复述一次——能讲出来才算真懂。</a:t>
+            </a:r>
+          </a:p>
+        </p:txBody>
+      </p:sp>
+    </p:spTree>
+  </p:cSld>
+  <p:clrMapOvr>
+    <a:masterClrMapping/>
+  </p:clrMapOvr>
+</p:notes>
+</file>
+
+<file path=ppt/notesSlides/notesSlide12.xml><?xml version="1.0" encoding="utf-8"?>
+<p:notes xmlns:a="http://schemas.openxmlformats.org/drawingml/2006/main" xmlns:p="http://schemas.openxmlformats.org/presentationml/2006/main" xmlns:r="http://schemas.openxmlformats.org/officeDocument/2006/relationships">
+  <p:cSld>
+    <p:spTree>
+      <p:nvGrpSpPr>
+        <p:cNvPr id="1" name=""/>
+        <p:cNvGrpSpPr/>
+        <p:nvPr/>
+      </p:nvGrpSpPr>
+      <p:grpSpPr>
+        <a:xfrm>
+          <a:off x="0" y="0"/>
+          <a:ext cx="0" cy="0"/>
+          <a:chOff x="0" y="0"/>
+          <a:chExt cx="0" cy="0"/>
+        </a:xfrm>
+      </p:grpSpPr>
+      <p:sp>
+        <p:nvSpPr>
+          <p:cNvPr id="2" name="讲课提示"/>
+          <p:cNvSpPr txBox="1"/>
+          <p:nvPr/>
+        </p:nvSpPr>
+        <p:spPr>
+          <a:xfrm>
+            <a:off x="457200" y="457200"/>
+            <a:ext cx="6858000" cy="4800600"/>
+          </a:xfrm>
+          <a:prstGeom prst="rect">
+            <a:avLst/>
+          </a:prstGeom>
+        </p:spPr>
+        <p:txBody>
+          <a:bodyPr wrap="square"/>
+          <a:lstStyle/>
+          <a:p>
+            <a:r>
+              <a:rPr lang="zh-CN" dirty="0"/>
+              <a:t>第 62 节 · ★ 综合项目 3：文本统计工具</a:t>
+            </a:r>
+          </a:p>
+          <a:p>
+            <a:r>
+              <a:rPr lang="zh-CN" dirty="0"/>
+              <a:t>单元 11 · 阶段 1 总复习 + 关卡验收 · W13</a:t>
+            </a:r>
+          </a:p>
+          <a:p>
+            <a:r>
+              <a:rPr lang="zh-CN" dirty="0"/>
+              <a:t/>
+            </a:r>
+          </a:p>
+          <a:p>
+            <a:r>
+              <a:rPr lang="zh-CN" dirty="0"/>
+              <a:t>学习目标：独立写出一个能统计词频并输出报告的文本工具</a:t>
+            </a:r>
+          </a:p>
+          <a:p>
+            <a:r>
+              <a:rPr lang="zh-CN" dirty="0"/>
+              <a:t/>
+            </a:r>
+          </a:p>
+          <a:p>
+            <a:r>
+              <a:rPr lang="zh-CN" dirty="0"/>
+              <a:t>课堂实操（40 分钟，不看答案）：</a:t>
+            </a:r>
+          </a:p>
+          <a:p>
+            <a:r>
+              <a:rPr lang="zh-CN" dirty="0"/>
+              <a:t>· 先限时 40 分钟自己写，再看参考答案对照</a:t>
+            </a:r>
+          </a:p>
+          <a:p>
+            <a:r>
+              <a:rPr lang="zh-CN" dirty="0"/>
+              <a:t/>
+            </a:r>
+          </a:p>
+          <a:p>
+            <a:r>
+              <a:rPr lang="zh-CN" dirty="0"/>
+              <a:t>课后作业：</a:t>
+            </a:r>
+          </a:p>
+          <a:p>
+            <a:r>
+              <a:rPr lang="zh-CN" dirty="0"/>
+              <a:t>· 完成综合项目 3 及其测试文件</a:t>
+            </a:r>
+          </a:p>
+          <a:p>
+            <a:r>
+              <a:rPr lang="zh-CN" dirty="0"/>
+              <a:t/>
+            </a:r>
+          </a:p>
+          <a:p>
+            <a:r>
+              <a:rPr lang="zh-CN" dirty="0"/>
+              <a:t>节奏：讲 20 分钟 → 学员自己敲 40 分钟（不看答案）→ 对讲评自查 20 分钟 → 写作业 10 分钟。</a:t>
+            </a:r>
+          </a:p>
+        </p:txBody>
+      </p:sp>
+    </p:spTree>
+  </p:cSld>
+  <p:clrMapOvr>
+    <a:masterClrMapping/>
+  </p:clrMapOvr>
+</p:notes>
+</file>
+
+<file path=ppt/notesSlides/notesSlide13.xml><?xml version="1.0" encoding="utf-8"?>
+<p:notes xmlns:a="http://schemas.openxmlformats.org/drawingml/2006/main" xmlns:p="http://schemas.openxmlformats.org/presentationml/2006/main" xmlns:r="http://schemas.openxmlformats.org/officeDocument/2006/relationships">
+  <p:cSld>
+    <p:spTree>
+      <p:nvGrpSpPr>
+        <p:cNvPr id="1" name=""/>
+        <p:cNvGrpSpPr/>
+        <p:nvPr/>
+      </p:nvGrpSpPr>
+      <p:grpSpPr>
+        <a:xfrm>
+          <a:off x="0" y="0"/>
+          <a:ext cx="0" cy="0"/>
+          <a:chOff x="0" y="0"/>
+          <a:chExt cx="0" cy="0"/>
+        </a:xfrm>
+      </p:grpSpPr>
+      <p:sp>
+        <p:nvSpPr>
+          <p:cNvPr id="2" name="讲课提示"/>
+          <p:cNvSpPr txBox="1"/>
+          <p:nvPr/>
+        </p:nvSpPr>
+        <p:spPr>
+          <a:xfrm>
+            <a:off x="457200" y="457200"/>
+            <a:ext cx="6858000" cy="4800600"/>
+          </a:xfrm>
+          <a:prstGeom prst="rect">
+            <a:avLst/>
+          </a:prstGeom>
+        </p:spPr>
+        <p:txBody>
+          <a:bodyPr wrap="square"/>
+          <a:lstStyle/>
+          <a:p>
+            <a:r>
+              <a:rPr lang="zh-CN" dirty="0"/>
+              <a:t>第 62 节 · 核心知识点：★ 综合项目 3：文本统计工具</a:t>
+            </a:r>
+          </a:p>
+          <a:p>
+            <a:r>
+              <a:rPr lang="zh-CN" dirty="0"/>
+              <a:t/>
+            </a:r>
+          </a:p>
+          <a:p>
+            <a:r>
+              <a:rPr lang="zh-CN" dirty="0"/>
+              <a:t>讲这一页时：先让学生说出上节课的结论，再逐块讲要点。</a:t>
+            </a:r>
+          </a:p>
+          <a:p>
+            <a:r>
+              <a:rPr lang="zh-CN" dirty="0"/>
+              <a:t>每讲完一块，问一句「这一步如果写错了，报错会长什么样？」——把错误提前讲。</a:t>
+            </a:r>
+          </a:p>
+          <a:p>
+            <a:r>
+              <a:rPr lang="zh-CN" dirty="0"/>
+              <a:t/>
+            </a:r>
+          </a:p>
+          <a:p>
+            <a:r>
+              <a:rPr lang="zh-CN" dirty="0"/>
+              <a:t>本节目标：独立写出一个能统计词频并输出报告的文本工具</a:t>
+            </a:r>
+          </a:p>
+          <a:p>
+            <a:r>
+              <a:rPr lang="zh-CN" dirty="0"/>
+              <a:t/>
+            </a:r>
+          </a:p>
+          <a:p>
+            <a:r>
+              <a:rPr lang="zh-CN" dirty="0"/>
+              <a:t>看不到懂的地方，回讲义对应小节读一遍，再回来对着这页复述一次——能讲出来才算真懂。</a:t>
+            </a:r>
+          </a:p>
+        </p:txBody>
+      </p:sp>
+    </p:spTree>
+  </p:cSld>
+  <p:clrMapOvr>
+    <a:masterClrMapping/>
+  </p:clrMapOvr>
+</p:notes>
+</file>
+
+<file path=ppt/notesSlides/notesSlide14.xml><?xml version="1.0" encoding="utf-8"?>
+<p:notes xmlns:a="http://schemas.openxmlformats.org/drawingml/2006/main" xmlns:p="http://schemas.openxmlformats.org/presentationml/2006/main" xmlns:r="http://schemas.openxmlformats.org/officeDocument/2006/relationships">
+  <p:cSld>
+    <p:spTree>
+      <p:nvGrpSpPr>
+        <p:cNvPr id="1" name=""/>
+        <p:cNvGrpSpPr/>
+        <p:nvPr/>
+      </p:nvGrpSpPr>
+      <p:grpSpPr>
+        <a:xfrm>
+          <a:off x="0" y="0"/>
+          <a:ext cx="0" cy="0"/>
+          <a:chOff x="0" y="0"/>
+          <a:chExt cx="0" cy="0"/>
+        </a:xfrm>
+      </p:grpSpPr>
+      <p:sp>
+        <p:nvSpPr>
+          <p:cNvPr id="2" name="讲课提示"/>
+          <p:cNvSpPr txBox="1"/>
+          <p:nvPr/>
+        </p:nvSpPr>
+        <p:spPr>
+          <a:xfrm>
+            <a:off x="457200" y="457200"/>
+            <a:ext cx="6858000" cy="4800600"/>
+          </a:xfrm>
+          <a:prstGeom prst="rect">
+            <a:avLst/>
+          </a:prstGeom>
+        </p:spPr>
+        <p:txBody>
+          <a:bodyPr wrap="square"/>
+          <a:lstStyle/>
+          <a:p>
+            <a:r>
+              <a:rPr lang="zh-CN" dirty="0"/>
+              <a:t>第 63 节 · ★ 关卡 1 现场测评</a:t>
+            </a:r>
+          </a:p>
+          <a:p>
+            <a:r>
+              <a:rPr lang="zh-CN" dirty="0"/>
+              <a:t>单元 11 · 阶段 1 总复习 + 关卡验收 · W13</a:t>
+            </a:r>
+          </a:p>
+          <a:p>
+            <a:r>
+              <a:rPr lang="zh-CN" dirty="0"/>
+              <a:t/>
+            </a:r>
+          </a:p>
+          <a:p>
+            <a:r>
+              <a:rPr lang="zh-CN" dirty="0"/>
+              <a:t>学习目标：限时 2 小时完成四条硬指标，证明能独立动手</a:t>
+            </a:r>
+          </a:p>
+          <a:p>
+            <a:r>
+              <a:rPr lang="zh-CN" dirty="0"/>
+              <a:t/>
+            </a:r>
+          </a:p>
+          <a:p>
+            <a:r>
+              <a:rPr lang="zh-CN" dirty="0"/>
+              <a:t>课堂实操（40 分钟，不看答案）：</a:t>
+            </a:r>
+          </a:p>
+          <a:p>
+            <a:r>
+              <a:rPr lang="zh-CN" dirty="0"/>
+              <a:t>· 现场测评，全程不查资料，2 小时</a:t>
+            </a:r>
+          </a:p>
+          <a:p>
+            <a:r>
+              <a:rPr lang="zh-CN" dirty="0"/>
+              <a:t/>
+            </a:r>
+          </a:p>
+          <a:p>
+            <a:r>
+              <a:rPr lang="zh-CN" dirty="0"/>
+              <a:t>课后作业：</a:t>
+            </a:r>
+          </a:p>
+          <a:p>
+            <a:r>
+              <a:rPr lang="zh-CN" dirty="0"/>
+              <a:t>· ★ 关卡 1 四项逐条自测</a:t>
+            </a:r>
+          </a:p>
+          <a:p>
+            <a:r>
+              <a:rPr lang="zh-CN" dirty="0"/>
+              <a:t/>
+            </a:r>
+          </a:p>
+          <a:p>
+            <a:r>
+              <a:rPr lang="zh-CN" dirty="0"/>
+              <a:t>节奏：讲 20 分钟 → 学员自己敲 40 分钟（不看答案）→ 对讲评自查 20 分钟 → 写作业 10 分钟。</a:t>
+            </a:r>
+          </a:p>
+        </p:txBody>
+      </p:sp>
+    </p:spTree>
+  </p:cSld>
+  <p:clrMapOvr>
+    <a:masterClrMapping/>
+  </p:clrMapOvr>
+</p:notes>
+</file>
+
+<file path=ppt/notesSlides/notesSlide15.xml><?xml version="1.0" encoding="utf-8"?>
+<p:notes xmlns:a="http://schemas.openxmlformats.org/drawingml/2006/main" xmlns:p="http://schemas.openxmlformats.org/presentationml/2006/main" xmlns:r="http://schemas.openxmlformats.org/officeDocument/2006/relationships">
+  <p:cSld>
+    <p:spTree>
+      <p:nvGrpSpPr>
+        <p:cNvPr id="1" name=""/>
+        <p:cNvGrpSpPr/>
+        <p:nvPr/>
+      </p:nvGrpSpPr>
+      <p:grpSpPr>
+        <a:xfrm>
+          <a:off x="0" y="0"/>
+          <a:ext cx="0" cy="0"/>
+          <a:chOff x="0" y="0"/>
+          <a:chExt cx="0" cy="0"/>
+        </a:xfrm>
+      </p:grpSpPr>
+      <p:sp>
+        <p:nvSpPr>
+          <p:cNvPr id="2" name="讲课提示"/>
+          <p:cNvSpPr txBox="1"/>
+          <p:nvPr/>
+        </p:nvSpPr>
+        <p:spPr>
+          <a:xfrm>
+            <a:off x="457200" y="457200"/>
+            <a:ext cx="6858000" cy="4800600"/>
+          </a:xfrm>
+          <a:prstGeom prst="rect">
+            <a:avLst/>
+          </a:prstGeom>
+        </p:spPr>
+        <p:txBody>
+          <a:bodyPr wrap="square"/>
+          <a:lstStyle/>
+          <a:p>
+            <a:r>
+              <a:rPr lang="zh-CN" dirty="0"/>
+              <a:t>第 63 节 · 核心知识点：★ 关卡 1 现场测评</a:t>
+            </a:r>
+          </a:p>
+          <a:p>
+            <a:r>
+              <a:rPr lang="zh-CN" dirty="0"/>
+              <a:t/>
+            </a:r>
+          </a:p>
+          <a:p>
+            <a:r>
+              <a:rPr lang="zh-CN" dirty="0"/>
+              <a:t>讲这一页时：先让学生说出上节课的结论，再逐块讲要点。</a:t>
+            </a:r>
+          </a:p>
+          <a:p>
+            <a:r>
+              <a:rPr lang="zh-CN" dirty="0"/>
+              <a:t>每讲完一块，问一句「这一步如果写错了，报错会长什么样？」——把错误提前讲。</a:t>
+            </a:r>
+          </a:p>
+          <a:p>
+            <a:r>
+              <a:rPr lang="zh-CN" dirty="0"/>
+              <a:t/>
+            </a:r>
+          </a:p>
+          <a:p>
+            <a:r>
+              <a:rPr lang="zh-CN" dirty="0"/>
+              <a:t>本节目标：限时 2 小时完成四条硬指标，证明能独立动手</a:t>
+            </a:r>
+          </a:p>
+          <a:p>
+            <a:r>
+              <a:rPr lang="zh-CN" dirty="0"/>
+              <a:t/>
+            </a:r>
+          </a:p>
+          <a:p>
+            <a:r>
+              <a:rPr lang="zh-CN" dirty="0"/>
+              <a:t>看不到懂的地方，回讲义对应小节读一遍，再回来对着这页复述一次——能讲出来才算真懂。</a:t>
+            </a:r>
+          </a:p>
+        </p:txBody>
+      </p:sp>
+    </p:spTree>
+  </p:cSld>
+  <p:clrMapOvr>
+    <a:masterClrMapping/>
+  </p:clrMapOvr>
+</p:notes>
+</file>
+
+<file path=ppt/notesSlides/notesSlide16.xml><?xml version="1.0" encoding="utf-8"?>
+<p:notes xmlns:a="http://schemas.openxmlformats.org/drawingml/2006/main" xmlns:p="http://schemas.openxmlformats.org/presentationml/2006/main" xmlns:r="http://schemas.openxmlformats.org/officeDocument/2006/relationships">
+  <p:cSld>
+    <p:spTree>
+      <p:nvGrpSpPr>
+        <p:cNvPr id="1" name=""/>
+        <p:cNvGrpSpPr/>
+        <p:nvPr/>
+      </p:nvGrpSpPr>
+      <p:grpSpPr>
+        <a:xfrm>
+          <a:off x="0" y="0"/>
+          <a:ext cx="0" cy="0"/>
+          <a:chOff x="0" y="0"/>
+          <a:chExt cx="0" cy="0"/>
+        </a:xfrm>
+      </p:grpSpPr>
+      <p:sp>
+        <p:nvSpPr>
+          <p:cNvPr id="2" name="讲课提示"/>
+          <p:cNvSpPr txBox="1"/>
+          <p:nvPr/>
+        </p:nvSpPr>
+        <p:spPr>
+          <a:xfrm>
+            <a:off x="457200" y="457200"/>
+            <a:ext cx="6858000" cy="4800600"/>
+          </a:xfrm>
+          <a:prstGeom prst="rect">
+            <a:avLst/>
+          </a:prstGeom>
+        </p:spPr>
+        <p:txBody>
+          <a:bodyPr wrap="square"/>
+          <a:lstStyle/>
+          <a:p>
+            <a:r>
+              <a:rPr lang="zh-CN" dirty="0"/>
+              <a:t>第 64 节 · 结业检查与下一阶段</a:t>
+            </a:r>
+          </a:p>
+          <a:p>
+            <a:r>
+              <a:rPr lang="zh-CN" dirty="0"/>
+              <a:t>单元 11 · 阶段 1 总复习 + 关卡验收 · W13</a:t>
+            </a:r>
+          </a:p>
+          <a:p>
+            <a:r>
+              <a:rPr lang="zh-CN" dirty="0"/>
+              <a:t/>
+            </a:r>
+          </a:p>
+          <a:p>
+            <a:r>
+              <a:rPr lang="zh-CN" dirty="0"/>
+              <a:t>学习目标：确认四条验收是否全通过，明确阶段 1 的能力边界与下一步</a:t>
+            </a:r>
+          </a:p>
+          <a:p>
+            <a:r>
+              <a:rPr lang="zh-CN" dirty="0"/>
+              <a:t/>
+            </a:r>
+          </a:p>
+          <a:p>
+            <a:r>
+              <a:rPr lang="zh-CN" dirty="0"/>
+              <a:t>课堂实操（40 分钟，不看答案）：</a:t>
+            </a:r>
+          </a:p>
+          <a:p>
+            <a:r>
+              <a:rPr lang="zh-CN" dirty="0"/>
+              <a:t>· 对照四条硬指标逐条打勾</a:t>
+            </a:r>
+          </a:p>
+          <a:p>
+            <a:r>
+              <a:rPr lang="zh-CN" dirty="0"/>
+              <a:t>· 没通过的项定下补齐计划</a:t>
+            </a:r>
+          </a:p>
+          <a:p>
+            <a:r>
+              <a:rPr lang="zh-CN" dirty="0"/>
+              <a:t/>
+            </a:r>
+          </a:p>
+          <a:p>
+            <a:r>
+              <a:rPr lang="zh-CN" dirty="0"/>
+              <a:t>课后作业：</a:t>
+            </a:r>
+          </a:p>
+          <a:p>
+            <a:r>
+              <a:rPr lang="zh-CN" dirty="0"/>
+              <a:t>· 完成综合自测 10 题</a:t>
+            </a:r>
+          </a:p>
+          <a:p>
+            <a:r>
+              <a:rPr lang="zh-CN" dirty="0"/>
+              <a:t>· 产出：一份阶段 1 学习总结</a:t>
+            </a:r>
+          </a:p>
+          <a:p>
+            <a:r>
+              <a:rPr lang="zh-CN" dirty="0"/>
+              <a:t/>
+            </a:r>
+          </a:p>
+          <a:p>
+            <a:r>
+              <a:rPr lang="zh-CN" dirty="0"/>
+              <a:t>节奏：讲 20 分钟 → 学员自己敲 40 分钟（不看答案）→ 对讲评自查 20 分钟 → 写作业 10 分钟。</a:t>
+            </a:r>
+          </a:p>
+        </p:txBody>
+      </p:sp>
+    </p:spTree>
+  </p:cSld>
+  <p:clrMapOvr>
+    <a:masterClrMapping/>
+  </p:clrMapOvr>
+</p:notes>
+</file>
+
+<file path=ppt/notesSlides/notesSlide17.xml><?xml version="1.0" encoding="utf-8"?>
+<p:notes xmlns:a="http://schemas.openxmlformats.org/drawingml/2006/main" xmlns:p="http://schemas.openxmlformats.org/presentationml/2006/main" xmlns:r="http://schemas.openxmlformats.org/officeDocument/2006/relationships">
+  <p:cSld>
+    <p:spTree>
+      <p:nvGrpSpPr>
+        <p:cNvPr id="1" name=""/>
+        <p:cNvGrpSpPr/>
+        <p:nvPr/>
+      </p:nvGrpSpPr>
+      <p:grpSpPr>
+        <a:xfrm>
+          <a:off x="0" y="0"/>
+          <a:ext cx="0" cy="0"/>
+          <a:chOff x="0" y="0"/>
+          <a:chExt cx="0" cy="0"/>
+        </a:xfrm>
+      </p:grpSpPr>
+      <p:sp>
+        <p:nvSpPr>
+          <p:cNvPr id="2" name="讲课提示"/>
+          <p:cNvSpPr txBox="1"/>
+          <p:nvPr/>
+        </p:nvSpPr>
+        <p:spPr>
+          <a:xfrm>
+            <a:off x="457200" y="457200"/>
+            <a:ext cx="6858000" cy="4800600"/>
+          </a:xfrm>
+          <a:prstGeom prst="rect">
+            <a:avLst/>
+          </a:prstGeom>
+        </p:spPr>
+        <p:txBody>
+          <a:bodyPr wrap="square"/>
+          <a:lstStyle/>
+          <a:p>
+            <a:r>
+              <a:rPr lang="zh-CN" dirty="0"/>
+              <a:t>第 64 节 · 核心知识点：结业检查与下一阶段</a:t>
+            </a:r>
+          </a:p>
+          <a:p>
+            <a:r>
+              <a:rPr lang="zh-CN" dirty="0"/>
+              <a:t/>
+            </a:r>
+          </a:p>
+          <a:p>
+            <a:r>
+              <a:rPr lang="zh-CN" dirty="0"/>
+              <a:t>讲这一页时：先让学生说出上节课的结论，再逐块讲要点。</a:t>
+            </a:r>
+          </a:p>
+          <a:p>
+            <a:r>
+              <a:rPr lang="zh-CN" dirty="0"/>
+              <a:t>每讲完一块，问一句「这一步如果写错了，报错会长什么样？」——把错误提前讲。</a:t>
+            </a:r>
+          </a:p>
+          <a:p>
+            <a:r>
+              <a:rPr lang="zh-CN" dirty="0"/>
+              <a:t/>
+            </a:r>
+          </a:p>
+          <a:p>
+            <a:r>
+              <a:rPr lang="zh-CN" dirty="0"/>
+              <a:t>本节目标：确认四条验收是否全通过，明确阶段 1 的能力边界与下一步</a:t>
+            </a:r>
+          </a:p>
+          <a:p>
+            <a:r>
+              <a:rPr lang="zh-CN" dirty="0"/>
+              <a:t/>
+            </a:r>
+          </a:p>
+          <a:p>
+            <a:r>
+              <a:rPr lang="zh-CN" dirty="0"/>
+              <a:t>看不到懂的地方，回讲义对应小节读一遍，再回来对着这页复述一次——能讲出来才算真懂。</a:t>
+            </a:r>
+          </a:p>
+        </p:txBody>
+      </p:sp>
+    </p:spTree>
+  </p:cSld>
+  <p:clrMapOvr>
+    <a:masterClrMapping/>
+  </p:clrMapOvr>
+</p:notes>
+</file>
+
+<file path=ppt/notesSlides/notesSlide18.xml><?xml version="1.0" encoding="utf-8"?>
+<p:notes xmlns:a="http://schemas.openxmlformats.org/drawingml/2006/main" xmlns:p="http://schemas.openxmlformats.org/presentationml/2006/main" xmlns:r="http://schemas.openxmlformats.org/officeDocument/2006/relationships">
+  <p:cSld>
+    <p:spTree>
+      <p:nvGrpSpPr>
+        <p:cNvPr id="1" name=""/>
+        <p:cNvGrpSpPr/>
+        <p:nvPr/>
+      </p:nvGrpSpPr>
+      <p:grpSpPr>
+        <a:xfrm>
+          <a:off x="0" y="0"/>
+          <a:ext cx="0" cy="0"/>
+          <a:chOff x="0" y="0"/>
+          <a:chExt cx="0" cy="0"/>
+        </a:xfrm>
+      </p:grpSpPr>
+      <p:sp>
+        <p:nvSpPr>
+          <p:cNvPr id="2" name="讲课提示"/>
+          <p:cNvSpPr txBox="1"/>
+          <p:nvPr/>
+        </p:nvSpPr>
+        <p:spPr>
+          <a:xfrm>
+            <a:off x="457200" y="457200"/>
+            <a:ext cx="6858000" cy="4800600"/>
+          </a:xfrm>
+          <a:prstGeom prst="rect">
+            <a:avLst/>
+          </a:prstGeom>
+        </p:spPr>
+        <p:txBody>
+          <a:bodyPr wrap="square"/>
+          <a:lstStyle/>
+          <a:p>
+            <a:r>
+              <a:rPr lang="zh-CN" dirty="0"/>
+              <a:t>单元 11 小结 · 单元 11 · 小结</a:t>
+            </a:r>
+          </a:p>
+          <a:p>
+            <a:r>
+              <a:rPr lang="zh-CN" dirty="0"/>
+              <a:t/>
+            </a:r>
+          </a:p>
+          <a:p>
+            <a:r>
+              <a:rPr lang="zh-CN" dirty="0"/>
+              <a:t>收尾动作：让学生合上讲义，口述本单元三个最重要的结论；说不出来的，回对应课节。</a:t>
+            </a:r>
+          </a:p>
+          <a:p>
+            <a:r>
+              <a:rPr lang="zh-CN" dirty="0"/>
+              <a:t>然后当场勾一遍本单元课节的「已完成」，没打勾的进下一单元前补掉。</a:t>
+            </a:r>
+          </a:p>
+        </p:txBody>
+      </p:sp>
+    </p:spTree>
+  </p:cSld>
+  <p:clrMapOvr>
+    <a:masterClrMapping/>
+  </p:clrMapOvr>
+</p:notes>
+</file>
+
+<file path=ppt/notesSlides/notesSlide2.xml><?xml version="1.0" encoding="utf-8"?>
+<p:notes xmlns:a="http://schemas.openxmlformats.org/drawingml/2006/main" xmlns:p="http://schemas.openxmlformats.org/presentationml/2006/main" xmlns:r="http://schemas.openxmlformats.org/officeDocument/2006/relationships">
+  <p:cSld>
+    <p:spTree>
+      <p:nvGrpSpPr>
+        <p:cNvPr id="1" name=""/>
+        <p:cNvGrpSpPr/>
+        <p:nvPr/>
+      </p:nvGrpSpPr>
+      <p:grpSpPr>
+        <a:xfrm>
+          <a:off x="0" y="0"/>
+          <a:ext cx="0" cy="0"/>
+          <a:chOff x="0" y="0"/>
+          <a:chExt cx="0" cy="0"/>
+        </a:xfrm>
+      </p:grpSpPr>
+      <p:sp>
+        <p:nvSpPr>
+          <p:cNvPr id="2" name="讲课提示"/>
+          <p:cNvSpPr txBox="1"/>
+          <p:nvPr/>
+        </p:nvSpPr>
+        <p:spPr>
+          <a:xfrm>
+            <a:off x="457200" y="457200"/>
+            <a:ext cx="6858000" cy="4800600"/>
+          </a:xfrm>
+          <a:prstGeom prst="rect">
+            <a:avLst/>
+          </a:prstGeom>
+        </p:spPr>
+        <p:txBody>
+          <a:bodyPr wrap="square"/>
+          <a:lstStyle/>
+          <a:p>
+            <a:r>
+              <a:rPr lang="zh-CN" dirty="0"/>
+              <a:t>第 57 节 · 知识串讲与能力地图</a:t>
+            </a:r>
+          </a:p>
+          <a:p>
+            <a:r>
+              <a:rPr lang="zh-CN" dirty="0"/>
+              <a:t>单元 11 · 阶段 1 总复习 + 关卡验收 · W13</a:t>
+            </a:r>
+          </a:p>
+          <a:p>
+            <a:r>
+              <a:rPr lang="zh-CN" dirty="0"/>
+              <a:t/>
+            </a:r>
+          </a:p>
+          <a:p>
+            <a:r>
+              <a:rPr lang="zh-CN" dirty="0"/>
+              <a:t>学习目标：把 11 章串成一条线，能说出每个知识点解决什么问题</a:t>
+            </a:r>
+          </a:p>
+          <a:p>
+            <a:r>
+              <a:rPr lang="zh-CN" dirty="0"/>
+              <a:t/>
+            </a:r>
+          </a:p>
+          <a:p>
+            <a:r>
+              <a:rPr lang="zh-CN" dirty="0"/>
+              <a:t>课堂实操（40 分钟，不看答案）：</a:t>
+            </a:r>
+          </a:p>
+          <a:p>
+            <a:r>
+              <a:rPr lang="zh-CN" dirty="0"/>
+              <a:t>· 画一张从变量到类的知识图谱</a:t>
+            </a:r>
+          </a:p>
+          <a:p>
+            <a:r>
+              <a:rPr lang="zh-CN" dirty="0"/>
+              <a:t>· 互相考 10 个最易错的点</a:t>
+            </a:r>
+          </a:p>
+          <a:p>
+            <a:r>
+              <a:rPr lang="zh-CN" dirty="0"/>
+              <a:t/>
+            </a:r>
+          </a:p>
+          <a:p>
+            <a:r>
+              <a:rPr lang="zh-CN" dirty="0"/>
+              <a:t>课后作业：</a:t>
+            </a:r>
+          </a:p>
+          <a:p>
+            <a:r>
+              <a:rPr lang="zh-CN" dirty="0"/>
+              <a:t>· 完成单元 11 动手练习基础档</a:t>
+            </a:r>
+          </a:p>
+          <a:p>
+            <a:r>
+              <a:rPr lang="zh-CN" dirty="0"/>
+              <a:t/>
+            </a:r>
+          </a:p>
+          <a:p>
+            <a:r>
+              <a:rPr lang="zh-CN" dirty="0"/>
+              <a:t>节奏：讲 20 分钟 → 学员自己敲 40 分钟（不看答案）→ 对讲评自查 20 分钟 → 写作业 10 分钟。</a:t>
+            </a:r>
+          </a:p>
+        </p:txBody>
+      </p:sp>
+    </p:spTree>
+  </p:cSld>
+  <p:clrMapOvr>
+    <a:masterClrMapping/>
+  </p:clrMapOvr>
+</p:notes>
+</file>
+
+<file path=ppt/notesSlides/notesSlide3.xml><?xml version="1.0" encoding="utf-8"?>
+<p:notes xmlns:a="http://schemas.openxmlformats.org/drawingml/2006/main" xmlns:p="http://schemas.openxmlformats.org/presentationml/2006/main" xmlns:r="http://schemas.openxmlformats.org/officeDocument/2006/relationships">
+  <p:cSld>
+    <p:spTree>
+      <p:nvGrpSpPr>
+        <p:cNvPr id="1" name=""/>
+        <p:cNvGrpSpPr/>
+        <p:nvPr/>
+      </p:nvGrpSpPr>
+      <p:grpSpPr>
+        <a:xfrm>
+          <a:off x="0" y="0"/>
+          <a:ext cx="0" cy="0"/>
+          <a:chOff x="0" y="0"/>
+          <a:chExt cx="0" cy="0"/>
+        </a:xfrm>
+      </p:grpSpPr>
+      <p:sp>
+        <p:nvSpPr>
+          <p:cNvPr id="2" name="讲课提示"/>
+          <p:cNvSpPr txBox="1"/>
+          <p:nvPr/>
+        </p:nvSpPr>
+        <p:spPr>
+          <a:xfrm>
+            <a:off x="457200" y="457200"/>
+            <a:ext cx="6858000" cy="4800600"/>
+          </a:xfrm>
+          <a:prstGeom prst="rect">
+            <a:avLst/>
+          </a:prstGeom>
+        </p:spPr>
+        <p:txBody>
+          <a:bodyPr wrap="square"/>
+          <a:lstStyle/>
+          <a:p>
+            <a:r>
+              <a:rPr lang="zh-CN" dirty="0"/>
+              <a:t>第 57 节 · 核心知识点：知识串讲与能力地图</a:t>
+            </a:r>
+          </a:p>
+          <a:p>
+            <a:r>
+              <a:rPr lang="zh-CN" dirty="0"/>
+              <a:t/>
+            </a:r>
+          </a:p>
+          <a:p>
+            <a:r>
+              <a:rPr lang="zh-CN" dirty="0"/>
+              <a:t>讲这一页时：先让学生说出上节课的结论，再逐块讲要点。</a:t>
+            </a:r>
+          </a:p>
+          <a:p>
+            <a:r>
+              <a:rPr lang="zh-CN" dirty="0"/>
+              <a:t>每讲完一块，问一句「这一步如果写错了，报错会长什么样？」——把错误提前讲。</a:t>
+            </a:r>
+          </a:p>
+          <a:p>
+            <a:r>
+              <a:rPr lang="zh-CN" dirty="0"/>
+              <a:t/>
+            </a:r>
+          </a:p>
+          <a:p>
+            <a:r>
+              <a:rPr lang="zh-CN" dirty="0"/>
+              <a:t>本节目标：把 11 章串成一条线，能说出每个知识点解决什么问题</a:t>
+            </a:r>
+          </a:p>
+          <a:p>
+            <a:r>
+              <a:rPr lang="zh-CN" dirty="0"/>
+              <a:t/>
+            </a:r>
+          </a:p>
+          <a:p>
+            <a:r>
+              <a:rPr lang="zh-CN" dirty="0"/>
+              <a:t>看不到懂的地方，回讲义对应小节读一遍，再回来对着这页复述一次——能讲出来才算真懂。</a:t>
+            </a:r>
+          </a:p>
+        </p:txBody>
+      </p:sp>
+    </p:spTree>
+  </p:cSld>
+  <p:clrMapOvr>
+    <a:masterClrMapping/>
+  </p:clrMapOvr>
+</p:notes>
+</file>
+
+<file path=ppt/notesSlides/notesSlide4.xml><?xml version="1.0" encoding="utf-8"?>
+<p:notes xmlns:a="http://schemas.openxmlformats.org/drawingml/2006/main" xmlns:p="http://schemas.openxmlformats.org/presentationml/2006/main" xmlns:r="http://schemas.openxmlformats.org/officeDocument/2006/relationships">
+  <p:cSld>
+    <p:spTree>
+      <p:nvGrpSpPr>
+        <p:cNvPr id="1" name=""/>
+        <p:cNvGrpSpPr/>
+        <p:nvPr/>
+      </p:nvGrpSpPr>
+      <p:grpSpPr>
+        <a:xfrm>
+          <a:off x="0" y="0"/>
+          <a:ext cx="0" cy="0"/>
+          <a:chOff x="0" y="0"/>
+          <a:chExt cx="0" cy="0"/>
+        </a:xfrm>
+      </p:grpSpPr>
+      <p:sp>
+        <p:nvSpPr>
+          <p:cNvPr id="2" name="讲课提示"/>
+          <p:cNvSpPr txBox="1"/>
+          <p:nvPr/>
+        </p:nvSpPr>
+        <p:spPr>
+          <a:xfrm>
+            <a:off x="457200" y="457200"/>
+            <a:ext cx="6858000" cy="4800600"/>
+          </a:xfrm>
+          <a:prstGeom prst="rect">
+            <a:avLst/>
+          </a:prstGeom>
+        </p:spPr>
+        <p:txBody>
+          <a:bodyPr wrap="square"/>
+          <a:lstStyle/>
+          <a:p>
+            <a:r>
+              <a:rPr lang="zh-CN" dirty="0"/>
+              <a:t>第 58 节 · 排错思路与项目骨架</a:t>
+            </a:r>
+          </a:p>
+          <a:p>
+            <a:r>
+              <a:rPr lang="zh-CN" dirty="0"/>
+              <a:t>单元 11 · 阶段 1 总复习 + 关卡验收 · W13</a:t>
+            </a:r>
+          </a:p>
+          <a:p>
+            <a:r>
+              <a:rPr lang="zh-CN" dirty="0"/>
+              <a:t/>
+            </a:r>
+          </a:p>
+          <a:p>
+            <a:r>
+              <a:rPr lang="zh-CN" dirty="0"/>
+              <a:t>学习目标：掌握读 traceback 的方法，能把模糊需求拆成步骤和函数</a:t>
+            </a:r>
+          </a:p>
+          <a:p>
+            <a:r>
+              <a:rPr lang="zh-CN" dirty="0"/>
+              <a:t/>
+            </a:r>
+          </a:p>
+          <a:p>
+            <a:r>
+              <a:rPr lang="zh-CN" dirty="0"/>
+              <a:t>课堂实操（40 分钟，不看答案）：</a:t>
+            </a:r>
+          </a:p>
+          <a:p>
+            <a:r>
+              <a:rPr lang="zh-CN" dirty="0"/>
+              <a:t>· 现场给一段含 3 个 bug 的脚本限时 15 分钟修复</a:t>
+            </a:r>
+          </a:p>
+          <a:p>
+            <a:r>
+              <a:rPr lang="zh-CN" dirty="0"/>
+              <a:t>· 现场把一个模糊需求拆成步骤清单</a:t>
+            </a:r>
+          </a:p>
+          <a:p>
+            <a:r>
+              <a:rPr lang="zh-CN" dirty="0"/>
+              <a:t/>
+            </a:r>
+          </a:p>
+          <a:p>
+            <a:r>
+              <a:rPr lang="zh-CN" dirty="0"/>
+              <a:t>课后作业：</a:t>
+            </a:r>
+          </a:p>
+          <a:p>
+            <a:r>
+              <a:rPr lang="zh-CN" dirty="0"/>
+              <a:t>· 完成动手练习进阶档 11-1 ~ 11-2</a:t>
+            </a:r>
+          </a:p>
+          <a:p>
+            <a:r>
+              <a:rPr lang="zh-CN" dirty="0"/>
+              <a:t/>
+            </a:r>
+          </a:p>
+          <a:p>
+            <a:r>
+              <a:rPr lang="zh-CN" dirty="0"/>
+              <a:t>节奏：讲 20 分钟 → 学员自己敲 40 分钟（不看答案）→ 对讲评自查 20 分钟 → 写作业 10 分钟。</a:t>
+            </a:r>
+          </a:p>
+        </p:txBody>
+      </p:sp>
+    </p:spTree>
+  </p:cSld>
+  <p:clrMapOvr>
+    <a:masterClrMapping/>
+  </p:clrMapOvr>
+</p:notes>
+</file>
+
+<file path=ppt/notesSlides/notesSlide5.xml><?xml version="1.0" encoding="utf-8"?>
+<p:notes xmlns:a="http://schemas.openxmlformats.org/drawingml/2006/main" xmlns:p="http://schemas.openxmlformats.org/presentationml/2006/main" xmlns:r="http://schemas.openxmlformats.org/officeDocument/2006/relationships">
+  <p:cSld>
+    <p:spTree>
+      <p:nvGrpSpPr>
+        <p:cNvPr id="1" name=""/>
+        <p:cNvGrpSpPr/>
+        <p:nvPr/>
+      </p:nvGrpSpPr>
+      <p:grpSpPr>
+        <a:xfrm>
+          <a:off x="0" y="0"/>
+          <a:ext cx="0" cy="0"/>
+          <a:chOff x="0" y="0"/>
+          <a:chExt cx="0" cy="0"/>
+        </a:xfrm>
+      </p:grpSpPr>
+      <p:sp>
+        <p:nvSpPr>
+          <p:cNvPr id="2" name="讲课提示"/>
+          <p:cNvSpPr txBox="1"/>
+          <p:nvPr/>
+        </p:nvSpPr>
+        <p:spPr>
+          <a:xfrm>
+            <a:off x="457200" y="457200"/>
+            <a:ext cx="6858000" cy="4800600"/>
+          </a:xfrm>
+          <a:prstGeom prst="rect">
+            <a:avLst/>
+          </a:prstGeom>
+        </p:spPr>
+        <p:txBody>
+          <a:bodyPr wrap="square"/>
+          <a:lstStyle/>
+          <a:p>
+            <a:r>
+              <a:rPr lang="zh-CN" dirty="0"/>
+              <a:t>第 58 节 · 核心知识点：排错思路与项目骨架</a:t>
+            </a:r>
+          </a:p>
+          <a:p>
+            <a:r>
+              <a:rPr lang="zh-CN" dirty="0"/>
+              <a:t/>
+            </a:r>
+          </a:p>
+          <a:p>
+            <a:r>
+              <a:rPr lang="zh-CN" dirty="0"/>
+              <a:t>讲这一页时：先让学生说出上节课的结论，再逐块讲要点。</a:t>
+            </a:r>
+          </a:p>
+          <a:p>
+            <a:r>
+              <a:rPr lang="zh-CN" dirty="0"/>
+              <a:t>每讲完一块，问一句「这一步如果写错了，报错会长什么样？」——把错误提前讲。</a:t>
+            </a:r>
+          </a:p>
+          <a:p>
+            <a:r>
+              <a:rPr lang="zh-CN" dirty="0"/>
+              <a:t/>
+            </a:r>
+          </a:p>
+          <a:p>
+            <a:r>
+              <a:rPr lang="zh-CN" dirty="0"/>
+              <a:t>本节目标：掌握读 traceback 的方法，能把模糊需求拆成步骤和函数</a:t>
+            </a:r>
+          </a:p>
+          <a:p>
+            <a:r>
+              <a:rPr lang="zh-CN" dirty="0"/>
+              <a:t/>
+            </a:r>
+          </a:p>
+          <a:p>
+            <a:r>
+              <a:rPr lang="zh-CN" dirty="0"/>
+              <a:t>看不到懂的地方，回讲义对应小节读一遍，再回来对着这页复述一次——能讲出来才算真懂。</a:t>
+            </a:r>
+          </a:p>
+        </p:txBody>
+      </p:sp>
+    </p:spTree>
+  </p:cSld>
+  <p:clrMapOvr>
+    <a:masterClrMapping/>
+  </p:clrMapOvr>
+</p:notes>
+</file>
+
+<file path=ppt/notesSlides/notesSlide6.xml><?xml version="1.0" encoding="utf-8"?>
+<p:notes xmlns:a="http://schemas.openxmlformats.org/drawingml/2006/main" xmlns:p="http://schemas.openxmlformats.org/presentationml/2006/main" xmlns:r="http://schemas.openxmlformats.org/officeDocument/2006/relationships">
+  <p:cSld>
+    <p:spTree>
+      <p:nvGrpSpPr>
+        <p:cNvPr id="1" name=""/>
+        <p:cNvGrpSpPr/>
+        <p:nvPr/>
+      </p:nvGrpSpPr>
+      <p:grpSpPr>
+        <a:xfrm>
+          <a:off x="0" y="0"/>
+          <a:ext cx="0" cy="0"/>
+          <a:chOff x="0" y="0"/>
+          <a:chExt cx="0" cy="0"/>
+        </a:xfrm>
+      </p:grpSpPr>
+      <p:sp>
+        <p:nvSpPr>
+          <p:cNvPr id="2" name="讲课提示"/>
+          <p:cNvSpPr txBox="1"/>
+          <p:nvPr/>
+        </p:nvSpPr>
+        <p:spPr>
+          <a:xfrm>
+            <a:off x="457200" y="457200"/>
+            <a:ext cx="6858000" cy="4800600"/>
+          </a:xfrm>
+          <a:prstGeom prst="rect">
+            <a:avLst/>
+          </a:prstGeom>
+        </p:spPr>
+        <p:txBody>
+          <a:bodyPr wrap="square"/>
+          <a:lstStyle/>
+          <a:p>
+            <a:r>
+              <a:rPr lang="zh-CN" dirty="0"/>
+              <a:t>第 59 节 · 四个复习示例串讲</a:t>
+            </a:r>
+          </a:p>
+          <a:p>
+            <a:r>
+              <a:rPr lang="zh-CN" dirty="0"/>
+              <a:t>单元 11 · 阶段 1 总复习 + 关卡验收 · W13</a:t>
+            </a:r>
+          </a:p>
+          <a:p>
+            <a:r>
+              <a:rPr lang="zh-CN" dirty="0"/>
+              <a:t/>
+            </a:r>
+          </a:p>
+          <a:p>
+            <a:r>
+              <a:rPr lang="zh-CN" dirty="0"/>
+              <a:t>学习目标：把类、文件异常、pytest 三块复习串成可运行的完整程序</a:t>
+            </a:r>
+          </a:p>
+          <a:p>
+            <a:r>
+              <a:rPr lang="zh-CN" dirty="0"/>
+              <a:t/>
+            </a:r>
+          </a:p>
+          <a:p>
+            <a:r>
+              <a:rPr lang="zh-CN" dirty="0"/>
+              <a:t>课堂实操（40 分钟，不看答案）：</a:t>
+            </a:r>
+          </a:p>
+          <a:p>
+            <a:r>
+              <a:rPr lang="zh-CN" dirty="0"/>
+              <a:t>· 对照示例跑通四个复习程序</a:t>
+            </a:r>
+          </a:p>
+          <a:p>
+            <a:r>
+              <a:rPr lang="zh-CN" dirty="0"/>
+              <a:t>· 讲清每个程序综合了哪几章</a:t>
+            </a:r>
+          </a:p>
+          <a:p>
+            <a:r>
+              <a:rPr lang="zh-CN" dirty="0"/>
+              <a:t/>
+            </a:r>
+          </a:p>
+          <a:p>
+            <a:r>
+              <a:rPr lang="zh-CN" dirty="0"/>
+              <a:t>课后作业：</a:t>
+            </a:r>
+          </a:p>
+          <a:p>
+            <a:r>
+              <a:rPr lang="zh-CN" dirty="0"/>
+              <a:t>· 把四个复习程序各改一个需求</a:t>
+            </a:r>
+          </a:p>
+          <a:p>
+            <a:r>
+              <a:rPr lang="zh-CN" dirty="0"/>
+              <a:t/>
+            </a:r>
+          </a:p>
+          <a:p>
+            <a:r>
+              <a:rPr lang="zh-CN" dirty="0"/>
+              <a:t>节奏：讲 20 分钟 → 学员自己敲 40 分钟（不看答案）→ 对讲评自查 20 分钟 → 写作业 10 分钟。</a:t>
+            </a:r>
+          </a:p>
+        </p:txBody>
+      </p:sp>
+    </p:spTree>
+  </p:cSld>
+  <p:clrMapOvr>
+    <a:masterClrMapping/>
+  </p:clrMapOvr>
+</p:notes>
+</file>
+
+<file path=ppt/notesSlides/notesSlide7.xml><?xml version="1.0" encoding="utf-8"?>
+<p:notes xmlns:a="http://schemas.openxmlformats.org/drawingml/2006/main" xmlns:p="http://schemas.openxmlformats.org/presentationml/2006/main" xmlns:r="http://schemas.openxmlformats.org/officeDocument/2006/relationships">
+  <p:cSld>
+    <p:spTree>
+      <p:nvGrpSpPr>
+        <p:cNvPr id="1" name=""/>
+        <p:cNvGrpSpPr/>
+        <p:nvPr/>
+      </p:nvGrpSpPr>
+      <p:grpSpPr>
+        <a:xfrm>
+          <a:off x="0" y="0"/>
+          <a:ext cx="0" cy="0"/>
+          <a:chOff x="0" y="0"/>
+          <a:chExt cx="0" cy="0"/>
+        </a:xfrm>
+      </p:grpSpPr>
+      <p:sp>
+        <p:nvSpPr>
+          <p:cNvPr id="2" name="讲课提示"/>
+          <p:cNvSpPr txBox="1"/>
+          <p:nvPr/>
+        </p:nvSpPr>
+        <p:spPr>
+          <a:xfrm>
+            <a:off x="457200" y="457200"/>
+            <a:ext cx="6858000" cy="4800600"/>
+          </a:xfrm>
+          <a:prstGeom prst="rect">
+            <a:avLst/>
+          </a:prstGeom>
+        </p:spPr>
+        <p:txBody>
+          <a:bodyPr wrap="square"/>
+          <a:lstStyle/>
+          <a:p>
+            <a:r>
+              <a:rPr lang="zh-CN" dirty="0"/>
+              <a:t>第 59 节 · 核心知识点：四个复习示例串讲</a:t>
+            </a:r>
+          </a:p>
+          <a:p>
+            <a:r>
+              <a:rPr lang="zh-CN" dirty="0"/>
+              <a:t/>
+            </a:r>
+          </a:p>
+          <a:p>
+            <a:r>
+              <a:rPr lang="zh-CN" dirty="0"/>
+              <a:t>讲这一页时：先让学生说出上节课的结论，再逐块讲要点。</a:t>
+            </a:r>
+          </a:p>
+          <a:p>
+            <a:r>
+              <a:rPr lang="zh-CN" dirty="0"/>
+              <a:t>每讲完一块，问一句「这一步如果写错了，报错会长什么样？」——把错误提前讲。</a:t>
+            </a:r>
+          </a:p>
+          <a:p>
+            <a:r>
+              <a:rPr lang="zh-CN" dirty="0"/>
+              <a:t/>
+            </a:r>
+          </a:p>
+          <a:p>
+            <a:r>
+              <a:rPr lang="zh-CN" dirty="0"/>
+              <a:t>本节目标：把类、文件异常、pytest 三块复习串成可运行的完整程序</a:t>
+            </a:r>
+          </a:p>
+          <a:p>
+            <a:r>
+              <a:rPr lang="zh-CN" dirty="0"/>
+              <a:t/>
+            </a:r>
+          </a:p>
+          <a:p>
+            <a:r>
+              <a:rPr lang="zh-CN" dirty="0"/>
+              <a:t>看不到懂的地方，回讲义对应小节读一遍，再回来对着这页复述一次——能讲出来才算真懂。</a:t>
+            </a:r>
+          </a:p>
+        </p:txBody>
+      </p:sp>
+    </p:spTree>
+  </p:cSld>
+  <p:clrMapOvr>
+    <a:masterClrMapping/>
+  </p:clrMapOvr>
+</p:notes>
+</file>
+
+<file path=ppt/notesSlides/notesSlide8.xml><?xml version="1.0" encoding="utf-8"?>
+<p:notes xmlns:a="http://schemas.openxmlformats.org/drawingml/2006/main" xmlns:p="http://schemas.openxmlformats.org/presentationml/2006/main" xmlns:r="http://schemas.openxmlformats.org/officeDocument/2006/relationships">
+  <p:cSld>
+    <p:spTree>
+      <p:nvGrpSpPr>
+        <p:cNvPr id="1" name=""/>
+        <p:cNvGrpSpPr/>
+        <p:nvPr/>
+      </p:nvGrpSpPr>
+      <p:grpSpPr>
+        <a:xfrm>
+          <a:off x="0" y="0"/>
+          <a:ext cx="0" cy="0"/>
+          <a:chOff x="0" y="0"/>
+          <a:chExt cx="0" cy="0"/>
+        </a:xfrm>
+      </p:grpSpPr>
+      <p:sp>
+        <p:nvSpPr>
+          <p:cNvPr id="2" name="讲课提示"/>
+          <p:cNvSpPr txBox="1"/>
+          <p:nvPr/>
+        </p:nvSpPr>
+        <p:spPr>
+          <a:xfrm>
+            <a:off x="457200" y="457200"/>
+            <a:ext cx="6858000" cy="4800600"/>
+          </a:xfrm>
+          <a:prstGeom prst="rect">
+            <a:avLst/>
+          </a:prstGeom>
+        </p:spPr>
+        <p:txBody>
+          <a:bodyPr wrap="square"/>
+          <a:lstStyle/>
+          <a:p>
+            <a:r>
+              <a:rPr lang="zh-CN" dirty="0"/>
+              <a:t>第 60 节 · ★ 综合项目 1：待办管理器</a:t>
+            </a:r>
+          </a:p>
+          <a:p>
+            <a:r>
+              <a:rPr lang="zh-CN" dirty="0"/>
+              <a:t>单元 11 · 阶段 1 总复习 + 关卡验收 · W13</a:t>
+            </a:r>
+          </a:p>
+          <a:p>
+            <a:r>
+              <a:rPr lang="zh-CN" dirty="0"/>
+              <a:t/>
+            </a:r>
+          </a:p>
+          <a:p>
+            <a:r>
+              <a:rPr lang="zh-CN" dirty="0"/>
+              <a:t>学习目标：独立写出一个可增删改查并能存盘的待办管理器</a:t>
+            </a:r>
+          </a:p>
+          <a:p>
+            <a:r>
+              <a:rPr lang="zh-CN" dirty="0"/>
+              <a:t/>
+            </a:r>
+          </a:p>
+          <a:p>
+            <a:r>
+              <a:rPr lang="zh-CN" dirty="0"/>
+              <a:t>课堂实操（40 分钟，不看答案）：</a:t>
+            </a:r>
+          </a:p>
+          <a:p>
+            <a:r>
+              <a:rPr lang="zh-CN" dirty="0"/>
+              <a:t>· 先限时 40 分钟自己写，再看参考答案对照</a:t>
+            </a:r>
+          </a:p>
+          <a:p>
+            <a:r>
+              <a:rPr lang="zh-CN" dirty="0"/>
+              <a:t>· 逐行读懂参考答案的实现思路</a:t>
+            </a:r>
+          </a:p>
+          <a:p>
+            <a:r>
+              <a:rPr lang="zh-CN" dirty="0"/>
+              <a:t/>
+            </a:r>
+          </a:p>
+          <a:p>
+            <a:r>
+              <a:rPr lang="zh-CN" dirty="0"/>
+              <a:t>课后作业：</a:t>
+            </a:r>
+          </a:p>
+          <a:p>
+            <a:r>
+              <a:rPr lang="zh-CN" dirty="0"/>
+              <a:t>· 完成综合项目 1 并写 3 条测试</a:t>
+            </a:r>
+          </a:p>
+          <a:p>
+            <a:r>
+              <a:rPr lang="zh-CN" dirty="0"/>
+              <a:t/>
+            </a:r>
+          </a:p>
+          <a:p>
+            <a:r>
+              <a:rPr lang="zh-CN" dirty="0"/>
+              <a:t>节奏：讲 20 分钟 → 学员自己敲 40 分钟（不看答案）→ 对讲评自查 20 分钟 → 写作业 10 分钟。</a:t>
+            </a:r>
+          </a:p>
+        </p:txBody>
+      </p:sp>
+    </p:spTree>
+  </p:cSld>
+  <p:clrMapOvr>
+    <a:masterClrMapping/>
+  </p:clrMapOvr>
+</p:notes>
+</file>
+
+<file path=ppt/notesSlides/notesSlide9.xml><?xml version="1.0" encoding="utf-8"?>
+<p:notes xmlns:a="http://schemas.openxmlformats.org/drawingml/2006/main" xmlns:p="http://schemas.openxmlformats.org/presentationml/2006/main" xmlns:r="http://schemas.openxmlformats.org/officeDocument/2006/relationships">
+  <p:cSld>
+    <p:spTree>
+      <p:nvGrpSpPr>
+        <p:cNvPr id="1" name=""/>
+        <p:cNvGrpSpPr/>
+        <p:nvPr/>
+      </p:nvGrpSpPr>
+      <p:grpSpPr>
+        <a:xfrm>
+          <a:off x="0" y="0"/>
+          <a:ext cx="0" cy="0"/>
+          <a:chOff x="0" y="0"/>
+          <a:chExt cx="0" cy="0"/>
+        </a:xfrm>
+      </p:grpSpPr>
+      <p:sp>
+        <p:nvSpPr>
+          <p:cNvPr id="2" name="讲课提示"/>
+          <p:cNvSpPr txBox="1"/>
+          <p:nvPr/>
+        </p:nvSpPr>
+        <p:spPr>
+          <a:xfrm>
+            <a:off x="457200" y="457200"/>
+            <a:ext cx="6858000" cy="4800600"/>
+          </a:xfrm>
+          <a:prstGeom prst="rect">
+            <a:avLst/>
+          </a:prstGeom>
+        </p:spPr>
+        <p:txBody>
+          <a:bodyPr wrap="square"/>
+          <a:lstStyle/>
+          <a:p>
+            <a:r>
+              <a:rPr lang="zh-CN" dirty="0"/>
+              <a:t>第 60 节 · 核心知识点：★ 综合项目 1：待办管理器</a:t>
+            </a:r>
+          </a:p>
+          <a:p>
+            <a:r>
+              <a:rPr lang="zh-CN" dirty="0"/>
+              <a:t/>
+            </a:r>
+          </a:p>
+          <a:p>
+            <a:r>
+              <a:rPr lang="zh-CN" dirty="0"/>
+              <a:t>讲这一页时：先让学生说出上节课的结论，再逐块讲要点。</a:t>
+            </a:r>
+          </a:p>
+          <a:p>
+            <a:r>
+              <a:rPr lang="zh-CN" dirty="0"/>
+              <a:t>每讲完一块，问一句「这一步如果写错了，报错会长什么样？」——把错误提前讲。</a:t>
+            </a:r>
+          </a:p>
+          <a:p>
+            <a:r>
+              <a:rPr lang="zh-CN" dirty="0"/>
+              <a:t/>
+            </a:r>
+          </a:p>
+          <a:p>
+            <a:r>
+              <a:rPr lang="zh-CN" dirty="0"/>
+              <a:t>本节目标：独立写出一个可增删改查并能存盘的待办管理器</a:t>
+            </a:r>
+          </a:p>
+          <a:p>
+            <a:r>
+              <a:rPr lang="zh-CN" dirty="0"/>
+              <a:t/>
+            </a:r>
+          </a:p>
+          <a:p>
+            <a:r>
+              <a:rPr lang="zh-CN" dirty="0"/>
+              <a:t>看不到懂的地方，回讲义对应小节读一遍，再回来对着这页复述一次——能讲出来才算真懂。</a:t>
+            </a:r>
+          </a:p>
+        </p:txBody>
+      </p:sp>
+    </p:spTree>
+  </p:cSld>
+  <p:clrMapOvr>
+    <a:masterClrMapping/>
+  </p:clrMapOvr>
+</p:notes>
 </file>
 
 <file path=ppt/slideLayouts/slideLayout1.xml><?xml version="1.0" encoding="utf-8"?>
